--- a/MDF_Proposal_LogicalSystems_2026-05-28.pptx
+++ b/MDF_Proposal_LogicalSystems_2026-05-28.pptx
@@ -8789,7 +8789,7 @@
                 <a:ea typeface="Calibri" pitchFamily="34" charset="-122"/>
                 <a:cs typeface="Calibri" pitchFamily="34" charset="-120"/>
               </a:rPr>
-              <a:t>per month  ·  $12,000 annually  ·  Month-to-Month</a:t>
+              <a:t>per month  ·  $12,000 annually  ·  Month-to-Month  ·  30-Day Notice</a:t>
             </a:r>
             <a:endParaRPr lang="en-US" sz="950" dirty="0"/>
           </a:p>

--- a/MDF_Proposal_LogicalSystems_2026-05-28.pptx
+++ b/MDF_Proposal_LogicalSystems_2026-05-28.pptx
@@ -1566,6 +1566,20 @@
 <file path=ppt/slides/slide1.xml><?xml version="1.0" encoding="utf-8"?>
 <p:sld xmlns:a="http://schemas.openxmlformats.org/drawingml/2006/main" xmlns:r="http://schemas.openxmlformats.org/officeDocument/2006/relationships" xmlns:p="http://schemas.openxmlformats.org/presentationml/2006/main">
   <p:cSld name="Slide 1">
+    <p:bg>
+      <p:bgPr>
+        <a:blipFill dpi="0" rotWithShape="1">
+          <a:blip r:embed="rId1">
+            <a:lum/>
+          </a:blip>
+          <a:srcRect/>
+          <a:stretch>
+            <a:fillRect/>
+          </a:stretch>
+        </a:blipFill>
+        <a:effectLst/>
+      </p:bgPr>
+    </p:bg>
     <p:spTree>
       <p:nvGrpSpPr>
         <p:cNvPr id="1" name=""/>
@@ -1582,31 +1596,7 @@
       </p:grpSpPr>
       <p:pic>
         <p:nvPicPr>
-          <p:cNvPr id="2" name="Image 0" descr="./cover_photo.jpg">    </p:cNvPr>
-          <p:cNvPicPr>
-            <a:picLocks noChangeAspect="1"/>
-          </p:cNvPicPr>
-          <p:nvPr/>
-        </p:nvPicPr>
-        <p:blipFill>
-          <a:blip r:embed="rId1"/>
-          <a:stretch>
-            <a:fillRect/>
-          </a:stretch>
-        </p:blipFill>
-        <p:spPr>
-          <a:xfrm>
-            <a:off x="0" y="0"/>
-            <a:ext cx="9144000" cy="5143500"/>
-          </a:xfrm>
-          <a:prstGeom prst="rect">
-            <a:avLst/>
-          </a:prstGeom>
-        </p:spPr>
-      </p:pic>
-      <p:pic>
-        <p:nvPicPr>
-          <p:cNvPr id="3" name="Image 1" descr="./mdf_logo_all_white.png">    </p:cNvPr>
+          <p:cNvPr id="2" name="Image 0" descr="./mdf_logo_all_white.png">    </p:cNvPr>
           <p:cNvPicPr>
             <a:picLocks noChangeAspect="1"/>
           </p:cNvPicPr>
@@ -1620,8 +1610,8 @@
         </p:blipFill>
         <p:spPr>
           <a:xfrm>
-            <a:off x="347472" y="274320"/>
-            <a:ext cx="1005840" cy="594360"/>
+            <a:off x="347472" y="256032"/>
+            <a:ext cx="1051560" cy="621792"/>
           </a:xfrm>
           <a:prstGeom prst="rect">
             <a:avLst/>
@@ -1630,14 +1620,14 @@
       </p:pic>
       <p:sp>
         <p:nvSpPr>
-          <p:cNvPr id="4" name="Text 0"/>
-          <p:cNvSpPr/>
-          <p:nvPr/>
-        </p:nvSpPr>
-        <p:spPr>
-          <a:xfrm>
-            <a:off x="457200" y="3246120"/>
-            <a:ext cx="5486400" cy="182880"/>
+          <p:cNvPr id="3" name="Text 0"/>
+          <p:cNvSpPr/>
+          <p:nvPr/>
+        </p:nvSpPr>
+        <p:spPr>
+          <a:xfrm>
+            <a:off x="457200" y="3154680"/>
+            <a:ext cx="6400800" cy="182880"/>
           </a:xfrm>
           <a:prstGeom prst="rect">
             <a:avLst/>
@@ -1669,14 +1659,14 @@
       </p:sp>
       <p:sp>
         <p:nvSpPr>
-          <p:cNvPr id="5" name="Text 1"/>
-          <p:cNvSpPr/>
-          <p:nvPr/>
-        </p:nvSpPr>
-        <p:spPr>
-          <a:xfrm>
-            <a:off x="457200" y="3438144"/>
-            <a:ext cx="7315200" cy="749808"/>
+          <p:cNvPr id="4" name="Text 1"/>
+          <p:cNvSpPr/>
+          <p:nvPr/>
+        </p:nvSpPr>
+        <p:spPr>
+          <a:xfrm>
+            <a:off x="457200" y="3346704"/>
+            <a:ext cx="7772400" cy="822960"/>
           </a:xfrm>
           <a:prstGeom prst="rect">
             <a:avLst/>
@@ -1692,7 +1682,7 @@
               <a:buNone/>
             </a:pPr>
             <a:r>
-              <a:rPr lang="en-US" sz="3400" b="1" dirty="0">
+              <a:rPr lang="en-US" sz="3600" b="1" dirty="0">
                 <a:solidFill>
                   <a:srgbClr val="FFFFFF"/>
                 </a:solidFill>
@@ -1702,20 +1692,20 @@
               </a:rPr>
               <a:t>Logical Systems Inc.</a:t>
             </a:r>
-            <a:endParaRPr lang="en-US" sz="3400" dirty="0"/>
-          </a:p>
-        </p:txBody>
-      </p:sp>
-      <p:sp>
-        <p:nvSpPr>
-          <p:cNvPr id="6" name="Shape 2"/>
+            <a:endParaRPr lang="en-US" sz="3600" dirty="0"/>
+          </a:p>
+        </p:txBody>
+      </p:sp>
+      <p:sp>
+        <p:nvSpPr>
+          <p:cNvPr id="5" name="Shape 2"/>
           <p:cNvSpPr/>
           <p:nvPr/>
         </p:nvSpPr>
         <p:spPr>
           <a:xfrm>
             <a:off x="457200" y="4187952"/>
-            <a:ext cx="6400800" cy="16459"/>
+            <a:ext cx="6583680" cy="16459"/>
           </a:xfrm>
           <a:prstGeom prst="rect">
             <a:avLst/>
@@ -1733,14 +1723,14 @@
       </p:sp>
       <p:sp>
         <p:nvSpPr>
-          <p:cNvPr id="7" name="Text 3"/>
-          <p:cNvSpPr/>
-          <p:nvPr/>
-        </p:nvSpPr>
-        <p:spPr>
-          <a:xfrm>
-            <a:off x="457200" y="4224528"/>
-            <a:ext cx="8229600" cy="201168"/>
+          <p:cNvPr id="6" name="Text 3"/>
+          <p:cNvSpPr/>
+          <p:nvPr/>
+        </p:nvSpPr>
+        <p:spPr>
+          <a:xfrm>
+            <a:off x="457200" y="4242816"/>
+            <a:ext cx="8412480" cy="219456"/>
           </a:xfrm>
           <a:prstGeom prst="rect">
             <a:avLst/>
@@ -1756,7 +1746,7 @@
               <a:buNone/>
             </a:pPr>
             <a:r>
-              <a:rPr lang="en-US" sz="900" dirty="0">
+              <a:rPr lang="en-US" sz="950" dirty="0">
                 <a:solidFill>
                   <a:srgbClr val="8B9BAD"/>
                 </a:solidFill>
@@ -1766,7 +1756,7 @@
               </a:rPr>
               <a:t>Facility Services Proposal  ·  April Bocox, Health and Safety Coordinator  ·  May 28, 2026</a:t>
             </a:r>
-            <a:endParaRPr lang="en-US" sz="900" dirty="0"/>
+            <a:endParaRPr lang="en-US" sz="950" dirty="0"/>
           </a:p>
         </p:txBody>
       </p:sp>
@@ -1836,7 +1826,7 @@
         <p:spPr>
           <a:xfrm>
             <a:off x="457200" y="91440"/>
-            <a:ext cx="7315200" cy="164592"/>
+            <a:ext cx="6858000" cy="164592"/>
           </a:xfrm>
           <a:prstGeom prst="rect">
             <a:avLst/>
@@ -1874,8 +1864,8 @@
         </p:nvSpPr>
         <p:spPr>
           <a:xfrm>
-            <a:off x="8686800" y="73152"/>
-            <a:ext cx="365760" cy="164592"/>
+            <a:off x="8595360" y="73152"/>
+            <a:ext cx="457200" cy="164592"/>
           </a:xfrm>
           <a:prstGeom prst="rect">
             <a:avLst/>
@@ -1921,8 +1911,8 @@
         </p:blipFill>
         <p:spPr>
           <a:xfrm>
-            <a:off x="7973568" y="4663440"/>
-            <a:ext cx="1051560" cy="402336"/>
+            <a:off x="7936992" y="4626864"/>
+            <a:ext cx="1078992" cy="411480"/>
           </a:xfrm>
           <a:prstGeom prst="rect">
             <a:avLst/>
@@ -1938,7 +1928,7 @@
         <p:spPr>
           <a:xfrm>
             <a:off x="457200" y="256032"/>
-            <a:ext cx="8229600" cy="438912"/>
+            <a:ext cx="8321040" cy="457200"/>
           </a:xfrm>
           <a:prstGeom prst="rect">
             <a:avLst/>
@@ -1976,8 +1966,8 @@
         </p:nvSpPr>
         <p:spPr>
           <a:xfrm>
-            <a:off x="457200" y="694944"/>
-            <a:ext cx="8229600" cy="237744"/>
+            <a:off x="457200" y="713232"/>
+            <a:ext cx="8321040" cy="237744"/>
           </a:xfrm>
           <a:prstGeom prst="rect">
             <a:avLst/>
@@ -2016,7 +2006,7 @@
         <p:spPr>
           <a:xfrm>
             <a:off x="457200" y="987552"/>
-            <a:ext cx="8229600" cy="16459"/>
+            <a:ext cx="8321040" cy="16459"/>
           </a:xfrm>
           <a:prstGeom prst="rect">
             <a:avLst/>
@@ -2040,8 +2030,8 @@
         </p:nvSpPr>
         <p:spPr>
           <a:xfrm>
-            <a:off x="457200" y="1078992"/>
-            <a:ext cx="2651760" cy="822960"/>
+            <a:off x="457200" y="1060704"/>
+            <a:ext cx="2633472" cy="868680"/>
           </a:xfrm>
           <a:prstGeom prst="rect">
             <a:avLst/>
@@ -2057,7 +2047,7 @@
               <a:buNone/>
             </a:pPr>
             <a:r>
-              <a:rPr lang="en-US" sz="4800" b="1" dirty="0">
+              <a:rPr lang="en-US" sz="5000" b="1" dirty="0">
                 <a:solidFill>
                   <a:srgbClr val="0D1F3C"/>
                 </a:solidFill>
@@ -2067,7 +2057,7 @@
               </a:rPr>
               <a:t>92%+</a:t>
             </a:r>
-            <a:endParaRPr lang="en-US" sz="4800" dirty="0"/>
+            <a:endParaRPr lang="en-US" sz="5000" dirty="0"/>
           </a:p>
         </p:txBody>
       </p:sp>
@@ -2079,8 +2069,8 @@
         </p:nvSpPr>
         <p:spPr>
           <a:xfrm>
-            <a:off x="457200" y="1920240"/>
-            <a:ext cx="2651760" cy="219456"/>
+            <a:off x="457200" y="1938528"/>
+            <a:ext cx="2633472" cy="237744"/>
           </a:xfrm>
           <a:prstGeom prst="rect">
             <a:avLst/>
@@ -2118,8 +2108,8 @@
         </p:nvSpPr>
         <p:spPr>
           <a:xfrm>
-            <a:off x="457200" y="2176272"/>
-            <a:ext cx="2651760" cy="16459"/>
+            <a:off x="457200" y="2212848"/>
+            <a:ext cx="2633472" cy="16459"/>
           </a:xfrm>
           <a:prstGeom prst="rect">
             <a:avLst/>
@@ -2143,8 +2133,8 @@
         </p:nvSpPr>
         <p:spPr>
           <a:xfrm>
-            <a:off x="457200" y="2249424"/>
-            <a:ext cx="2651760" cy="274320"/>
+            <a:off x="457200" y="2286000"/>
+            <a:ext cx="2633472" cy="274320"/>
           </a:xfrm>
           <a:prstGeom prst="rect">
             <a:avLst/>
@@ -2182,8 +2172,8 @@
         </p:nvSpPr>
         <p:spPr>
           <a:xfrm>
-            <a:off x="457200" y="2578608"/>
-            <a:ext cx="2651760" cy="1188720"/>
+            <a:off x="457200" y="2596896"/>
+            <a:ext cx="2633472" cy="1481328"/>
           </a:xfrm>
           <a:prstGeom prst="rect">
             <a:avLst/>
@@ -2207,7 +2197,7 @@
                 <a:ea typeface="Calibri" pitchFamily="34" charset="-122"/>
                 <a:cs typeface="Calibri" pitchFamily="34" charset="-120"/>
               </a:rPr>
-              <a:t>Every service is tracked through a third-party inspection platform. Scores are logged, time-stamped, and available to you in real time. You never have to wonder if the work was done.</a:t>
+              <a:t>Every service is tracked through a third-party inspection platform. Scores are logged, time-stamped, and available to you in real time. You never have to wonder if the work was done — or how well.</a:t>
             </a:r>
             <a:endParaRPr lang="en-US" sz="1100" dirty="0"/>
           </a:p>
@@ -2221,8 +2211,8 @@
         </p:nvSpPr>
         <p:spPr>
           <a:xfrm>
-            <a:off x="3182112" y="1024128"/>
-            <a:ext cx="16459" cy="3749040"/>
+            <a:off x="3127248" y="1005840"/>
+            <a:ext cx="16459" cy="3621024"/>
           </a:xfrm>
           <a:prstGeom prst="rect">
             <a:avLst/>
@@ -2246,8 +2236,8 @@
         </p:nvSpPr>
         <p:spPr>
           <a:xfrm>
-            <a:off x="3337560" y="1078992"/>
-            <a:ext cx="2651760" cy="822960"/>
+            <a:off x="3255264" y="1060704"/>
+            <a:ext cx="2633472" cy="868680"/>
           </a:xfrm>
           <a:prstGeom prst="rect">
             <a:avLst/>
@@ -2263,7 +2253,7 @@
               <a:buNone/>
             </a:pPr>
             <a:r>
-              <a:rPr lang="en-US" sz="4800" b="1" dirty="0">
+              <a:rPr lang="en-US" sz="5000" b="1" dirty="0">
                 <a:solidFill>
                   <a:srgbClr val="0D1F3C"/>
                 </a:solidFill>
@@ -2273,7 +2263,7 @@
               </a:rPr>
               <a:t>&lt;24hr</a:t>
             </a:r>
-            <a:endParaRPr lang="en-US" sz="4800" dirty="0"/>
+            <a:endParaRPr lang="en-US" sz="5000" dirty="0"/>
           </a:p>
         </p:txBody>
       </p:sp>
@@ -2285,8 +2275,8 @@
         </p:nvSpPr>
         <p:spPr>
           <a:xfrm>
-            <a:off x="3337560" y="1920240"/>
-            <a:ext cx="2651760" cy="219456"/>
+            <a:off x="3255264" y="1938528"/>
+            <a:ext cx="2633472" cy="237744"/>
           </a:xfrm>
           <a:prstGeom prst="rect">
             <a:avLst/>
@@ -2324,8 +2314,8 @@
         </p:nvSpPr>
         <p:spPr>
           <a:xfrm>
-            <a:off x="3337560" y="2176272"/>
-            <a:ext cx="2651760" cy="16459"/>
+            <a:off x="3255264" y="2212848"/>
+            <a:ext cx="2633472" cy="16459"/>
           </a:xfrm>
           <a:prstGeom prst="rect">
             <a:avLst/>
@@ -2349,8 +2339,8 @@
         </p:nvSpPr>
         <p:spPr>
           <a:xfrm>
-            <a:off x="3337560" y="2249424"/>
-            <a:ext cx="2651760" cy="274320"/>
+            <a:off x="3255264" y="2286000"/>
+            <a:ext cx="2633472" cy="274320"/>
           </a:xfrm>
           <a:prstGeom prst="rect">
             <a:avLst/>
@@ -2388,8 +2378,8 @@
         </p:nvSpPr>
         <p:spPr>
           <a:xfrm>
-            <a:off x="3337560" y="2578608"/>
-            <a:ext cx="2651760" cy="1188720"/>
+            <a:off x="3255264" y="2596896"/>
+            <a:ext cx="2633472" cy="1481328"/>
           </a:xfrm>
           <a:prstGeom prst="rect">
             <a:avLst/>
@@ -2413,7 +2403,7 @@
                 <a:ea typeface="Calibri" pitchFamily="34" charset="-122"/>
                 <a:cs typeface="Calibri" pitchFamily="34" charset="-120"/>
               </a:rPr>
-              <a:t>Every issue generates a service ticket with a timestamp and assigned owner. Problems are tracked from open to closed — nothing falls through the cracks and no response goes undocumented.</a:t>
+              <a:t>Every issue generates a service ticket with a timestamp and assigned owner. Problems are tracked from open to closed — nothing falls through the cracks and every response is documented.</a:t>
             </a:r>
             <a:endParaRPr lang="en-US" sz="1100" dirty="0"/>
           </a:p>
@@ -2427,8 +2417,8 @@
         </p:nvSpPr>
         <p:spPr>
           <a:xfrm>
-            <a:off x="6080760" y="1024128"/>
-            <a:ext cx="16459" cy="3749040"/>
+            <a:off x="5925312" y="1005840"/>
+            <a:ext cx="16459" cy="3621024"/>
           </a:xfrm>
           <a:prstGeom prst="rect">
             <a:avLst/>
@@ -2452,8 +2442,8 @@
         </p:nvSpPr>
         <p:spPr>
           <a:xfrm>
-            <a:off x="6236208" y="1078992"/>
-            <a:ext cx="2651760" cy="822960"/>
+            <a:off x="6053328" y="1060704"/>
+            <a:ext cx="2633472" cy="868680"/>
           </a:xfrm>
           <a:prstGeom prst="rect">
             <a:avLst/>
@@ -2469,7 +2459,7 @@
               <a:buNone/>
             </a:pPr>
             <a:r>
-              <a:rPr lang="en-US" sz="4800" b="1" dirty="0">
+              <a:rPr lang="en-US" sz="5000" b="1" dirty="0">
                 <a:solidFill>
                   <a:srgbClr val="0D1F3C"/>
                 </a:solidFill>
@@ -2479,7 +2469,7 @@
               </a:rPr>
               <a:t>CEO</a:t>
             </a:r>
-            <a:endParaRPr lang="en-US" sz="4800" dirty="0"/>
+            <a:endParaRPr lang="en-US" sz="5000" dirty="0"/>
           </a:p>
         </p:txBody>
       </p:sp>
@@ -2491,8 +2481,8 @@
         </p:nvSpPr>
         <p:spPr>
           <a:xfrm>
-            <a:off x="6236208" y="1920240"/>
-            <a:ext cx="2651760" cy="219456"/>
+            <a:off x="6053328" y="1938528"/>
+            <a:ext cx="2633472" cy="237744"/>
           </a:xfrm>
           <a:prstGeom prst="rect">
             <a:avLst/>
@@ -2530,8 +2520,8 @@
         </p:nvSpPr>
         <p:spPr>
           <a:xfrm>
-            <a:off x="6236208" y="2176272"/>
-            <a:ext cx="2651760" cy="16459"/>
+            <a:off x="6053328" y="2212848"/>
+            <a:ext cx="2633472" cy="16459"/>
           </a:xfrm>
           <a:prstGeom prst="rect">
             <a:avLst/>
@@ -2555,8 +2545,8 @@
         </p:nvSpPr>
         <p:spPr>
           <a:xfrm>
-            <a:off x="6236208" y="2249424"/>
-            <a:ext cx="2651760" cy="274320"/>
+            <a:off x="6053328" y="2286000"/>
+            <a:ext cx="2633472" cy="274320"/>
           </a:xfrm>
           <a:prstGeom prst="rect">
             <a:avLst/>
@@ -2594,8 +2584,8 @@
         </p:nvSpPr>
         <p:spPr>
           <a:xfrm>
-            <a:off x="6236208" y="2578608"/>
-            <a:ext cx="2651760" cy="1188720"/>
+            <a:off x="6053328" y="2596896"/>
+            <a:ext cx="2633472" cy="1481328"/>
           </a:xfrm>
           <a:prstGeom prst="rect">
             <a:avLst/>
@@ -2619,7 +2609,7 @@
                 <a:ea typeface="Calibri" pitchFamily="34" charset="-122"/>
                 <a:cs typeface="Calibri" pitchFamily="34" charset="-120"/>
               </a:rPr>
-              <a:t>Hereford Johnson, US Air Force veteran and company founder, picks up the phone. No account managers, no call routing, no corporate layers between you and the person responsible.</a:t>
+              <a:t>Hereford Johnson, US Air Force veteran and company founder, picks up the phone. No account managers, no call routing, no corporate layers between you and the person ultimately responsible.</a:t>
             </a:r>
             <a:endParaRPr lang="en-US" sz="1100" dirty="0"/>
           </a:p>
@@ -2633,8 +2623,8 @@
         </p:nvSpPr>
         <p:spPr>
           <a:xfrm>
-            <a:off x="457200" y="4114800"/>
-            <a:ext cx="8229600" cy="16459"/>
+            <a:off x="457200" y="4151376"/>
+            <a:ext cx="8321040" cy="16459"/>
           </a:xfrm>
           <a:prstGeom prst="rect">
             <a:avLst/>
@@ -2658,8 +2648,8 @@
         </p:nvSpPr>
         <p:spPr>
           <a:xfrm>
-            <a:off x="457200" y="4169664"/>
-            <a:ext cx="8046720" cy="365760"/>
+            <a:off x="457200" y="4206240"/>
+            <a:ext cx="8321040" cy="402336"/>
           </a:xfrm>
           <a:prstGeom prst="rect">
             <a:avLst/>
@@ -2755,7 +2745,7 @@
         <p:spPr>
           <a:xfrm>
             <a:off x="457200" y="91440"/>
-            <a:ext cx="7315200" cy="164592"/>
+            <a:ext cx="6858000" cy="164592"/>
           </a:xfrm>
           <a:prstGeom prst="rect">
             <a:avLst/>
@@ -2793,8 +2783,8 @@
         </p:nvSpPr>
         <p:spPr>
           <a:xfrm>
-            <a:off x="8686800" y="73152"/>
-            <a:ext cx="365760" cy="164592"/>
+            <a:off x="8595360" y="73152"/>
+            <a:ext cx="457200" cy="164592"/>
           </a:xfrm>
           <a:prstGeom prst="rect">
             <a:avLst/>
@@ -2840,8 +2830,8 @@
         </p:blipFill>
         <p:spPr>
           <a:xfrm>
-            <a:off x="7973568" y="4663440"/>
-            <a:ext cx="1051560" cy="402336"/>
+            <a:off x="7936992" y="4626864"/>
+            <a:ext cx="1078992" cy="411480"/>
           </a:xfrm>
           <a:prstGeom prst="rect">
             <a:avLst/>
@@ -2857,7 +2847,7 @@
         <p:spPr>
           <a:xfrm>
             <a:off x="457200" y="256032"/>
-            <a:ext cx="4937760" cy="475488"/>
+            <a:ext cx="4937760" cy="457200"/>
           </a:xfrm>
           <a:prstGeom prst="rect">
             <a:avLst/>
@@ -2895,7 +2885,7 @@
         </p:nvSpPr>
         <p:spPr>
           <a:xfrm>
-            <a:off x="457200" y="786384"/>
+            <a:off x="457200" y="768096"/>
             <a:ext cx="4937760" cy="16459"/>
           </a:xfrm>
           <a:prstGeom prst="rect">
@@ -2920,8 +2910,8 @@
         </p:nvSpPr>
         <p:spPr>
           <a:xfrm>
-            <a:off x="457200" y="877824"/>
-            <a:ext cx="4937760" cy="1920240"/>
+            <a:off x="457200" y="859536"/>
+            <a:ext cx="4937760" cy="2395728"/>
           </a:xfrm>
           <a:prstGeom prst="rect">
             <a:avLst/>
@@ -2972,32 +2962,80 @@
             </a:r>
             <a:endParaRPr lang="en-US" sz="1100" dirty="0"/>
           </a:p>
-        </p:txBody>
-      </p:sp>
-      <p:sp>
-        <p:nvSpPr>
-          <p:cNvPr id="9" name="Text 6"/>
-          <p:cNvSpPr/>
-          <p:nvPr/>
-        </p:nvSpPr>
-        <p:spPr>
-          <a:xfrm>
-            <a:off x="457200" y="2907792"/>
-            <a:ext cx="4937760" cy="548640"/>
-          </a:xfrm>
-          <a:prstGeom prst="rect">
-            <a:avLst/>
-          </a:prstGeom>
-          <a:noFill/>
-          <a:ln/>
-        </p:spPr>
-        <p:txBody>
-          <a:bodyPr wrap="square" rtlCol="0" anchor="ctr"/>
-          <a:lstStyle/>
           <a:p>
             <a:pPr indent="0" marL="0">
               <a:buNone/>
             </a:pPr>
+            <a:endParaRPr lang="en-US" sz="1100" dirty="0"/>
+          </a:p>
+          <a:p>
+            <a:pPr indent="0" marL="0">
+              <a:buNone/>
+            </a:pPr>
+            <a:r>
+              <a:rPr lang="en-US" sz="1100" dirty="0">
+                <a:solidFill>
+                  <a:srgbClr val="6B7280"/>
+                </a:solidFill>
+                <a:latin typeface="Calibri" pitchFamily="34" charset="0"/>
+                <a:ea typeface="Calibri" pitchFamily="34" charset="-122"/>
+                <a:cs typeface="Calibri" pitchFamily="34" charset="-120"/>
+              </a:rPr>
+              <a:t>LSI's first customer from 1985 is still active today. Our oldest client relationship is 12 years. Retention isn't accidental — it's the product of showing up consistently and fixing problems fast.</a:t>
+            </a:r>
+            <a:endParaRPr lang="en-US" sz="1100" dirty="0"/>
+          </a:p>
+        </p:txBody>
+      </p:sp>
+      <p:sp>
+        <p:nvSpPr>
+          <p:cNvPr id="9" name="Shape 6"/>
+          <p:cNvSpPr/>
+          <p:nvPr/>
+        </p:nvSpPr>
+        <p:spPr>
+          <a:xfrm>
+            <a:off x="457200" y="3328416"/>
+            <a:ext cx="4937760" cy="16459"/>
+          </a:xfrm>
+          <a:prstGeom prst="rect">
+            <a:avLst/>
+          </a:prstGeom>
+          <a:solidFill>
+            <a:srgbClr val="D1D5DB"/>
+          </a:solidFill>
+          <a:ln w="12700">
+            <a:solidFill>
+              <a:srgbClr val="D1D5DB"/>
+            </a:solidFill>
+            <a:prstDash val="solid"/>
+          </a:ln>
+        </p:spPr>
+      </p:sp>
+      <p:sp>
+        <p:nvSpPr>
+          <p:cNvPr id="10" name="Text 7"/>
+          <p:cNvSpPr/>
+          <p:nvPr/>
+        </p:nvSpPr>
+        <p:spPr>
+          <a:xfrm>
+            <a:off x="457200" y="3401568"/>
+            <a:ext cx="4937760" cy="658368"/>
+          </a:xfrm>
+          <a:prstGeom prst="rect">
+            <a:avLst/>
+          </a:prstGeom>
+          <a:noFill/>
+          <a:ln/>
+        </p:spPr>
+        <p:txBody>
+          <a:bodyPr wrap="square" rtlCol="0" anchor="ctr"/>
+          <a:lstStyle/>
+          <a:p>
+            <a:pPr indent="0" marL="0">
+              <a:buNone/>
+            </a:pPr>
             <a:r>
               <a:rPr lang="en-US" sz="1100" i="1" dirty="0">
                 <a:solidFill>
@@ -3007,7 +3045,7 @@
                 <a:ea typeface="Calibri" pitchFamily="34" charset="-122"/>
                 <a:cs typeface="Calibri" pitchFamily="34" charset="-120"/>
               </a:rPr>
-              <a:t>Your core values — service, integrity, and excellence — are the same values we build our teams around. That alignment isn't coincidental. It's why this works.</a:t>
+              <a:t>"Your core values — service, integrity, and excellence — are the same values we build our teams around. That alignment isn't coincidental. It's why this partnership works."</a:t>
             </a:r>
             <a:endParaRPr lang="en-US" sz="1100" dirty="0"/>
           </a:p>
@@ -3015,14 +3053,14 @@
       </p:sp>
       <p:sp>
         <p:nvSpPr>
-          <p:cNvPr id="10" name="Shape 7"/>
-          <p:cNvSpPr/>
-          <p:nvPr/>
-        </p:nvSpPr>
-        <p:spPr>
-          <a:xfrm>
-            <a:off x="5532120" y="237744"/>
-            <a:ext cx="16459" cy="4251960"/>
+          <p:cNvPr id="11" name="Shape 8"/>
+          <p:cNvSpPr/>
+          <p:nvPr/>
+        </p:nvSpPr>
+        <p:spPr>
+          <a:xfrm>
+            <a:off x="457200" y="4133088"/>
+            <a:ext cx="4937760" cy="16459"/>
           </a:xfrm>
           <a:prstGeom prst="rect">
             <a:avLst/>
@@ -3040,14 +3078,14 @@
       </p:sp>
       <p:sp>
         <p:nvSpPr>
-          <p:cNvPr id="11" name="Text 8"/>
-          <p:cNvSpPr/>
-          <p:nvPr/>
-        </p:nvSpPr>
-        <p:spPr>
-          <a:xfrm>
-            <a:off x="5742432" y="502920"/>
-            <a:ext cx="3108960" cy="182880"/>
+          <p:cNvPr id="12" name="Text 9"/>
+          <p:cNvSpPr/>
+          <p:nvPr/>
+        </p:nvSpPr>
+        <p:spPr>
+          <a:xfrm>
+            <a:off x="457200" y="4187952"/>
+            <a:ext cx="4937760" cy="219456"/>
           </a:xfrm>
           <a:prstGeom prst="rect">
             <a:avLst/>
@@ -3063,6 +3101,45 @@
               <a:buNone/>
             </a:pPr>
             <a:r>
+              <a:rPr lang="en-US" sz="900" dirty="0">
+                <a:solidFill>
+                  <a:srgbClr val="9CA3AF"/>
+                </a:solidFill>
+                <a:latin typeface="Calibri" pitchFamily="34" charset="0"/>
+                <a:ea typeface="Calibri" pitchFamily="34" charset="-122"/>
+                <a:cs typeface="Calibri" pitchFamily="34" charset="-120"/>
+              </a:rPr>
+              <a:t>— Hereford Johnson, CEO, Mad Dog Facility Partners</a:t>
+            </a:r>
+            <a:endParaRPr lang="en-US" sz="900" dirty="0"/>
+          </a:p>
+        </p:txBody>
+      </p:sp>
+      <p:sp>
+        <p:nvSpPr>
+          <p:cNvPr id="13" name="Text 10"/>
+          <p:cNvSpPr/>
+          <p:nvPr/>
+        </p:nvSpPr>
+        <p:spPr>
+          <a:xfrm>
+            <a:off x="5486400" y="457200"/>
+            <a:ext cx="3255264" cy="201168"/>
+          </a:xfrm>
+          <a:prstGeom prst="rect">
+            <a:avLst/>
+          </a:prstGeom>
+          <a:noFill/>
+          <a:ln/>
+        </p:spPr>
+        <p:txBody>
+          <a:bodyPr wrap="square" rtlCol="0" anchor="ctr"/>
+          <a:lstStyle/>
+          <a:p>
+            <a:pPr indent="0" marL="0">
+              <a:buNone/>
+            </a:pPr>
+            <a:r>
               <a:rPr lang="en-US" sz="750" b="1" spc="250" kern="0" dirty="0">
                 <a:solidFill>
                   <a:srgbClr val="9CA3AF"/>
@@ -3071,7 +3148,7 @@
                 <a:ea typeface="Calibri" pitchFamily="34" charset="-122"/>
                 <a:cs typeface="Calibri" pitchFamily="34" charset="-120"/>
               </a:rPr>
-              <a:t>INDUSTRY</a:t>
+              <a:t>INDUSTRY TYPE</a:t>
             </a:r>
             <a:endParaRPr lang="en-US" sz="750" dirty="0"/>
           </a:p>
@@ -3079,14 +3156,14 @@
       </p:sp>
       <p:sp>
         <p:nvSpPr>
-          <p:cNvPr id="12" name="Text 9"/>
-          <p:cNvSpPr/>
-          <p:nvPr/>
-        </p:nvSpPr>
-        <p:spPr>
-          <a:xfrm>
-            <a:off x="5742432" y="722376"/>
-            <a:ext cx="3108960" cy="457200"/>
+          <p:cNvPr id="14" name="Text 11"/>
+          <p:cNvSpPr/>
+          <p:nvPr/>
+        </p:nvSpPr>
+        <p:spPr>
+          <a:xfrm>
+            <a:off x="5486400" y="694944"/>
+            <a:ext cx="3255264" cy="512064"/>
           </a:xfrm>
           <a:prstGeom prst="rect">
             <a:avLst/>
@@ -3102,7 +3179,7 @@
               <a:buNone/>
             </a:pPr>
             <a:r>
-              <a:rPr lang="en-US" sz="1600" b="1" dirty="0">
+              <a:rPr lang="en-US" sz="1800" b="1" dirty="0">
                 <a:solidFill>
                   <a:srgbClr val="0D1F3C"/>
                 </a:solidFill>
@@ -3112,20 +3189,20 @@
               </a:rPr>
               <a:t>Manufacturing / Automation</a:t>
             </a:r>
-            <a:endParaRPr lang="en-US" sz="1600" dirty="0"/>
-          </a:p>
-        </p:txBody>
-      </p:sp>
-      <p:sp>
-        <p:nvSpPr>
-          <p:cNvPr id="13" name="Shape 10"/>
-          <p:cNvSpPr/>
-          <p:nvPr/>
-        </p:nvSpPr>
-        <p:spPr>
-          <a:xfrm>
-            <a:off x="5742432" y="1271016"/>
-            <a:ext cx="3108960" cy="16459"/>
+            <a:endParaRPr lang="en-US" sz="1800" dirty="0"/>
+          </a:p>
+        </p:txBody>
+      </p:sp>
+      <p:sp>
+        <p:nvSpPr>
+          <p:cNvPr id="15" name="Shape 12"/>
+          <p:cNvSpPr/>
+          <p:nvPr/>
+        </p:nvSpPr>
+        <p:spPr>
+          <a:xfrm>
+            <a:off x="5486400" y="1371600"/>
+            <a:ext cx="3255264" cy="16459"/>
           </a:xfrm>
           <a:prstGeom prst="rect">
             <a:avLst/>
@@ -3143,14 +3220,14 @@
       </p:sp>
       <p:sp>
         <p:nvSpPr>
-          <p:cNvPr id="14" name="Text 11"/>
-          <p:cNvSpPr/>
-          <p:nvPr/>
-        </p:nvSpPr>
-        <p:spPr>
-          <a:xfrm>
-            <a:off x="5742432" y="1783080"/>
-            <a:ext cx="3108960" cy="182880"/>
+          <p:cNvPr id="16" name="Text 13"/>
+          <p:cNvSpPr/>
+          <p:nvPr/>
+        </p:nvSpPr>
+        <p:spPr>
+          <a:xfrm>
+            <a:off x="5486400" y="1737360"/>
+            <a:ext cx="3255264" cy="201168"/>
           </a:xfrm>
           <a:prstGeom prst="rect">
             <a:avLst/>
@@ -3182,14 +3259,14 @@
       </p:sp>
       <p:sp>
         <p:nvSpPr>
-          <p:cNvPr id="15" name="Text 12"/>
-          <p:cNvSpPr/>
-          <p:nvPr/>
-        </p:nvSpPr>
-        <p:spPr>
-          <a:xfrm>
-            <a:off x="5742432" y="2002536"/>
-            <a:ext cx="3108960" cy="457200"/>
+          <p:cNvPr id="17" name="Text 14"/>
+          <p:cNvSpPr/>
+          <p:nvPr/>
+        </p:nvSpPr>
+        <p:spPr>
+          <a:xfrm>
+            <a:off x="5486400" y="1975104"/>
+            <a:ext cx="3255264" cy="512064"/>
           </a:xfrm>
           <a:prstGeom prst="rect">
             <a:avLst/>
@@ -3205,7 +3282,7 @@
               <a:buNone/>
             </a:pPr>
             <a:r>
-              <a:rPr lang="en-US" sz="1600" b="1" dirty="0">
+              <a:rPr lang="en-US" sz="1800" b="1" dirty="0">
                 <a:solidFill>
                   <a:srgbClr val="0D1F3C"/>
                 </a:solidFill>
@@ -3215,20 +3292,20 @@
               </a:rPr>
               <a:t>Controls Integrator Since 1985</a:t>
             </a:r>
-            <a:endParaRPr lang="en-US" sz="1600" dirty="0"/>
-          </a:p>
-        </p:txBody>
-      </p:sp>
-      <p:sp>
-        <p:nvSpPr>
-          <p:cNvPr id="16" name="Shape 13"/>
-          <p:cNvSpPr/>
-          <p:nvPr/>
-        </p:nvSpPr>
-        <p:spPr>
-          <a:xfrm>
-            <a:off x="5742432" y="2551176"/>
-            <a:ext cx="3108960" cy="16459"/>
+            <a:endParaRPr lang="en-US" sz="1800" dirty="0"/>
+          </a:p>
+        </p:txBody>
+      </p:sp>
+      <p:sp>
+        <p:nvSpPr>
+          <p:cNvPr id="18" name="Shape 15"/>
+          <p:cNvSpPr/>
+          <p:nvPr/>
+        </p:nvSpPr>
+        <p:spPr>
+          <a:xfrm>
+            <a:off x="5486400" y="2651760"/>
+            <a:ext cx="3255264" cy="16459"/>
           </a:xfrm>
           <a:prstGeom prst="rect">
             <a:avLst/>
@@ -3246,14 +3323,14 @@
       </p:sp>
       <p:sp>
         <p:nvSpPr>
-          <p:cNvPr id="17" name="Text 14"/>
-          <p:cNvSpPr/>
-          <p:nvPr/>
-        </p:nvSpPr>
-        <p:spPr>
-          <a:xfrm>
-            <a:off x="5742432" y="3063240"/>
-            <a:ext cx="3108960" cy="182880"/>
+          <p:cNvPr id="19" name="Text 16"/>
+          <p:cNvSpPr/>
+          <p:nvPr/>
+        </p:nvSpPr>
+        <p:spPr>
+          <a:xfrm>
+            <a:off x="5486400" y="3017520"/>
+            <a:ext cx="3255264" cy="201168"/>
           </a:xfrm>
           <a:prstGeom prst="rect">
             <a:avLst/>
@@ -3285,14 +3362,14 @@
       </p:sp>
       <p:sp>
         <p:nvSpPr>
-          <p:cNvPr id="18" name="Text 15"/>
-          <p:cNvSpPr/>
-          <p:nvPr/>
-        </p:nvSpPr>
-        <p:spPr>
-          <a:xfrm>
-            <a:off x="5742432" y="3282696"/>
-            <a:ext cx="3108960" cy="457200"/>
+          <p:cNvPr id="20" name="Text 17"/>
+          <p:cNvSpPr/>
+          <p:nvPr/>
+        </p:nvSpPr>
+        <p:spPr>
+          <a:xfrm>
+            <a:off x="5486400" y="3255264"/>
+            <a:ext cx="3255264" cy="512064"/>
           </a:xfrm>
           <a:prstGeom prst="rect">
             <a:avLst/>
@@ -3308,7 +3385,7 @@
               <a:buNone/>
             </a:pPr>
             <a:r>
-              <a:rPr lang="en-US" sz="1600" b="1" dirty="0">
+              <a:rPr lang="en-US" sz="1800" b="1" dirty="0">
                 <a:solidFill>
                   <a:srgbClr val="0D1F3C"/>
                 </a:solidFill>
@@ -3318,7 +3395,7 @@
               </a:rPr>
               <a:t>OSHA / Production-Grade</a:t>
             </a:r>
-            <a:endParaRPr lang="en-US" sz="1600" dirty="0"/>
+            <a:endParaRPr lang="en-US" sz="1800" dirty="0"/>
           </a:p>
         </p:txBody>
       </p:sp>
@@ -3388,7 +3465,7 @@
         <p:spPr>
           <a:xfrm>
             <a:off x="457200" y="91440"/>
-            <a:ext cx="7315200" cy="164592"/>
+            <a:ext cx="6858000" cy="164592"/>
           </a:xfrm>
           <a:prstGeom prst="rect">
             <a:avLst/>
@@ -3426,8 +3503,8 @@
         </p:nvSpPr>
         <p:spPr>
           <a:xfrm>
-            <a:off x="8686800" y="73152"/>
-            <a:ext cx="365760" cy="164592"/>
+            <a:off x="8595360" y="73152"/>
+            <a:ext cx="457200" cy="164592"/>
           </a:xfrm>
           <a:prstGeom prst="rect">
             <a:avLst/>
@@ -3473,8 +3550,8 @@
         </p:blipFill>
         <p:spPr>
           <a:xfrm>
-            <a:off x="7973568" y="4663440"/>
-            <a:ext cx="1051560" cy="402336"/>
+            <a:off x="7936992" y="4626864"/>
+            <a:ext cx="1078992" cy="411480"/>
           </a:xfrm>
           <a:prstGeom prst="rect">
             <a:avLst/>
@@ -3490,7 +3567,7 @@
         <p:spPr>
           <a:xfrm>
             <a:off x="457200" y="256032"/>
-            <a:ext cx="8229600" cy="438912"/>
+            <a:ext cx="8321040" cy="457200"/>
           </a:xfrm>
           <a:prstGeom prst="rect">
             <a:avLst/>
@@ -3528,8 +3605,8 @@
         </p:nvSpPr>
         <p:spPr>
           <a:xfrm>
-            <a:off x="457200" y="694944"/>
-            <a:ext cx="8229600" cy="237744"/>
+            <a:off x="457200" y="713232"/>
+            <a:ext cx="8321040" cy="237744"/>
           </a:xfrm>
           <a:prstGeom prst="rect">
             <a:avLst/>
@@ -3568,7 +3645,7 @@
         <p:spPr>
           <a:xfrm>
             <a:off x="457200" y="987552"/>
-            <a:ext cx="8229600" cy="16459"/>
+            <a:ext cx="8321040" cy="16459"/>
           </a:xfrm>
           <a:prstGeom prst="rect">
             <a:avLst/>
@@ -3586,14 +3663,39 @@
       </p:sp>
       <p:sp>
         <p:nvSpPr>
-          <p:cNvPr id="9" name="Text 6"/>
-          <p:cNvSpPr/>
-          <p:nvPr/>
-        </p:nvSpPr>
-        <p:spPr>
-          <a:xfrm>
-            <a:off x="457200" y="1060704"/>
-            <a:ext cx="3931920" cy="256032"/>
+          <p:cNvPr id="9" name="Shape 6"/>
+          <p:cNvSpPr/>
+          <p:nvPr/>
+        </p:nvSpPr>
+        <p:spPr>
+          <a:xfrm>
+            <a:off x="457200" y="1024128"/>
+            <a:ext cx="8321040" cy="1883664"/>
+          </a:xfrm>
+          <a:prstGeom prst="rect">
+            <a:avLst/>
+          </a:prstGeom>
+          <a:solidFill>
+            <a:srgbClr val="F4F7FB"/>
+          </a:solidFill>
+          <a:ln w="12700">
+            <a:solidFill>
+              <a:srgbClr val="F4F7FB"/>
+            </a:solidFill>
+            <a:prstDash val="solid"/>
+          </a:ln>
+        </p:spPr>
+      </p:sp>
+      <p:sp>
+        <p:nvSpPr>
+          <p:cNvPr id="10" name="Text 7"/>
+          <p:cNvSpPr/>
+          <p:nvPr/>
+        </p:nvSpPr>
+        <p:spPr>
+          <a:xfrm>
+            <a:off x="585216" y="1078992"/>
+            <a:ext cx="1371600" cy="182880"/>
           </a:xfrm>
           <a:prstGeom prst="rect">
             <a:avLst/>
@@ -3609,30 +3711,158 @@
               <a:buNone/>
             </a:pPr>
             <a:r>
-              <a:rPr lang="en-US" sz="1200" b="1" dirty="0">
+              <a:rPr lang="en-US" sz="900" b="1" spc="200" kern="0" dirty="0">
+                <a:solidFill>
+                  <a:srgbClr val="0D1F3C"/>
+                </a:solidFill>
+                <a:latin typeface="Calibri" pitchFamily="34" charset="0"/>
+                <a:ea typeface="Calibri" pitchFamily="34" charset="-122"/>
+                <a:cs typeface="Calibri" pitchFamily="34" charset="-120"/>
+              </a:rPr>
+              <a:t>WEEKLY</a:t>
+            </a:r>
+            <a:endParaRPr lang="en-US" sz="900" dirty="0"/>
+          </a:p>
+        </p:txBody>
+      </p:sp>
+      <p:sp>
+        <p:nvSpPr>
+          <p:cNvPr id="11" name="Shape 8"/>
+          <p:cNvSpPr/>
+          <p:nvPr/>
+        </p:nvSpPr>
+        <p:spPr>
+          <a:xfrm>
+            <a:off x="585216" y="1408176"/>
+            <a:ext cx="45720" cy="219456"/>
+          </a:xfrm>
+          <a:prstGeom prst="rect">
+            <a:avLst/>
+          </a:prstGeom>
+          <a:solidFill>
+            <a:srgbClr val="0D1F3C"/>
+          </a:solidFill>
+          <a:ln w="12700">
+            <a:solidFill>
+              <a:srgbClr val="0D1F3C"/>
+            </a:solidFill>
+            <a:prstDash val="solid"/>
+          </a:ln>
+        </p:spPr>
+      </p:sp>
+      <p:sp>
+        <p:nvSpPr>
+          <p:cNvPr id="12" name="Text 9"/>
+          <p:cNvSpPr/>
+          <p:nvPr/>
+        </p:nvSpPr>
+        <p:spPr>
+          <a:xfrm>
+            <a:off x="749808" y="1426464"/>
+            <a:ext cx="3831336" cy="201168"/>
+          </a:xfrm>
+          <a:prstGeom prst="rect">
+            <a:avLst/>
+          </a:prstGeom>
+          <a:noFill/>
+          <a:ln/>
+        </p:spPr>
+        <p:txBody>
+          <a:bodyPr wrap="square" rtlCol="0" anchor="ctr"/>
+          <a:lstStyle/>
+          <a:p>
+            <a:pPr indent="0" marL="0">
+              <a:buNone/>
+            </a:pPr>
+            <a:r>
+              <a:rPr lang="en-US" sz="1000" dirty="0">
                 <a:solidFill>
                   <a:srgbClr val="374151"/>
                 </a:solidFill>
-                <a:latin typeface="Trebuchet MS" pitchFamily="34" charset="0"/>
-                <a:ea typeface="Trebuchet MS" pitchFamily="34" charset="-122"/>
-                <a:cs typeface="Trebuchet MS" pitchFamily="34" charset="-120"/>
-              </a:rPr>
-              <a:t>Offices &amp; Common Areas</a:t>
-            </a:r>
-            <a:endParaRPr lang="en-US" sz="1200" dirty="0"/>
-          </a:p>
-        </p:txBody>
-      </p:sp>
-      <p:sp>
-        <p:nvSpPr>
-          <p:cNvPr id="10" name="Text 7"/>
-          <p:cNvSpPr/>
-          <p:nvPr/>
-        </p:nvSpPr>
-        <p:spPr>
-          <a:xfrm>
-            <a:off x="457200" y="1353312"/>
-            <a:ext cx="3931920" cy="749808"/>
+                <a:latin typeface="Calibri" pitchFamily="34" charset="0"/>
+                <a:ea typeface="Calibri" pitchFamily="34" charset="-122"/>
+                <a:cs typeface="Calibri" pitchFamily="34" charset="-120"/>
+              </a:rPr>
+              <a:t>Restrooms (3): sanitize &amp; disinfect all fixtures</a:t>
+            </a:r>
+            <a:endParaRPr lang="en-US" sz="1000" dirty="0"/>
+          </a:p>
+        </p:txBody>
+      </p:sp>
+      <p:sp>
+        <p:nvSpPr>
+          <p:cNvPr id="13" name="Text 10"/>
+          <p:cNvSpPr/>
+          <p:nvPr/>
+        </p:nvSpPr>
+        <p:spPr>
+          <a:xfrm>
+            <a:off x="3977640" y="1426464"/>
+            <a:ext cx="658368" cy="201168"/>
+          </a:xfrm>
+          <a:prstGeom prst="rect">
+            <a:avLst/>
+          </a:prstGeom>
+          <a:noFill/>
+          <a:ln/>
+        </p:spPr>
+        <p:txBody>
+          <a:bodyPr wrap="square" rtlCol="0" anchor="ctr"/>
+          <a:lstStyle/>
+          <a:p>
+            <a:pPr algn="r" indent="0" marL="0">
+              <a:buNone/>
+            </a:pPr>
+            <a:r>
+              <a:rPr lang="en-US" sz="800" i="1" dirty="0">
+                <a:solidFill>
+                  <a:srgbClr val="9CA3AF"/>
+                </a:solidFill>
+                <a:latin typeface="Calibri" pitchFamily="34" charset="0"/>
+                <a:ea typeface="Calibri" pitchFamily="34" charset="-122"/>
+                <a:cs typeface="Calibri" pitchFamily="34" charset="-120"/>
+              </a:rPr>
+              <a:t>Weekly</a:t>
+            </a:r>
+            <a:endParaRPr lang="en-US" sz="800" dirty="0"/>
+          </a:p>
+        </p:txBody>
+      </p:sp>
+      <p:sp>
+        <p:nvSpPr>
+          <p:cNvPr id="14" name="Shape 11"/>
+          <p:cNvSpPr/>
+          <p:nvPr/>
+        </p:nvSpPr>
+        <p:spPr>
+          <a:xfrm>
+            <a:off x="585216" y="1700784"/>
+            <a:ext cx="45720" cy="219456"/>
+          </a:xfrm>
+          <a:prstGeom prst="rect">
+            <a:avLst/>
+          </a:prstGeom>
+          <a:solidFill>
+            <a:srgbClr val="0D1F3C"/>
+          </a:solidFill>
+          <a:ln w="12700">
+            <a:solidFill>
+              <a:srgbClr val="0D1F3C"/>
+            </a:solidFill>
+            <a:prstDash val="solid"/>
+          </a:ln>
+        </p:spPr>
+      </p:sp>
+      <p:sp>
+        <p:nvSpPr>
+          <p:cNvPr id="15" name="Text 12"/>
+          <p:cNvSpPr/>
+          <p:nvPr/>
+        </p:nvSpPr>
+        <p:spPr>
+          <a:xfrm>
+            <a:off x="749808" y="1719072"/>
+            <a:ext cx="3831336" cy="201168"/>
           </a:xfrm>
           <a:prstGeom prst="rect">
             <a:avLst/>
@@ -3648,7 +3878,1371 @@
               <a:buNone/>
             </a:pPr>
             <a:r>
-              <a:rPr lang="en-US" sz="1100" dirty="0">
+              <a:rPr lang="en-US" sz="1000" dirty="0">
+                <a:solidFill>
+                  <a:srgbClr val="374151"/>
+                </a:solidFill>
+                <a:latin typeface="Calibri" pitchFamily="34" charset="0"/>
+                <a:ea typeface="Calibri" pitchFamily="34" charset="-122"/>
+                <a:cs typeface="Calibri" pitchFamily="34" charset="-120"/>
+              </a:rPr>
+              <a:t>Restrooms: mop &amp; disinfect floors, clean mirrors</a:t>
+            </a:r>
+            <a:endParaRPr lang="en-US" sz="1000" dirty="0"/>
+          </a:p>
+        </p:txBody>
+      </p:sp>
+      <p:sp>
+        <p:nvSpPr>
+          <p:cNvPr id="16" name="Text 13"/>
+          <p:cNvSpPr/>
+          <p:nvPr/>
+        </p:nvSpPr>
+        <p:spPr>
+          <a:xfrm>
+            <a:off x="3977640" y="1719072"/>
+            <a:ext cx="658368" cy="201168"/>
+          </a:xfrm>
+          <a:prstGeom prst="rect">
+            <a:avLst/>
+          </a:prstGeom>
+          <a:noFill/>
+          <a:ln/>
+        </p:spPr>
+        <p:txBody>
+          <a:bodyPr wrap="square" rtlCol="0" anchor="ctr"/>
+          <a:lstStyle/>
+          <a:p>
+            <a:pPr algn="r" indent="0" marL="0">
+              <a:buNone/>
+            </a:pPr>
+            <a:r>
+              <a:rPr lang="en-US" sz="800" i="1" dirty="0">
+                <a:solidFill>
+                  <a:srgbClr val="9CA3AF"/>
+                </a:solidFill>
+                <a:latin typeface="Calibri" pitchFamily="34" charset="0"/>
+                <a:ea typeface="Calibri" pitchFamily="34" charset="-122"/>
+                <a:cs typeface="Calibri" pitchFamily="34" charset="-120"/>
+              </a:rPr>
+              <a:t>Weekly</a:t>
+            </a:r>
+            <a:endParaRPr lang="en-US" sz="800" dirty="0"/>
+          </a:p>
+        </p:txBody>
+      </p:sp>
+      <p:sp>
+        <p:nvSpPr>
+          <p:cNvPr id="17" name="Shape 14"/>
+          <p:cNvSpPr/>
+          <p:nvPr/>
+        </p:nvSpPr>
+        <p:spPr>
+          <a:xfrm>
+            <a:off x="585216" y="1993392"/>
+            <a:ext cx="45720" cy="219456"/>
+          </a:xfrm>
+          <a:prstGeom prst="rect">
+            <a:avLst/>
+          </a:prstGeom>
+          <a:solidFill>
+            <a:srgbClr val="0D1F3C"/>
+          </a:solidFill>
+          <a:ln w="12700">
+            <a:solidFill>
+              <a:srgbClr val="0D1F3C"/>
+            </a:solidFill>
+            <a:prstDash val="solid"/>
+          </a:ln>
+        </p:spPr>
+      </p:sp>
+      <p:sp>
+        <p:nvSpPr>
+          <p:cNvPr id="18" name="Text 15"/>
+          <p:cNvSpPr/>
+          <p:nvPr/>
+        </p:nvSpPr>
+        <p:spPr>
+          <a:xfrm>
+            <a:off x="749808" y="2011680"/>
+            <a:ext cx="3831336" cy="201168"/>
+          </a:xfrm>
+          <a:prstGeom prst="rect">
+            <a:avLst/>
+          </a:prstGeom>
+          <a:noFill/>
+          <a:ln/>
+        </p:spPr>
+        <p:txBody>
+          <a:bodyPr wrap="square" rtlCol="0" anchor="ctr"/>
+          <a:lstStyle/>
+          <a:p>
+            <a:pPr indent="0" marL="0">
+              <a:buNone/>
+            </a:pPr>
+            <a:r>
+              <a:rPr lang="en-US" sz="1000" dirty="0">
+                <a:solidFill>
+                  <a:srgbClr val="374151"/>
+                </a:solidFill>
+                <a:latin typeface="Calibri" pitchFamily="34" charset="0"/>
+                <a:ea typeface="Calibri" pitchFamily="34" charset="-122"/>
+                <a:cs typeface="Calibri" pitchFamily="34" charset="-120"/>
+              </a:rPr>
+              <a:t>General dusting — all areas</a:t>
+            </a:r>
+            <a:endParaRPr lang="en-US" sz="1000" dirty="0"/>
+          </a:p>
+        </p:txBody>
+      </p:sp>
+      <p:sp>
+        <p:nvSpPr>
+          <p:cNvPr id="19" name="Text 16"/>
+          <p:cNvSpPr/>
+          <p:nvPr/>
+        </p:nvSpPr>
+        <p:spPr>
+          <a:xfrm>
+            <a:off x="3977640" y="2011680"/>
+            <a:ext cx="658368" cy="201168"/>
+          </a:xfrm>
+          <a:prstGeom prst="rect">
+            <a:avLst/>
+          </a:prstGeom>
+          <a:noFill/>
+          <a:ln/>
+        </p:spPr>
+        <p:txBody>
+          <a:bodyPr wrap="square" rtlCol="0" anchor="ctr"/>
+          <a:lstStyle/>
+          <a:p>
+            <a:pPr algn="r" indent="0" marL="0">
+              <a:buNone/>
+            </a:pPr>
+            <a:r>
+              <a:rPr lang="en-US" sz="800" i="1" dirty="0">
+                <a:solidFill>
+                  <a:srgbClr val="9CA3AF"/>
+                </a:solidFill>
+                <a:latin typeface="Calibri" pitchFamily="34" charset="0"/>
+                <a:ea typeface="Calibri" pitchFamily="34" charset="-122"/>
+                <a:cs typeface="Calibri" pitchFamily="34" charset="-120"/>
+              </a:rPr>
+              <a:t>Weekly</a:t>
+            </a:r>
+            <a:endParaRPr lang="en-US" sz="800" dirty="0"/>
+          </a:p>
+        </p:txBody>
+      </p:sp>
+      <p:sp>
+        <p:nvSpPr>
+          <p:cNvPr id="20" name="Shape 17"/>
+          <p:cNvSpPr/>
+          <p:nvPr/>
+        </p:nvSpPr>
+        <p:spPr>
+          <a:xfrm>
+            <a:off x="585216" y="2286000"/>
+            <a:ext cx="45720" cy="219456"/>
+          </a:xfrm>
+          <a:prstGeom prst="rect">
+            <a:avLst/>
+          </a:prstGeom>
+          <a:solidFill>
+            <a:srgbClr val="0D1F3C"/>
+          </a:solidFill>
+          <a:ln w="12700">
+            <a:solidFill>
+              <a:srgbClr val="0D1F3C"/>
+            </a:solidFill>
+            <a:prstDash val="solid"/>
+          </a:ln>
+        </p:spPr>
+      </p:sp>
+      <p:sp>
+        <p:nvSpPr>
+          <p:cNvPr id="21" name="Text 18"/>
+          <p:cNvSpPr/>
+          <p:nvPr/>
+        </p:nvSpPr>
+        <p:spPr>
+          <a:xfrm>
+            <a:off x="749808" y="2304288"/>
+            <a:ext cx="3831336" cy="201168"/>
+          </a:xfrm>
+          <a:prstGeom prst="rect">
+            <a:avLst/>
+          </a:prstGeom>
+          <a:noFill/>
+          <a:ln/>
+        </p:spPr>
+        <p:txBody>
+          <a:bodyPr wrap="square" rtlCol="0" anchor="ctr"/>
+          <a:lstStyle/>
+          <a:p>
+            <a:pPr indent="0" marL="0">
+              <a:buNone/>
+            </a:pPr>
+            <a:r>
+              <a:rPr lang="en-US" sz="1000" dirty="0">
+                <a:solidFill>
+                  <a:srgbClr val="374151"/>
+                </a:solidFill>
+                <a:latin typeface="Calibri" pitchFamily="34" charset="0"/>
+                <a:ea typeface="Calibri" pitchFamily="34" charset="-122"/>
+                <a:cs typeface="Calibri" pitchFamily="34" charset="-120"/>
+              </a:rPr>
+              <a:t>Front glass cleaning</a:t>
+            </a:r>
+            <a:endParaRPr lang="en-US" sz="1000" dirty="0"/>
+          </a:p>
+        </p:txBody>
+      </p:sp>
+      <p:sp>
+        <p:nvSpPr>
+          <p:cNvPr id="22" name="Text 19"/>
+          <p:cNvSpPr/>
+          <p:nvPr/>
+        </p:nvSpPr>
+        <p:spPr>
+          <a:xfrm>
+            <a:off x="3977640" y="2304288"/>
+            <a:ext cx="658368" cy="201168"/>
+          </a:xfrm>
+          <a:prstGeom prst="rect">
+            <a:avLst/>
+          </a:prstGeom>
+          <a:noFill/>
+          <a:ln/>
+        </p:spPr>
+        <p:txBody>
+          <a:bodyPr wrap="square" rtlCol="0" anchor="ctr"/>
+          <a:lstStyle/>
+          <a:p>
+            <a:pPr algn="r" indent="0" marL="0">
+              <a:buNone/>
+            </a:pPr>
+            <a:r>
+              <a:rPr lang="en-US" sz="800" i="1" dirty="0">
+                <a:solidFill>
+                  <a:srgbClr val="9CA3AF"/>
+                </a:solidFill>
+                <a:latin typeface="Calibri" pitchFamily="34" charset="0"/>
+                <a:ea typeface="Calibri" pitchFamily="34" charset="-122"/>
+                <a:cs typeface="Calibri" pitchFamily="34" charset="-120"/>
+              </a:rPr>
+              <a:t>Weekly</a:t>
+            </a:r>
+            <a:endParaRPr lang="en-US" sz="800" dirty="0"/>
+          </a:p>
+        </p:txBody>
+      </p:sp>
+      <p:sp>
+        <p:nvSpPr>
+          <p:cNvPr id="23" name="Shape 20"/>
+          <p:cNvSpPr/>
+          <p:nvPr/>
+        </p:nvSpPr>
+        <p:spPr>
+          <a:xfrm>
+            <a:off x="585216" y="2578608"/>
+            <a:ext cx="45720" cy="219456"/>
+          </a:xfrm>
+          <a:prstGeom prst="rect">
+            <a:avLst/>
+          </a:prstGeom>
+          <a:solidFill>
+            <a:srgbClr val="0D1F3C"/>
+          </a:solidFill>
+          <a:ln w="12700">
+            <a:solidFill>
+              <a:srgbClr val="0D1F3C"/>
+            </a:solidFill>
+            <a:prstDash val="solid"/>
+          </a:ln>
+        </p:spPr>
+      </p:sp>
+      <p:sp>
+        <p:nvSpPr>
+          <p:cNvPr id="24" name="Text 21"/>
+          <p:cNvSpPr/>
+          <p:nvPr/>
+        </p:nvSpPr>
+        <p:spPr>
+          <a:xfrm>
+            <a:off x="749808" y="2596896"/>
+            <a:ext cx="3831336" cy="201168"/>
+          </a:xfrm>
+          <a:prstGeom prst="rect">
+            <a:avLst/>
+          </a:prstGeom>
+          <a:noFill/>
+          <a:ln/>
+        </p:spPr>
+        <p:txBody>
+          <a:bodyPr wrap="square" rtlCol="0" anchor="ctr"/>
+          <a:lstStyle/>
+          <a:p>
+            <a:pPr indent="0" marL="0">
+              <a:buNone/>
+            </a:pPr>
+            <a:r>
+              <a:rPr lang="en-US" sz="1000" dirty="0">
+                <a:solidFill>
+                  <a:srgbClr val="374151"/>
+                </a:solidFill>
+                <a:latin typeface="Calibri" pitchFamily="34" charset="0"/>
+                <a:ea typeface="Calibri" pitchFamily="34" charset="-122"/>
+                <a:cs typeface="Calibri" pitchFamily="34" charset="-120"/>
+              </a:rPr>
+              <a:t>Office mopping, sweeping &amp; vacuuming</a:t>
+            </a:r>
+            <a:endParaRPr lang="en-US" sz="1000" dirty="0"/>
+          </a:p>
+        </p:txBody>
+      </p:sp>
+      <p:sp>
+        <p:nvSpPr>
+          <p:cNvPr id="25" name="Text 22"/>
+          <p:cNvSpPr/>
+          <p:nvPr/>
+        </p:nvSpPr>
+        <p:spPr>
+          <a:xfrm>
+            <a:off x="3977640" y="2596896"/>
+            <a:ext cx="658368" cy="201168"/>
+          </a:xfrm>
+          <a:prstGeom prst="rect">
+            <a:avLst/>
+          </a:prstGeom>
+          <a:noFill/>
+          <a:ln/>
+        </p:spPr>
+        <p:txBody>
+          <a:bodyPr wrap="square" rtlCol="0" anchor="ctr"/>
+          <a:lstStyle/>
+          <a:p>
+            <a:pPr algn="r" indent="0" marL="0">
+              <a:buNone/>
+            </a:pPr>
+            <a:r>
+              <a:rPr lang="en-US" sz="800" i="1" dirty="0">
+                <a:solidFill>
+                  <a:srgbClr val="9CA3AF"/>
+                </a:solidFill>
+                <a:latin typeface="Calibri" pitchFamily="34" charset="0"/>
+                <a:ea typeface="Calibri" pitchFamily="34" charset="-122"/>
+                <a:cs typeface="Calibri" pitchFamily="34" charset="-120"/>
+              </a:rPr>
+              <a:t>Weekly</a:t>
+            </a:r>
+            <a:endParaRPr lang="en-US" sz="800" dirty="0"/>
+          </a:p>
+        </p:txBody>
+      </p:sp>
+      <p:sp>
+        <p:nvSpPr>
+          <p:cNvPr id="26" name="Shape 23"/>
+          <p:cNvSpPr/>
+          <p:nvPr/>
+        </p:nvSpPr>
+        <p:spPr>
+          <a:xfrm>
+            <a:off x="4745736" y="1408176"/>
+            <a:ext cx="45720" cy="219456"/>
+          </a:xfrm>
+          <a:prstGeom prst="rect">
+            <a:avLst/>
+          </a:prstGeom>
+          <a:solidFill>
+            <a:srgbClr val="0D1F3C"/>
+          </a:solidFill>
+          <a:ln w="12700">
+            <a:solidFill>
+              <a:srgbClr val="0D1F3C"/>
+            </a:solidFill>
+            <a:prstDash val="solid"/>
+          </a:ln>
+        </p:spPr>
+      </p:sp>
+      <p:sp>
+        <p:nvSpPr>
+          <p:cNvPr id="27" name="Text 24"/>
+          <p:cNvSpPr/>
+          <p:nvPr/>
+        </p:nvSpPr>
+        <p:spPr>
+          <a:xfrm>
+            <a:off x="4910328" y="1426464"/>
+            <a:ext cx="3831336" cy="201168"/>
+          </a:xfrm>
+          <a:prstGeom prst="rect">
+            <a:avLst/>
+          </a:prstGeom>
+          <a:noFill/>
+          <a:ln/>
+        </p:spPr>
+        <p:txBody>
+          <a:bodyPr wrap="square" rtlCol="0" anchor="ctr"/>
+          <a:lstStyle/>
+          <a:p>
+            <a:pPr indent="0" marL="0">
+              <a:buNone/>
+            </a:pPr>
+            <a:r>
+              <a:rPr lang="en-US" sz="1000" dirty="0">
+                <a:solidFill>
+                  <a:srgbClr val="374151"/>
+                </a:solidFill>
+                <a:latin typeface="Calibri" pitchFamily="34" charset="0"/>
+                <a:ea typeface="Calibri" pitchFamily="34" charset="-122"/>
+                <a:cs typeface="Calibri" pitchFamily="34" charset="-120"/>
+              </a:rPr>
+              <a:t>Break room countertops, tables &amp; chairs</a:t>
+            </a:r>
+            <a:endParaRPr lang="en-US" sz="1000" dirty="0"/>
+          </a:p>
+        </p:txBody>
+      </p:sp>
+      <p:sp>
+        <p:nvSpPr>
+          <p:cNvPr id="28" name="Text 25"/>
+          <p:cNvSpPr/>
+          <p:nvPr/>
+        </p:nvSpPr>
+        <p:spPr>
+          <a:xfrm>
+            <a:off x="8138160" y="1426464"/>
+            <a:ext cx="658368" cy="201168"/>
+          </a:xfrm>
+          <a:prstGeom prst="rect">
+            <a:avLst/>
+          </a:prstGeom>
+          <a:noFill/>
+          <a:ln/>
+        </p:spPr>
+        <p:txBody>
+          <a:bodyPr wrap="square" rtlCol="0" anchor="ctr"/>
+          <a:lstStyle/>
+          <a:p>
+            <a:pPr algn="r" indent="0" marL="0">
+              <a:buNone/>
+            </a:pPr>
+            <a:r>
+              <a:rPr lang="en-US" sz="800" i="1" dirty="0">
+                <a:solidFill>
+                  <a:srgbClr val="9CA3AF"/>
+                </a:solidFill>
+                <a:latin typeface="Calibri" pitchFamily="34" charset="0"/>
+                <a:ea typeface="Calibri" pitchFamily="34" charset="-122"/>
+                <a:cs typeface="Calibri" pitchFamily="34" charset="-120"/>
+              </a:rPr>
+              <a:t>Weekly</a:t>
+            </a:r>
+            <a:endParaRPr lang="en-US" sz="800" dirty="0"/>
+          </a:p>
+        </p:txBody>
+      </p:sp>
+      <p:sp>
+        <p:nvSpPr>
+          <p:cNvPr id="29" name="Shape 26"/>
+          <p:cNvSpPr/>
+          <p:nvPr/>
+        </p:nvSpPr>
+        <p:spPr>
+          <a:xfrm>
+            <a:off x="4745736" y="1700784"/>
+            <a:ext cx="45720" cy="219456"/>
+          </a:xfrm>
+          <a:prstGeom prst="rect">
+            <a:avLst/>
+          </a:prstGeom>
+          <a:solidFill>
+            <a:srgbClr val="0D1F3C"/>
+          </a:solidFill>
+          <a:ln w="12700">
+            <a:solidFill>
+              <a:srgbClr val="0D1F3C"/>
+            </a:solidFill>
+            <a:prstDash val="solid"/>
+          </a:ln>
+        </p:spPr>
+      </p:sp>
+      <p:sp>
+        <p:nvSpPr>
+          <p:cNvPr id="30" name="Text 27"/>
+          <p:cNvSpPr/>
+          <p:nvPr/>
+        </p:nvSpPr>
+        <p:spPr>
+          <a:xfrm>
+            <a:off x="4910328" y="1719072"/>
+            <a:ext cx="3831336" cy="201168"/>
+          </a:xfrm>
+          <a:prstGeom prst="rect">
+            <a:avLst/>
+          </a:prstGeom>
+          <a:noFill/>
+          <a:ln/>
+        </p:spPr>
+        <p:txBody>
+          <a:bodyPr wrap="square" rtlCol="0" anchor="ctr"/>
+          <a:lstStyle/>
+          <a:p>
+            <a:pPr indent="0" marL="0">
+              <a:buNone/>
+            </a:pPr>
+            <a:r>
+              <a:rPr lang="en-US" sz="1000" dirty="0">
+                <a:solidFill>
+                  <a:srgbClr val="374151"/>
+                </a:solidFill>
+                <a:latin typeface="Calibri" pitchFamily="34" charset="0"/>
+                <a:ea typeface="Calibri" pitchFamily="34" charset="-122"/>
+                <a:cs typeface="Calibri" pitchFamily="34" charset="-120"/>
+              </a:rPr>
+              <a:t>Microwave — inside &amp; outside</a:t>
+            </a:r>
+            <a:endParaRPr lang="en-US" sz="1000" dirty="0"/>
+          </a:p>
+        </p:txBody>
+      </p:sp>
+      <p:sp>
+        <p:nvSpPr>
+          <p:cNvPr id="31" name="Text 28"/>
+          <p:cNvSpPr/>
+          <p:nvPr/>
+        </p:nvSpPr>
+        <p:spPr>
+          <a:xfrm>
+            <a:off x="8138160" y="1719072"/>
+            <a:ext cx="658368" cy="201168"/>
+          </a:xfrm>
+          <a:prstGeom prst="rect">
+            <a:avLst/>
+          </a:prstGeom>
+          <a:noFill/>
+          <a:ln/>
+        </p:spPr>
+        <p:txBody>
+          <a:bodyPr wrap="square" rtlCol="0" anchor="ctr"/>
+          <a:lstStyle/>
+          <a:p>
+            <a:pPr algn="r" indent="0" marL="0">
+              <a:buNone/>
+            </a:pPr>
+            <a:r>
+              <a:rPr lang="en-US" sz="800" i="1" dirty="0">
+                <a:solidFill>
+                  <a:srgbClr val="9CA3AF"/>
+                </a:solidFill>
+                <a:latin typeface="Calibri" pitchFamily="34" charset="0"/>
+                <a:ea typeface="Calibri" pitchFamily="34" charset="-122"/>
+                <a:cs typeface="Calibri" pitchFamily="34" charset="-120"/>
+              </a:rPr>
+              <a:t>Weekly</a:t>
+            </a:r>
+            <a:endParaRPr lang="en-US" sz="800" dirty="0"/>
+          </a:p>
+        </p:txBody>
+      </p:sp>
+      <p:sp>
+        <p:nvSpPr>
+          <p:cNvPr id="32" name="Shape 29"/>
+          <p:cNvSpPr/>
+          <p:nvPr/>
+        </p:nvSpPr>
+        <p:spPr>
+          <a:xfrm>
+            <a:off x="4745736" y="1993392"/>
+            <a:ext cx="45720" cy="219456"/>
+          </a:xfrm>
+          <a:prstGeom prst="rect">
+            <a:avLst/>
+          </a:prstGeom>
+          <a:solidFill>
+            <a:srgbClr val="0D1F3C"/>
+          </a:solidFill>
+          <a:ln w="12700">
+            <a:solidFill>
+              <a:srgbClr val="0D1F3C"/>
+            </a:solidFill>
+            <a:prstDash val="solid"/>
+          </a:ln>
+        </p:spPr>
+      </p:sp>
+      <p:sp>
+        <p:nvSpPr>
+          <p:cNvPr id="33" name="Text 30"/>
+          <p:cNvSpPr/>
+          <p:nvPr/>
+        </p:nvSpPr>
+        <p:spPr>
+          <a:xfrm>
+            <a:off x="4910328" y="2011680"/>
+            <a:ext cx="3831336" cy="201168"/>
+          </a:xfrm>
+          <a:prstGeom prst="rect">
+            <a:avLst/>
+          </a:prstGeom>
+          <a:noFill/>
+          <a:ln/>
+        </p:spPr>
+        <p:txBody>
+          <a:bodyPr wrap="square" rtlCol="0" anchor="ctr"/>
+          <a:lstStyle/>
+          <a:p>
+            <a:pPr indent="0" marL="0">
+              <a:buNone/>
+            </a:pPr>
+            <a:r>
+              <a:rPr lang="en-US" sz="1000" dirty="0">
+                <a:solidFill>
+                  <a:srgbClr val="374151"/>
+                </a:solidFill>
+                <a:latin typeface="Calibri" pitchFamily="34" charset="0"/>
+                <a:ea typeface="Calibri" pitchFamily="34" charset="-122"/>
+                <a:cs typeface="Calibri" pitchFamily="34" charset="-120"/>
+              </a:rPr>
+              <a:t>Refrigerator &amp; water machine exterior</a:t>
+            </a:r>
+            <a:endParaRPr lang="en-US" sz="1000" dirty="0"/>
+          </a:p>
+        </p:txBody>
+      </p:sp>
+      <p:sp>
+        <p:nvSpPr>
+          <p:cNvPr id="34" name="Text 31"/>
+          <p:cNvSpPr/>
+          <p:nvPr/>
+        </p:nvSpPr>
+        <p:spPr>
+          <a:xfrm>
+            <a:off x="8138160" y="2011680"/>
+            <a:ext cx="658368" cy="201168"/>
+          </a:xfrm>
+          <a:prstGeom prst="rect">
+            <a:avLst/>
+          </a:prstGeom>
+          <a:noFill/>
+          <a:ln/>
+        </p:spPr>
+        <p:txBody>
+          <a:bodyPr wrap="square" rtlCol="0" anchor="ctr"/>
+          <a:lstStyle/>
+          <a:p>
+            <a:pPr algn="r" indent="0" marL="0">
+              <a:buNone/>
+            </a:pPr>
+            <a:r>
+              <a:rPr lang="en-US" sz="800" i="1" dirty="0">
+                <a:solidFill>
+                  <a:srgbClr val="9CA3AF"/>
+                </a:solidFill>
+                <a:latin typeface="Calibri" pitchFamily="34" charset="0"/>
+                <a:ea typeface="Calibri" pitchFamily="34" charset="-122"/>
+                <a:cs typeface="Calibri" pitchFamily="34" charset="-120"/>
+              </a:rPr>
+              <a:t>Weekly</a:t>
+            </a:r>
+            <a:endParaRPr lang="en-US" sz="800" dirty="0"/>
+          </a:p>
+        </p:txBody>
+      </p:sp>
+      <p:sp>
+        <p:nvSpPr>
+          <p:cNvPr id="35" name="Shape 32"/>
+          <p:cNvSpPr/>
+          <p:nvPr/>
+        </p:nvSpPr>
+        <p:spPr>
+          <a:xfrm>
+            <a:off x="4745736" y="2286000"/>
+            <a:ext cx="45720" cy="219456"/>
+          </a:xfrm>
+          <a:prstGeom prst="rect">
+            <a:avLst/>
+          </a:prstGeom>
+          <a:solidFill>
+            <a:srgbClr val="0D1F3C"/>
+          </a:solidFill>
+          <a:ln w="12700">
+            <a:solidFill>
+              <a:srgbClr val="0D1F3C"/>
+            </a:solidFill>
+            <a:prstDash val="solid"/>
+          </a:ln>
+        </p:spPr>
+      </p:sp>
+      <p:sp>
+        <p:nvSpPr>
+          <p:cNvPr id="36" name="Text 33"/>
+          <p:cNvSpPr/>
+          <p:nvPr/>
+        </p:nvSpPr>
+        <p:spPr>
+          <a:xfrm>
+            <a:off x="4910328" y="2304288"/>
+            <a:ext cx="3831336" cy="201168"/>
+          </a:xfrm>
+          <a:prstGeom prst="rect">
+            <a:avLst/>
+          </a:prstGeom>
+          <a:noFill/>
+          <a:ln/>
+        </p:spPr>
+        <p:txBody>
+          <a:bodyPr wrap="square" rtlCol="0" anchor="ctr"/>
+          <a:lstStyle/>
+          <a:p>
+            <a:pPr indent="0" marL="0">
+              <a:buNone/>
+            </a:pPr>
+            <a:r>
+              <a:rPr lang="en-US" sz="1000" dirty="0">
+                <a:solidFill>
+                  <a:srgbClr val="374151"/>
+                </a:solidFill>
+                <a:latin typeface="Calibri" pitchFamily="34" charset="0"/>
+                <a:ea typeface="Calibri" pitchFamily="34" charset="-122"/>
+                <a:cs typeface="Calibri" pitchFamily="34" charset="-120"/>
+              </a:rPr>
+              <a:t>Kitchen area full wipe-down</a:t>
+            </a:r>
+            <a:endParaRPr lang="en-US" sz="1000" dirty="0"/>
+          </a:p>
+        </p:txBody>
+      </p:sp>
+      <p:sp>
+        <p:nvSpPr>
+          <p:cNvPr id="37" name="Text 34"/>
+          <p:cNvSpPr/>
+          <p:nvPr/>
+        </p:nvSpPr>
+        <p:spPr>
+          <a:xfrm>
+            <a:off x="8138160" y="2304288"/>
+            <a:ext cx="658368" cy="201168"/>
+          </a:xfrm>
+          <a:prstGeom prst="rect">
+            <a:avLst/>
+          </a:prstGeom>
+          <a:noFill/>
+          <a:ln/>
+        </p:spPr>
+        <p:txBody>
+          <a:bodyPr wrap="square" rtlCol="0" anchor="ctr"/>
+          <a:lstStyle/>
+          <a:p>
+            <a:pPr algn="r" indent="0" marL="0">
+              <a:buNone/>
+            </a:pPr>
+            <a:r>
+              <a:rPr lang="en-US" sz="800" i="1" dirty="0">
+                <a:solidFill>
+                  <a:srgbClr val="9CA3AF"/>
+                </a:solidFill>
+                <a:latin typeface="Calibri" pitchFamily="34" charset="0"/>
+                <a:ea typeface="Calibri" pitchFamily="34" charset="-122"/>
+                <a:cs typeface="Calibri" pitchFamily="34" charset="-120"/>
+              </a:rPr>
+              <a:t>Weekly</a:t>
+            </a:r>
+            <a:endParaRPr lang="en-US" sz="800" dirty="0"/>
+          </a:p>
+        </p:txBody>
+      </p:sp>
+      <p:sp>
+        <p:nvSpPr>
+          <p:cNvPr id="38" name="Shape 35"/>
+          <p:cNvSpPr/>
+          <p:nvPr/>
+        </p:nvSpPr>
+        <p:spPr>
+          <a:xfrm>
+            <a:off x="4745736" y="2578608"/>
+            <a:ext cx="45720" cy="219456"/>
+          </a:xfrm>
+          <a:prstGeom prst="rect">
+            <a:avLst/>
+          </a:prstGeom>
+          <a:solidFill>
+            <a:srgbClr val="0D1F3C"/>
+          </a:solidFill>
+          <a:ln w="12700">
+            <a:solidFill>
+              <a:srgbClr val="0D1F3C"/>
+            </a:solidFill>
+            <a:prstDash val="solid"/>
+          </a:ln>
+        </p:spPr>
+      </p:sp>
+      <p:sp>
+        <p:nvSpPr>
+          <p:cNvPr id="39" name="Text 36"/>
+          <p:cNvSpPr/>
+          <p:nvPr/>
+        </p:nvSpPr>
+        <p:spPr>
+          <a:xfrm>
+            <a:off x="4910328" y="2596896"/>
+            <a:ext cx="3831336" cy="201168"/>
+          </a:xfrm>
+          <a:prstGeom prst="rect">
+            <a:avLst/>
+          </a:prstGeom>
+          <a:noFill/>
+          <a:ln/>
+        </p:spPr>
+        <p:txBody>
+          <a:bodyPr wrap="square" rtlCol="0" anchor="ctr"/>
+          <a:lstStyle/>
+          <a:p>
+            <a:pPr indent="0" marL="0">
+              <a:buNone/>
+            </a:pPr>
+            <a:r>
+              <a:rPr lang="en-US" sz="1000" dirty="0">
+                <a:solidFill>
+                  <a:srgbClr val="374151"/>
+                </a:solidFill>
+                <a:latin typeface="Calibri" pitchFamily="34" charset="0"/>
+                <a:ea typeface="Calibri" pitchFamily="34" charset="-122"/>
+                <a:cs typeface="Calibri" pitchFamily="34" charset="-120"/>
+              </a:rPr>
+              <a:t>Warehouse dust mopping throughout</a:t>
+            </a:r>
+            <a:endParaRPr lang="en-US" sz="1000" dirty="0"/>
+          </a:p>
+        </p:txBody>
+      </p:sp>
+      <p:sp>
+        <p:nvSpPr>
+          <p:cNvPr id="40" name="Text 37"/>
+          <p:cNvSpPr/>
+          <p:nvPr/>
+        </p:nvSpPr>
+        <p:spPr>
+          <a:xfrm>
+            <a:off x="8138160" y="2596896"/>
+            <a:ext cx="658368" cy="201168"/>
+          </a:xfrm>
+          <a:prstGeom prst="rect">
+            <a:avLst/>
+          </a:prstGeom>
+          <a:noFill/>
+          <a:ln/>
+        </p:spPr>
+        <p:txBody>
+          <a:bodyPr wrap="square" rtlCol="0" anchor="ctr"/>
+          <a:lstStyle/>
+          <a:p>
+            <a:pPr algn="r" indent="0" marL="0">
+              <a:buNone/>
+            </a:pPr>
+            <a:r>
+              <a:rPr lang="en-US" sz="800" i="1" dirty="0">
+                <a:solidFill>
+                  <a:srgbClr val="9CA3AF"/>
+                </a:solidFill>
+                <a:latin typeface="Calibri" pitchFamily="34" charset="0"/>
+                <a:ea typeface="Calibri" pitchFamily="34" charset="-122"/>
+                <a:cs typeface="Calibri" pitchFamily="34" charset="-120"/>
+              </a:rPr>
+              <a:t>Weekly</a:t>
+            </a:r>
+            <a:endParaRPr lang="en-US" sz="800" dirty="0"/>
+          </a:p>
+        </p:txBody>
+      </p:sp>
+      <p:sp>
+        <p:nvSpPr>
+          <p:cNvPr id="41" name="Shape 38"/>
+          <p:cNvSpPr/>
+          <p:nvPr/>
+        </p:nvSpPr>
+        <p:spPr>
+          <a:xfrm>
+            <a:off x="457200" y="2962656"/>
+            <a:ext cx="8321040" cy="713232"/>
+          </a:xfrm>
+          <a:prstGeom prst="rect">
+            <a:avLst/>
+          </a:prstGeom>
+          <a:solidFill>
+            <a:srgbClr val="F8F9FA"/>
+          </a:solidFill>
+          <a:ln w="12700">
+            <a:solidFill>
+              <a:srgbClr val="F8F9FA"/>
+            </a:solidFill>
+            <a:prstDash val="solid"/>
+          </a:ln>
+        </p:spPr>
+      </p:sp>
+      <p:sp>
+        <p:nvSpPr>
+          <p:cNvPr id="42" name="Text 39"/>
+          <p:cNvSpPr/>
+          <p:nvPr/>
+        </p:nvSpPr>
+        <p:spPr>
+          <a:xfrm>
+            <a:off x="585216" y="3017520"/>
+            <a:ext cx="1371600" cy="182880"/>
+          </a:xfrm>
+          <a:prstGeom prst="rect">
+            <a:avLst/>
+          </a:prstGeom>
+          <a:noFill/>
+          <a:ln/>
+        </p:spPr>
+        <p:txBody>
+          <a:bodyPr wrap="square" rtlCol="0" anchor="ctr"/>
+          <a:lstStyle/>
+          <a:p>
+            <a:pPr indent="0" marL="0">
+              <a:buNone/>
+            </a:pPr>
+            <a:r>
+              <a:rPr lang="en-US" sz="900" b="1" spc="200" kern="0" dirty="0">
+                <a:solidFill>
+                  <a:srgbClr val="0D1F3C"/>
+                </a:solidFill>
+                <a:latin typeface="Calibri" pitchFamily="34" charset="0"/>
+                <a:ea typeface="Calibri" pitchFamily="34" charset="-122"/>
+                <a:cs typeface="Calibri" pitchFamily="34" charset="-120"/>
+              </a:rPr>
+              <a:t>MONTHLY</a:t>
+            </a:r>
+            <a:endParaRPr lang="en-US" sz="900" dirty="0"/>
+          </a:p>
+        </p:txBody>
+      </p:sp>
+      <p:sp>
+        <p:nvSpPr>
+          <p:cNvPr id="43" name="Shape 40"/>
+          <p:cNvSpPr/>
+          <p:nvPr/>
+        </p:nvSpPr>
+        <p:spPr>
+          <a:xfrm>
+            <a:off x="585216" y="3346704"/>
+            <a:ext cx="45720" cy="219456"/>
+          </a:xfrm>
+          <a:prstGeom prst="rect">
+            <a:avLst/>
+          </a:prstGeom>
+          <a:solidFill>
+            <a:srgbClr val="0D1F3C"/>
+          </a:solidFill>
+          <a:ln w="12700">
+            <a:solidFill>
+              <a:srgbClr val="0D1F3C"/>
+            </a:solidFill>
+            <a:prstDash val="solid"/>
+          </a:ln>
+        </p:spPr>
+      </p:sp>
+      <p:sp>
+        <p:nvSpPr>
+          <p:cNvPr id="44" name="Text 41"/>
+          <p:cNvSpPr/>
+          <p:nvPr/>
+        </p:nvSpPr>
+        <p:spPr>
+          <a:xfrm>
+            <a:off x="749808" y="3364992"/>
+            <a:ext cx="7223760" cy="201168"/>
+          </a:xfrm>
+          <a:prstGeom prst="rect">
+            <a:avLst/>
+          </a:prstGeom>
+          <a:noFill/>
+          <a:ln/>
+        </p:spPr>
+        <p:txBody>
+          <a:bodyPr wrap="square" rtlCol="0" anchor="ctr"/>
+          <a:lstStyle/>
+          <a:p>
+            <a:pPr indent="0" marL="0">
+              <a:buNone/>
+            </a:pPr>
+            <a:r>
+              <a:rPr lang="en-US" sz="1000" dirty="0">
+                <a:solidFill>
+                  <a:srgbClr val="374151"/>
+                </a:solidFill>
+                <a:latin typeface="Calibri" pitchFamily="34" charset="0"/>
+                <a:ea typeface="Calibri" pitchFamily="34" charset="-122"/>
+                <a:cs typeface="Calibri" pitchFamily="34" charset="-120"/>
+              </a:rPr>
+              <a:t>Refrigerator interior deep clean</a:t>
+            </a:r>
+            <a:endParaRPr lang="en-US" sz="1000" dirty="0"/>
+          </a:p>
+        </p:txBody>
+      </p:sp>
+      <p:sp>
+        <p:nvSpPr>
+          <p:cNvPr id="45" name="Text 42"/>
+          <p:cNvSpPr/>
+          <p:nvPr/>
+        </p:nvSpPr>
+        <p:spPr>
+          <a:xfrm>
+            <a:off x="7863840" y="3364992"/>
+            <a:ext cx="658368" cy="201168"/>
+          </a:xfrm>
+          <a:prstGeom prst="rect">
+            <a:avLst/>
+          </a:prstGeom>
+          <a:noFill/>
+          <a:ln/>
+        </p:spPr>
+        <p:txBody>
+          <a:bodyPr wrap="square" rtlCol="0" anchor="ctr"/>
+          <a:lstStyle/>
+          <a:p>
+            <a:pPr algn="r" indent="0" marL="0">
+              <a:buNone/>
+            </a:pPr>
+            <a:r>
+              <a:rPr lang="en-US" sz="800" i="1" dirty="0">
+                <a:solidFill>
+                  <a:srgbClr val="9CA3AF"/>
+                </a:solidFill>
+                <a:latin typeface="Calibri" pitchFamily="34" charset="0"/>
+                <a:ea typeface="Calibri" pitchFamily="34" charset="-122"/>
+                <a:cs typeface="Calibri" pitchFamily="34" charset="-120"/>
+              </a:rPr>
+              <a:t>Monthly</a:t>
+            </a:r>
+            <a:endParaRPr lang="en-US" sz="800" dirty="0"/>
+          </a:p>
+        </p:txBody>
+      </p:sp>
+      <p:sp>
+        <p:nvSpPr>
+          <p:cNvPr id="46" name="Shape 43"/>
+          <p:cNvSpPr/>
+          <p:nvPr/>
+        </p:nvSpPr>
+        <p:spPr>
+          <a:xfrm>
+            <a:off x="457200" y="3730752"/>
+            <a:ext cx="8321040" cy="1005840"/>
+          </a:xfrm>
+          <a:prstGeom prst="rect">
+            <a:avLst/>
+          </a:prstGeom>
+          <a:solidFill>
+            <a:srgbClr val="F0F4FF"/>
+          </a:solidFill>
+          <a:ln w="12700">
+            <a:solidFill>
+              <a:srgbClr val="F0F4FF"/>
+            </a:solidFill>
+            <a:prstDash val="solid"/>
+          </a:ln>
+        </p:spPr>
+      </p:sp>
+      <p:sp>
+        <p:nvSpPr>
+          <p:cNvPr id="47" name="Text 44"/>
+          <p:cNvSpPr/>
+          <p:nvPr/>
+        </p:nvSpPr>
+        <p:spPr>
+          <a:xfrm>
+            <a:off x="585216" y="3785616"/>
+            <a:ext cx="1645920" cy="182880"/>
+          </a:xfrm>
+          <a:prstGeom prst="rect">
+            <a:avLst/>
+          </a:prstGeom>
+          <a:noFill/>
+          <a:ln/>
+        </p:spPr>
+        <p:txBody>
+          <a:bodyPr wrap="square" rtlCol="0" anchor="ctr"/>
+          <a:lstStyle/>
+          <a:p>
+            <a:pPr indent="0" marL="0">
+              <a:buNone/>
+            </a:pPr>
+            <a:r>
+              <a:rPr lang="en-US" sz="900" b="1" spc="200" kern="0" dirty="0">
+                <a:solidFill>
+                  <a:srgbClr val="0D1F3C"/>
+                </a:solidFill>
+                <a:latin typeface="Calibri" pitchFamily="34" charset="0"/>
+                <a:ea typeface="Calibri" pitchFamily="34" charset="-122"/>
+                <a:cs typeface="Calibri" pitchFamily="34" charset="-120"/>
+              </a:rPr>
+              <a:t>QUARTERLY</a:t>
+            </a:r>
+            <a:endParaRPr lang="en-US" sz="900" dirty="0"/>
+          </a:p>
+        </p:txBody>
+      </p:sp>
+      <p:sp>
+        <p:nvSpPr>
+          <p:cNvPr id="48" name="Shape 45"/>
+          <p:cNvSpPr/>
+          <p:nvPr/>
+        </p:nvSpPr>
+        <p:spPr>
+          <a:xfrm>
+            <a:off x="585216" y="4114800"/>
+            <a:ext cx="45720" cy="219456"/>
+          </a:xfrm>
+          <a:prstGeom prst="rect">
+            <a:avLst/>
+          </a:prstGeom>
+          <a:solidFill>
+            <a:srgbClr val="0D1F3C"/>
+          </a:solidFill>
+          <a:ln w="12700">
+            <a:solidFill>
+              <a:srgbClr val="0D1F3C"/>
+            </a:solidFill>
+            <a:prstDash val="solid"/>
+          </a:ln>
+        </p:spPr>
+      </p:sp>
+      <p:sp>
+        <p:nvSpPr>
+          <p:cNvPr id="49" name="Text 46"/>
+          <p:cNvSpPr/>
+          <p:nvPr/>
+        </p:nvSpPr>
+        <p:spPr>
+          <a:xfrm>
+            <a:off x="749808" y="4133088"/>
+            <a:ext cx="7223760" cy="201168"/>
+          </a:xfrm>
+          <a:prstGeom prst="rect">
+            <a:avLst/>
+          </a:prstGeom>
+          <a:noFill/>
+          <a:ln/>
+        </p:spPr>
+        <p:txBody>
+          <a:bodyPr wrap="square" rtlCol="0" anchor="ctr"/>
+          <a:lstStyle/>
+          <a:p>
+            <a:pPr indent="0" marL="0">
+              <a:buNone/>
+            </a:pPr>
+            <a:r>
+              <a:rPr lang="en-US" sz="1000" dirty="0">
+                <a:solidFill>
+                  <a:srgbClr val="374151"/>
+                </a:solidFill>
+                <a:latin typeface="Calibri" pitchFamily="34" charset="0"/>
+                <a:ea typeface="Calibri" pitchFamily="34" charset="-122"/>
+                <a:cs typeface="Calibri" pitchFamily="34" charset="-120"/>
+              </a:rPr>
+              <a:t>Baseboard cleaning — all areas</a:t>
+            </a:r>
+            <a:endParaRPr lang="en-US" sz="1000" dirty="0"/>
+          </a:p>
+        </p:txBody>
+      </p:sp>
+      <p:sp>
+        <p:nvSpPr>
+          <p:cNvPr id="50" name="Text 47"/>
+          <p:cNvSpPr/>
+          <p:nvPr/>
+        </p:nvSpPr>
+        <p:spPr>
+          <a:xfrm>
+            <a:off x="7863840" y="4133088"/>
+            <a:ext cx="731520" cy="201168"/>
+          </a:xfrm>
+          <a:prstGeom prst="rect">
+            <a:avLst/>
+          </a:prstGeom>
+          <a:noFill/>
+          <a:ln/>
+        </p:spPr>
+        <p:txBody>
+          <a:bodyPr wrap="square" rtlCol="0" anchor="ctr"/>
+          <a:lstStyle/>
+          <a:p>
+            <a:pPr algn="r" indent="0" marL="0">
+              <a:buNone/>
+            </a:pPr>
+            <a:r>
+              <a:rPr lang="en-US" sz="800" i="1" dirty="0">
+                <a:solidFill>
+                  <a:srgbClr val="9CA3AF"/>
+                </a:solidFill>
+                <a:latin typeface="Calibri" pitchFamily="34" charset="0"/>
+                <a:ea typeface="Calibri" pitchFamily="34" charset="-122"/>
+                <a:cs typeface="Calibri" pitchFamily="34" charset="-120"/>
+              </a:rPr>
+              <a:t>Quarterly</a:t>
+            </a:r>
+            <a:endParaRPr lang="en-US" sz="800" dirty="0"/>
+          </a:p>
+        </p:txBody>
+      </p:sp>
+      <p:sp>
+        <p:nvSpPr>
+          <p:cNvPr id="51" name="Shape 48"/>
+          <p:cNvSpPr/>
+          <p:nvPr/>
+        </p:nvSpPr>
+        <p:spPr>
+          <a:xfrm>
+            <a:off x="585216" y="4407408"/>
+            <a:ext cx="45720" cy="219456"/>
+          </a:xfrm>
+          <a:prstGeom prst="rect">
+            <a:avLst/>
+          </a:prstGeom>
+          <a:solidFill>
+            <a:srgbClr val="0D1F3C"/>
+          </a:solidFill>
+          <a:ln w="12700">
+            <a:solidFill>
+              <a:srgbClr val="0D1F3C"/>
+            </a:solidFill>
+            <a:prstDash val="solid"/>
+          </a:ln>
+        </p:spPr>
+      </p:sp>
+      <p:sp>
+        <p:nvSpPr>
+          <p:cNvPr id="52" name="Text 49"/>
+          <p:cNvSpPr/>
+          <p:nvPr/>
+        </p:nvSpPr>
+        <p:spPr>
+          <a:xfrm>
+            <a:off x="749808" y="4425696"/>
+            <a:ext cx="7223760" cy="201168"/>
+          </a:xfrm>
+          <a:prstGeom prst="rect">
+            <a:avLst/>
+          </a:prstGeom>
+          <a:noFill/>
+          <a:ln/>
+        </p:spPr>
+        <p:txBody>
+          <a:bodyPr wrap="square" rtlCol="0" anchor="ctr"/>
+          <a:lstStyle/>
+          <a:p>
+            <a:pPr indent="0" marL="0">
+              <a:buNone/>
+            </a:pPr>
+            <a:r>
+              <a:rPr lang="en-US" sz="1000" dirty="0">
+                <a:solidFill>
+                  <a:srgbClr val="374151"/>
+                </a:solidFill>
+                <a:latin typeface="Calibri" pitchFamily="34" charset="0"/>
+                <a:ea typeface="Calibri" pitchFamily="34" charset="-122"/>
+                <a:cs typeface="Calibri" pitchFamily="34" charset="-120"/>
+              </a:rPr>
+              <a:t>Desk dusting — all offices</a:t>
+            </a:r>
+            <a:endParaRPr lang="en-US" sz="1000" dirty="0"/>
+          </a:p>
+        </p:txBody>
+      </p:sp>
+      <p:sp>
+        <p:nvSpPr>
+          <p:cNvPr id="53" name="Text 50"/>
+          <p:cNvSpPr/>
+          <p:nvPr/>
+        </p:nvSpPr>
+        <p:spPr>
+          <a:xfrm>
+            <a:off x="7863840" y="4425696"/>
+            <a:ext cx="731520" cy="201168"/>
+          </a:xfrm>
+          <a:prstGeom prst="rect">
+            <a:avLst/>
+          </a:prstGeom>
+          <a:noFill/>
+          <a:ln/>
+        </p:spPr>
+        <p:txBody>
+          <a:bodyPr wrap="square" rtlCol="0" anchor="ctr"/>
+          <a:lstStyle/>
+          <a:p>
+            <a:pPr algn="r" indent="0" marL="0">
+              <a:buNone/>
+            </a:pPr>
+            <a:r>
+              <a:rPr lang="en-US" sz="800" i="1" dirty="0">
+                <a:solidFill>
+                  <a:srgbClr val="9CA3AF"/>
+                </a:solidFill>
+                <a:latin typeface="Calibri" pitchFamily="34" charset="0"/>
+                <a:ea typeface="Calibri" pitchFamily="34" charset="-122"/>
+                <a:cs typeface="Calibri" pitchFamily="34" charset="-120"/>
+              </a:rPr>
+              <a:t>Quarterly</a:t>
+            </a:r>
+            <a:endParaRPr lang="en-US" sz="800" dirty="0"/>
+          </a:p>
+        </p:txBody>
+      </p:sp>
+      <p:sp>
+        <p:nvSpPr>
+          <p:cNvPr id="54" name="Shape 51"/>
+          <p:cNvSpPr/>
+          <p:nvPr/>
+        </p:nvSpPr>
+        <p:spPr>
+          <a:xfrm>
+            <a:off x="457200" y="4828032"/>
+            <a:ext cx="8321040" cy="16459"/>
+          </a:xfrm>
+          <a:prstGeom prst="rect">
+            <a:avLst/>
+          </a:prstGeom>
+          <a:solidFill>
+            <a:srgbClr val="D1D5DB"/>
+          </a:solidFill>
+          <a:ln w="12700">
+            <a:solidFill>
+              <a:srgbClr val="D1D5DB"/>
+            </a:solidFill>
+            <a:prstDash val="solid"/>
+          </a:ln>
+        </p:spPr>
+      </p:sp>
+      <p:sp>
+        <p:nvSpPr>
+          <p:cNvPr id="55" name="Text 52"/>
+          <p:cNvSpPr/>
+          <p:nvPr/>
+        </p:nvSpPr>
+        <p:spPr>
+          <a:xfrm>
+            <a:off x="457200" y="4882896"/>
+            <a:ext cx="8321040" cy="201168"/>
+          </a:xfrm>
+          <a:prstGeom prst="rect">
+            <a:avLst/>
+          </a:prstGeom>
+          <a:noFill/>
+          <a:ln/>
+        </p:spPr>
+        <p:txBody>
+          <a:bodyPr wrap="square" rtlCol="0" anchor="ctr"/>
+          <a:lstStyle/>
+          <a:p>
+            <a:pPr indent="0" marL="0">
+              <a:buNone/>
+            </a:pPr>
+            <a:r>
+              <a:rPr lang="en-US" sz="900" i="1" dirty="0">
                 <a:solidFill>
                   <a:srgbClr val="6B7280"/>
                 </a:solidFill>
@@ -3656,421 +5250,9 @@
                 <a:ea typeface="Calibri" pitchFamily="34" charset="-122"/>
                 <a:cs typeface="Calibri" pitchFamily="34" charset="-120"/>
               </a:rPr>
-              <a:t>General dusting, front glass cleaning, office mopping/sweeping/vacuuming (weekly); desk dusting (quarterly)</a:t>
-            </a:r>
-            <a:endParaRPr lang="en-US" sz="1100" dirty="0"/>
-          </a:p>
-        </p:txBody>
-      </p:sp>
-      <p:sp>
-        <p:nvSpPr>
-          <p:cNvPr id="11" name="Shape 8"/>
-          <p:cNvSpPr/>
-          <p:nvPr/>
-        </p:nvSpPr>
-        <p:spPr>
-          <a:xfrm>
-            <a:off x="457200" y="2139696"/>
-            <a:ext cx="3931920" cy="16459"/>
-          </a:xfrm>
-          <a:prstGeom prst="rect">
-            <a:avLst/>
-          </a:prstGeom>
-          <a:solidFill>
-            <a:srgbClr val="D1D5DB"/>
-          </a:solidFill>
-          <a:ln w="12700">
-            <a:solidFill>
-              <a:srgbClr val="D1D5DB"/>
-            </a:solidFill>
-            <a:prstDash val="solid"/>
-          </a:ln>
-        </p:spPr>
-      </p:sp>
-      <p:sp>
-        <p:nvSpPr>
-          <p:cNvPr id="12" name="Text 9"/>
-          <p:cNvSpPr/>
-          <p:nvPr/>
-        </p:nvSpPr>
-        <p:spPr>
-          <a:xfrm>
-            <a:off x="457200" y="2194560"/>
-            <a:ext cx="3931920" cy="256032"/>
-          </a:xfrm>
-          <a:prstGeom prst="rect">
-            <a:avLst/>
-          </a:prstGeom>
-          <a:noFill/>
-          <a:ln/>
-        </p:spPr>
-        <p:txBody>
-          <a:bodyPr wrap="square" rtlCol="0" anchor="ctr"/>
-          <a:lstStyle/>
-          <a:p>
-            <a:pPr indent="0" marL="0">
-              <a:buNone/>
-            </a:pPr>
-            <a:r>
-              <a:rPr lang="en-US" sz="1200" b="1" dirty="0">
-                <a:solidFill>
-                  <a:srgbClr val="374151"/>
-                </a:solidFill>
-                <a:latin typeface="Trebuchet MS" pitchFamily="34" charset="0"/>
-                <a:ea typeface="Trebuchet MS" pitchFamily="34" charset="-122"/>
-                <a:cs typeface="Trebuchet MS" pitchFamily="34" charset="-120"/>
-              </a:rPr>
-              <a:t>Restrooms — 3 Total</a:t>
-            </a:r>
-            <a:endParaRPr lang="en-US" sz="1200" dirty="0"/>
-          </a:p>
-        </p:txBody>
-      </p:sp>
-      <p:sp>
-        <p:nvSpPr>
-          <p:cNvPr id="13" name="Text 10"/>
-          <p:cNvSpPr/>
-          <p:nvPr/>
-        </p:nvSpPr>
-        <p:spPr>
-          <a:xfrm>
-            <a:off x="457200" y="2487168"/>
-            <a:ext cx="3931920" cy="749808"/>
-          </a:xfrm>
-          <a:prstGeom prst="rect">
-            <a:avLst/>
-          </a:prstGeom>
-          <a:noFill/>
-          <a:ln/>
-        </p:spPr>
-        <p:txBody>
-          <a:bodyPr wrap="square" rtlCol="0" anchor="ctr"/>
-          <a:lstStyle/>
-          <a:p>
-            <a:pPr indent="0" marL="0">
-              <a:buNone/>
-            </a:pPr>
-            <a:r>
-              <a:rPr lang="en-US" sz="1100" dirty="0">
-                <a:solidFill>
-                  <a:srgbClr val="6B7280"/>
-                </a:solidFill>
-                <a:latin typeface="Calibri" pitchFamily="34" charset="0"/>
-                <a:ea typeface="Calibri" pitchFamily="34" charset="-122"/>
-                <a:cs typeface="Calibri" pitchFamily="34" charset="-120"/>
-              </a:rPr>
-              <a:t>Full sanitize &amp; disinfect all fixtures, mop &amp; disinfect floors, clean mirrors &amp; chrome, empty &amp; reline trash (weekly)</a:t>
-            </a:r>
-            <a:endParaRPr lang="en-US" sz="1100" dirty="0"/>
-          </a:p>
-        </p:txBody>
-      </p:sp>
-      <p:sp>
-        <p:nvSpPr>
-          <p:cNvPr id="14" name="Shape 11"/>
-          <p:cNvSpPr/>
-          <p:nvPr/>
-        </p:nvSpPr>
-        <p:spPr>
-          <a:xfrm>
-            <a:off x="457200" y="3273552"/>
-            <a:ext cx="3931920" cy="16459"/>
-          </a:xfrm>
-          <a:prstGeom prst="rect">
-            <a:avLst/>
-          </a:prstGeom>
-          <a:solidFill>
-            <a:srgbClr val="D1D5DB"/>
-          </a:solidFill>
-          <a:ln w="12700">
-            <a:solidFill>
-              <a:srgbClr val="D1D5DB"/>
-            </a:solidFill>
-            <a:prstDash val="solid"/>
-          </a:ln>
-        </p:spPr>
-      </p:sp>
-      <p:sp>
-        <p:nvSpPr>
-          <p:cNvPr id="15" name="Text 12"/>
-          <p:cNvSpPr/>
-          <p:nvPr/>
-        </p:nvSpPr>
-        <p:spPr>
-          <a:xfrm>
-            <a:off x="457200" y="3328416"/>
-            <a:ext cx="3931920" cy="256032"/>
-          </a:xfrm>
-          <a:prstGeom prst="rect">
-            <a:avLst/>
-          </a:prstGeom>
-          <a:noFill/>
-          <a:ln/>
-        </p:spPr>
-        <p:txBody>
-          <a:bodyPr wrap="square" rtlCol="0" anchor="ctr"/>
-          <a:lstStyle/>
-          <a:p>
-            <a:pPr indent="0" marL="0">
-              <a:buNone/>
-            </a:pPr>
-            <a:r>
-              <a:rPr lang="en-US" sz="1200" b="1" dirty="0">
-                <a:solidFill>
-                  <a:srgbClr val="374151"/>
-                </a:solidFill>
-                <a:latin typeface="Trebuchet MS" pitchFamily="34" charset="0"/>
-                <a:ea typeface="Trebuchet MS" pitchFamily="34" charset="-122"/>
-                <a:cs typeface="Trebuchet MS" pitchFamily="34" charset="-120"/>
-              </a:rPr>
-              <a:t>Break Room / Kitchen</a:t>
-            </a:r>
-            <a:endParaRPr lang="en-US" sz="1200" dirty="0"/>
-          </a:p>
-        </p:txBody>
-      </p:sp>
-      <p:sp>
-        <p:nvSpPr>
-          <p:cNvPr id="16" name="Text 13"/>
-          <p:cNvSpPr/>
-          <p:nvPr/>
-        </p:nvSpPr>
-        <p:spPr>
-          <a:xfrm>
-            <a:off x="457200" y="3621024"/>
-            <a:ext cx="3931920" cy="749808"/>
-          </a:xfrm>
-          <a:prstGeom prst="rect">
-            <a:avLst/>
-          </a:prstGeom>
-          <a:noFill/>
-          <a:ln/>
-        </p:spPr>
-        <p:txBody>
-          <a:bodyPr wrap="square" rtlCol="0" anchor="ctr"/>
-          <a:lstStyle/>
-          <a:p>
-            <a:pPr indent="0" marL="0">
-              <a:buNone/>
-            </a:pPr>
-            <a:r>
-              <a:rPr lang="en-US" sz="1100" dirty="0">
-                <a:solidFill>
-                  <a:srgbClr val="6B7280"/>
-                </a:solidFill>
-                <a:latin typeface="Calibri" pitchFamily="34" charset="0"/>
-                <a:ea typeface="Calibri" pitchFamily="34" charset="-122"/>
-                <a:cs typeface="Calibri" pitchFamily="34" charset="-120"/>
-              </a:rPr>
-              <a:t>Wipe countertops &amp; tables, inside &amp; outside of microwave, outside of fridge &amp; water machine, breakroom tables &amp; chairs (weekly); inside fridge (monthly)</a:t>
-            </a:r>
-            <a:endParaRPr lang="en-US" sz="1100" dirty="0"/>
-          </a:p>
-        </p:txBody>
-      </p:sp>
-      <p:sp>
-        <p:nvSpPr>
-          <p:cNvPr id="17" name="Shape 14"/>
-          <p:cNvSpPr/>
-          <p:nvPr/>
-        </p:nvSpPr>
-        <p:spPr>
-          <a:xfrm>
-            <a:off x="4617720" y="1024128"/>
-            <a:ext cx="16459" cy="3520440"/>
-          </a:xfrm>
-          <a:prstGeom prst="rect">
-            <a:avLst/>
-          </a:prstGeom>
-          <a:solidFill>
-            <a:srgbClr val="D1D5DB"/>
-          </a:solidFill>
-          <a:ln w="12700">
-            <a:solidFill>
-              <a:srgbClr val="D1D5DB"/>
-            </a:solidFill>
-            <a:prstDash val="solid"/>
-          </a:ln>
-        </p:spPr>
-      </p:sp>
-      <p:sp>
-        <p:nvSpPr>
-          <p:cNvPr id="18" name="Text 15"/>
-          <p:cNvSpPr/>
-          <p:nvPr/>
-        </p:nvSpPr>
-        <p:spPr>
-          <a:xfrm>
-            <a:off x="4800600" y="1060704"/>
-            <a:ext cx="3931920" cy="256032"/>
-          </a:xfrm>
-          <a:prstGeom prst="rect">
-            <a:avLst/>
-          </a:prstGeom>
-          <a:noFill/>
-          <a:ln/>
-        </p:spPr>
-        <p:txBody>
-          <a:bodyPr wrap="square" rtlCol="0" anchor="ctr"/>
-          <a:lstStyle/>
-          <a:p>
-            <a:pPr indent="0" marL="0">
-              <a:buNone/>
-            </a:pPr>
-            <a:r>
-              <a:rPr lang="en-US" sz="1200" b="1" dirty="0">
-                <a:solidFill>
-                  <a:srgbClr val="374151"/>
-                </a:solidFill>
-                <a:latin typeface="Trebuchet MS" pitchFamily="34" charset="0"/>
-                <a:ea typeface="Trebuchet MS" pitchFamily="34" charset="-122"/>
-                <a:cs typeface="Trebuchet MS" pitchFamily="34" charset="-120"/>
-              </a:rPr>
-              <a:t>Warehouse / Production Floor</a:t>
-            </a:r>
-            <a:endParaRPr lang="en-US" sz="1200" dirty="0"/>
-          </a:p>
-        </p:txBody>
-      </p:sp>
-      <p:sp>
-        <p:nvSpPr>
-          <p:cNvPr id="19" name="Text 16"/>
-          <p:cNvSpPr/>
-          <p:nvPr/>
-        </p:nvSpPr>
-        <p:spPr>
-          <a:xfrm>
-            <a:off x="4800600" y="1353312"/>
-            <a:ext cx="3931920" cy="749808"/>
-          </a:xfrm>
-          <a:prstGeom prst="rect">
-            <a:avLst/>
-          </a:prstGeom>
-          <a:noFill/>
-          <a:ln/>
-        </p:spPr>
-        <p:txBody>
-          <a:bodyPr wrap="square" rtlCol="0" anchor="ctr"/>
-          <a:lstStyle/>
-          <a:p>
-            <a:pPr indent="0" marL="0">
-              <a:buNone/>
-            </a:pPr>
-            <a:r>
-              <a:rPr lang="en-US" sz="1100" dirty="0">
-                <a:solidFill>
-                  <a:srgbClr val="6B7280"/>
-                </a:solidFill>
-                <a:latin typeface="Calibri" pitchFamily="34" charset="0"/>
-                <a:ea typeface="Calibri" pitchFamily="34" charset="-122"/>
-                <a:cs typeface="Calibri" pitchFamily="34" charset="-120"/>
-              </a:rPr>
-              <a:t>Full dust mopping throughout (weekly)</a:t>
-            </a:r>
-            <a:endParaRPr lang="en-US" sz="1100" dirty="0"/>
-          </a:p>
-        </p:txBody>
-      </p:sp>
-      <p:sp>
-        <p:nvSpPr>
-          <p:cNvPr id="20" name="Shape 17"/>
-          <p:cNvSpPr/>
-          <p:nvPr/>
-        </p:nvSpPr>
-        <p:spPr>
-          <a:xfrm>
-            <a:off x="4800600" y="2139696"/>
-            <a:ext cx="3931920" cy="16459"/>
-          </a:xfrm>
-          <a:prstGeom prst="rect">
-            <a:avLst/>
-          </a:prstGeom>
-          <a:solidFill>
-            <a:srgbClr val="D1D5DB"/>
-          </a:solidFill>
-          <a:ln w="12700">
-            <a:solidFill>
-              <a:srgbClr val="D1D5DB"/>
-            </a:solidFill>
-            <a:prstDash val="solid"/>
-          </a:ln>
-        </p:spPr>
-      </p:sp>
-      <p:sp>
-        <p:nvSpPr>
-          <p:cNvPr id="21" name="Text 18"/>
-          <p:cNvSpPr/>
-          <p:nvPr/>
-        </p:nvSpPr>
-        <p:spPr>
-          <a:xfrm>
-            <a:off x="4800600" y="2194560"/>
-            <a:ext cx="3931920" cy="256032"/>
-          </a:xfrm>
-          <a:prstGeom prst="rect">
-            <a:avLst/>
-          </a:prstGeom>
-          <a:noFill/>
-          <a:ln/>
-        </p:spPr>
-        <p:txBody>
-          <a:bodyPr wrap="square" rtlCol="0" anchor="ctr"/>
-          <a:lstStyle/>
-          <a:p>
-            <a:pPr indent="0" marL="0">
-              <a:buNone/>
-            </a:pPr>
-            <a:r>
-              <a:rPr lang="en-US" sz="1200" b="1" dirty="0">
-                <a:solidFill>
-                  <a:srgbClr val="374151"/>
-                </a:solidFill>
-                <a:latin typeface="Trebuchet MS" pitchFamily="34" charset="0"/>
-                <a:ea typeface="Trebuchet MS" pitchFamily="34" charset="-122"/>
-                <a:cs typeface="Trebuchet MS" pitchFamily="34" charset="-120"/>
-              </a:rPr>
-              <a:t>Periodic Services</a:t>
-            </a:r>
-            <a:endParaRPr lang="en-US" sz="1200" dirty="0"/>
-          </a:p>
-        </p:txBody>
-      </p:sp>
-      <p:sp>
-        <p:nvSpPr>
-          <p:cNvPr id="22" name="Text 19"/>
-          <p:cNvSpPr/>
-          <p:nvPr/>
-        </p:nvSpPr>
-        <p:spPr>
-          <a:xfrm>
-            <a:off x="4800600" y="2487168"/>
-            <a:ext cx="3931920" cy="749808"/>
-          </a:xfrm>
-          <a:prstGeom prst="rect">
-            <a:avLst/>
-          </a:prstGeom>
-          <a:noFill/>
-          <a:ln/>
-        </p:spPr>
-        <p:txBody>
-          <a:bodyPr wrap="square" rtlCol="0" anchor="ctr"/>
-          <a:lstStyle/>
-          <a:p>
-            <a:pPr indent="0" marL="0">
-              <a:buNone/>
-            </a:pPr>
-            <a:r>
-              <a:rPr lang="en-US" sz="1100" dirty="0">
-                <a:solidFill>
-                  <a:srgbClr val="6B7280"/>
-                </a:solidFill>
-                <a:latin typeface="Calibri" pitchFamily="34" charset="0"/>
-                <a:ea typeface="Calibri" pitchFamily="34" charset="-122"/>
-                <a:cs typeface="Calibri" pitchFamily="34" charset="-120"/>
-              </a:rPr>
-              <a:t>Baseboard cleaning (quarterly); OrangeQC quality inspection reports (weekly)</a:t>
-            </a:r>
-            <a:endParaRPr lang="en-US" sz="1100" dirty="0"/>
+              <a:t>All frequencies confirmed at onboarding walkthrough with CEO and QA Manager.</a:t>
+            </a:r>
+            <a:endParaRPr lang="en-US" sz="900" dirty="0"/>
           </a:p>
         </p:txBody>
       </p:sp>
@@ -4140,7 +5322,7 @@
         <p:spPr>
           <a:xfrm>
             <a:off x="457200" y="91440"/>
-            <a:ext cx="7315200" cy="164592"/>
+            <a:ext cx="6858000" cy="164592"/>
           </a:xfrm>
           <a:prstGeom prst="rect">
             <a:avLst/>
@@ -4178,8 +5360,8 @@
         </p:nvSpPr>
         <p:spPr>
           <a:xfrm>
-            <a:off x="8686800" y="73152"/>
-            <a:ext cx="365760" cy="164592"/>
+            <a:off x="8595360" y="73152"/>
+            <a:ext cx="457200" cy="164592"/>
           </a:xfrm>
           <a:prstGeom prst="rect">
             <a:avLst/>
@@ -4225,8 +5407,8 @@
         </p:blipFill>
         <p:spPr>
           <a:xfrm>
-            <a:off x="7973568" y="4663440"/>
-            <a:ext cx="1051560" cy="402336"/>
+            <a:off x="7936992" y="4626864"/>
+            <a:ext cx="1078992" cy="411480"/>
           </a:xfrm>
           <a:prstGeom prst="rect">
             <a:avLst/>
@@ -4242,7 +5424,7 @@
         <p:spPr>
           <a:xfrm>
             <a:off x="457200" y="256032"/>
-            <a:ext cx="8229600" cy="438912"/>
+            <a:ext cx="8321040" cy="457200"/>
           </a:xfrm>
           <a:prstGeom prst="rect">
             <a:avLst/>
@@ -4280,8 +5462,8 @@
         </p:nvSpPr>
         <p:spPr>
           <a:xfrm>
-            <a:off x="457200" y="694944"/>
-            <a:ext cx="8229600" cy="237744"/>
+            <a:off x="457200" y="713232"/>
+            <a:ext cx="8321040" cy="237744"/>
           </a:xfrm>
           <a:prstGeom prst="rect">
             <a:avLst/>
@@ -4320,7 +5502,7 @@
         <p:spPr>
           <a:xfrm>
             <a:off x="457200" y="987552"/>
-            <a:ext cx="8229600" cy="16459"/>
+            <a:ext cx="8321040" cy="16459"/>
           </a:xfrm>
           <a:prstGeom prst="rect">
             <a:avLst/>
@@ -4352,8 +5534,8 @@
         </p:blipFill>
         <p:spPr>
           <a:xfrm>
-            <a:off x="1143000" y="1078992"/>
-            <a:ext cx="960120" cy="960120"/>
+            <a:off x="1271016" y="1078992"/>
+            <a:ext cx="1005840" cy="1005840"/>
           </a:xfrm>
           <a:prstGeom prst="ellipse">
             <a:avLst/>
@@ -4368,8 +5550,8 @@
         </p:nvSpPr>
         <p:spPr>
           <a:xfrm>
-            <a:off x="457200" y="2103120"/>
-            <a:ext cx="2651760" cy="274320"/>
+            <a:off x="457200" y="2157984"/>
+            <a:ext cx="2633472" cy="274320"/>
           </a:xfrm>
           <a:prstGeom prst="rect">
             <a:avLst/>
@@ -4407,8 +5589,8 @@
         </p:nvSpPr>
         <p:spPr>
           <a:xfrm>
-            <a:off x="457200" y="2395728"/>
-            <a:ext cx="2651760" cy="274320"/>
+            <a:off x="457200" y="2450592"/>
+            <a:ext cx="2633472" cy="274320"/>
           </a:xfrm>
           <a:prstGeom prst="rect">
             <a:avLst/>
@@ -4446,8 +5628,8 @@
         </p:nvSpPr>
         <p:spPr>
           <a:xfrm>
-            <a:off x="457200" y="2688336"/>
-            <a:ext cx="2651760" cy="219456"/>
+            <a:off x="457200" y="2743200"/>
+            <a:ext cx="2633472" cy="237744"/>
           </a:xfrm>
           <a:prstGeom prst="rect">
             <a:avLst/>
@@ -4485,8 +5667,8 @@
         </p:nvSpPr>
         <p:spPr>
           <a:xfrm>
-            <a:off x="457200" y="2944368"/>
-            <a:ext cx="2651760" cy="16459"/>
+            <a:off x="457200" y="3017520"/>
+            <a:ext cx="2633472" cy="16459"/>
           </a:xfrm>
           <a:prstGeom prst="rect">
             <a:avLst/>
@@ -4510,20 +5692,20 @@
         </p:nvSpPr>
         <p:spPr>
           <a:xfrm>
-            <a:off x="457200" y="3017520"/>
-            <a:ext cx="2651760" cy="987552"/>
-          </a:xfrm>
-          <a:prstGeom prst="rect">
-            <a:avLst/>
-          </a:prstGeom>
-          <a:noFill/>
-          <a:ln/>
-        </p:spPr>
-        <p:txBody>
-          <a:bodyPr wrap="square" rtlCol="0" anchor="ctr"/>
-          <a:lstStyle/>
-          <a:p>
-            <a:pPr algn="l" indent="0" marL="0">
+            <a:off x="457200" y="3090672"/>
+            <a:ext cx="2633472" cy="1152144"/>
+          </a:xfrm>
+          <a:prstGeom prst="rect">
+            <a:avLst/>
+          </a:prstGeom>
+          <a:noFill/>
+          <a:ln/>
+        </p:spPr>
+        <p:txBody>
+          <a:bodyPr wrap="square" rtlCol="0" anchor="ctr"/>
+          <a:lstStyle/>
+          <a:p>
+            <a:pPr indent="0" marL="0">
               <a:buNone/>
             </a:pPr>
             <a:r>
@@ -4535,7 +5717,7 @@
                 <a:ea typeface="Calibri" pitchFamily="34" charset="-122"/>
                 <a:cs typeface="Calibri" pitchFamily="34" charset="-120"/>
               </a:rPr>
-              <a:t>Your primary contact. Picks up the phone personally — no account managers, no call routing, no corporate layers between you and the person accountable.</a:t>
+              <a:t>Your primary point of contact. Reachable directly by phone — no account managers, no routing, no corporate buffer between you and the person ultimately accountable for every service.</a:t>
             </a:r>
             <a:endParaRPr lang="en-US" sz="1050" dirty="0"/>
           </a:p>
@@ -4549,8 +5731,8 @@
         </p:nvSpPr>
         <p:spPr>
           <a:xfrm>
-            <a:off x="3182112" y="1024128"/>
-            <a:ext cx="16459" cy="3730752"/>
+            <a:off x="3127248" y="1005840"/>
+            <a:ext cx="16459" cy="3621024"/>
           </a:xfrm>
           <a:prstGeom prst="rect">
             <a:avLst/>
@@ -4582,8 +5764,8 @@
         </p:blipFill>
         <p:spPr>
           <a:xfrm>
-            <a:off x="4023360" y="1078992"/>
-            <a:ext cx="960120" cy="960120"/>
+            <a:off x="4069080" y="1078992"/>
+            <a:ext cx="1005840" cy="1005840"/>
           </a:xfrm>
           <a:prstGeom prst="ellipse">
             <a:avLst/>
@@ -4598,8 +5780,8 @@
         </p:nvSpPr>
         <p:spPr>
           <a:xfrm>
-            <a:off x="3337560" y="2103120"/>
-            <a:ext cx="2651760" cy="274320"/>
+            <a:off x="3255264" y="2157984"/>
+            <a:ext cx="2633472" cy="274320"/>
           </a:xfrm>
           <a:prstGeom prst="rect">
             <a:avLst/>
@@ -4637,8 +5819,8 @@
         </p:nvSpPr>
         <p:spPr>
           <a:xfrm>
-            <a:off x="3337560" y="2395728"/>
-            <a:ext cx="2651760" cy="274320"/>
+            <a:off x="3255264" y="2450592"/>
+            <a:ext cx="2633472" cy="274320"/>
           </a:xfrm>
           <a:prstGeom prst="rect">
             <a:avLst/>
@@ -4676,8 +5858,8 @@
         </p:nvSpPr>
         <p:spPr>
           <a:xfrm>
-            <a:off x="3337560" y="2688336"/>
-            <a:ext cx="2651760" cy="219456"/>
+            <a:off x="3255264" y="2743200"/>
+            <a:ext cx="2633472" cy="237744"/>
           </a:xfrm>
           <a:prstGeom prst="rect">
             <a:avLst/>
@@ -4715,8 +5897,8 @@
         </p:nvSpPr>
         <p:spPr>
           <a:xfrm>
-            <a:off x="3337560" y="2944368"/>
-            <a:ext cx="2651760" cy="16459"/>
+            <a:off x="3255264" y="3017520"/>
+            <a:ext cx="2633472" cy="16459"/>
           </a:xfrm>
           <a:prstGeom prst="rect">
             <a:avLst/>
@@ -4740,20 +5922,20 @@
         </p:nvSpPr>
         <p:spPr>
           <a:xfrm>
-            <a:off x="3337560" y="3017520"/>
-            <a:ext cx="2651760" cy="987552"/>
-          </a:xfrm>
-          <a:prstGeom prst="rect">
-            <a:avLst/>
-          </a:prstGeom>
-          <a:noFill/>
-          <a:ln/>
-        </p:spPr>
-        <p:txBody>
-          <a:bodyPr wrap="square" rtlCol="0" anchor="ctr"/>
-          <a:lstStyle/>
-          <a:p>
-            <a:pPr algn="l" indent="0" marL="0">
+            <a:off x="3255264" y="3090672"/>
+            <a:ext cx="2633472" cy="1152144"/>
+          </a:xfrm>
+          <a:prstGeom prst="rect">
+            <a:avLst/>
+          </a:prstGeom>
+          <a:noFill/>
+          <a:ln/>
+        </p:spPr>
+        <p:txBody>
+          <a:bodyPr wrap="square" rtlCol="0" anchor="ctr"/>
+          <a:lstStyle/>
+          <a:p>
+            <a:pPr indent="0" marL="0">
               <a:buNone/>
             </a:pPr>
             <a:r>
@@ -4765,7 +5947,7 @@
                 <a:ea typeface="Calibri" pitchFamily="34" charset="-122"/>
                 <a:cs typeface="Calibri" pitchFamily="34" charset="-120"/>
               </a:rPr>
-              <a:t>Conducts weekly on-site inspections, logs every score in OrangeQC, and personally owns resolution follow-through on every open ticket.</a:t>
+              <a:t>Conducts weekly on-site inspections, logs every score, and personally owns resolution follow-through on every open service ticket. If a score drops, she is the first to know and the first to respond.</a:t>
             </a:r>
             <a:endParaRPr lang="en-US" sz="1050" dirty="0"/>
           </a:p>
@@ -4779,8 +5961,8 @@
         </p:nvSpPr>
         <p:spPr>
           <a:xfrm>
-            <a:off x="6080760" y="1024128"/>
-            <a:ext cx="16459" cy="3730752"/>
+            <a:off x="5925312" y="1005840"/>
+            <a:ext cx="16459" cy="3621024"/>
           </a:xfrm>
           <a:prstGeom prst="rect">
             <a:avLst/>
@@ -4812,8 +5994,8 @@
         </p:blipFill>
         <p:spPr>
           <a:xfrm>
-            <a:off x="6922008" y="1078992"/>
-            <a:ext cx="960120" cy="960120"/>
+            <a:off x="6867144" y="1078992"/>
+            <a:ext cx="1005840" cy="1005840"/>
           </a:xfrm>
           <a:prstGeom prst="ellipse">
             <a:avLst/>
@@ -4828,8 +6010,8 @@
         </p:nvSpPr>
         <p:spPr>
           <a:xfrm>
-            <a:off x="6236208" y="2103120"/>
-            <a:ext cx="2651760" cy="274320"/>
+            <a:off x="6053328" y="2157984"/>
+            <a:ext cx="2633472" cy="274320"/>
           </a:xfrm>
           <a:prstGeom prst="rect">
             <a:avLst/>
@@ -4867,8 +6049,8 @@
         </p:nvSpPr>
         <p:spPr>
           <a:xfrm>
-            <a:off x="6236208" y="2395728"/>
-            <a:ext cx="2651760" cy="274320"/>
+            <a:off x="6053328" y="2450592"/>
+            <a:ext cx="2633472" cy="274320"/>
           </a:xfrm>
           <a:prstGeom prst="rect">
             <a:avLst/>
@@ -4906,8 +6088,8 @@
         </p:nvSpPr>
         <p:spPr>
           <a:xfrm>
-            <a:off x="6236208" y="2688336"/>
-            <a:ext cx="2651760" cy="219456"/>
+            <a:off x="6053328" y="2743200"/>
+            <a:ext cx="2633472" cy="237744"/>
           </a:xfrm>
           <a:prstGeom prst="rect">
             <a:avLst/>
@@ -4945,8 +6127,8 @@
         </p:nvSpPr>
         <p:spPr>
           <a:xfrm>
-            <a:off x="6236208" y="2944368"/>
-            <a:ext cx="2651760" cy="16459"/>
+            <a:off x="6053328" y="3017520"/>
+            <a:ext cx="2633472" cy="16459"/>
           </a:xfrm>
           <a:prstGeom prst="rect">
             <a:avLst/>
@@ -4970,20 +6152,20 @@
         </p:nvSpPr>
         <p:spPr>
           <a:xfrm>
-            <a:off x="6236208" y="3017520"/>
-            <a:ext cx="2651760" cy="987552"/>
-          </a:xfrm>
-          <a:prstGeom prst="rect">
-            <a:avLst/>
-          </a:prstGeom>
-          <a:noFill/>
-          <a:ln/>
-        </p:spPr>
-        <p:txBody>
-          <a:bodyPr wrap="square" rtlCol="0" anchor="ctr"/>
-          <a:lstStyle/>
-          <a:p>
-            <a:pPr algn="l" indent="0" marL="0">
+            <a:off x="6053328" y="3090672"/>
+            <a:ext cx="2633472" cy="1152144"/>
+          </a:xfrm>
+          <a:prstGeom prst="rect">
+            <a:avLst/>
+          </a:prstGeom>
+          <a:noFill/>
+          <a:ln/>
+        </p:spPr>
+        <p:txBody>
+          <a:bodyPr wrap="square" rtlCol="0" anchor="ctr"/>
+          <a:lstStyle/>
+          <a:p>
+            <a:pPr indent="0" marL="0">
               <a:buNone/>
             </a:pPr>
             <a:r>
@@ -4995,7 +6177,7 @@
                 <a:ea typeface="Calibri" pitchFamily="34" charset="-122"/>
                 <a:cs typeface="Calibri" pitchFamily="34" charset="-120"/>
               </a:rPr>
-              <a:t>Handles recruiting, vetting, and ongoing training of custodial staff. Ensures every person assigned to your facility is background-checked, trained, and accountable.</a:t>
+              <a:t>Handles recruiting, vetting, background checks, and ongoing training for all custodial staff. Every person assigned to your facility is screened, trained to your environment, and held to documented standards.</a:t>
             </a:r>
             <a:endParaRPr lang="en-US" sz="1050" dirty="0"/>
           </a:p>
@@ -5009,8 +6191,8 @@
         </p:nvSpPr>
         <p:spPr>
           <a:xfrm>
-            <a:off x="457200" y="4133088"/>
-            <a:ext cx="8229600" cy="16459"/>
+            <a:off x="457200" y="4315968"/>
+            <a:ext cx="8321040" cy="16459"/>
           </a:xfrm>
           <a:prstGeom prst="rect">
             <a:avLst/>
@@ -5034,8 +6216,8 @@
         </p:nvSpPr>
         <p:spPr>
           <a:xfrm>
-            <a:off x="457200" y="4187952"/>
-            <a:ext cx="8046720" cy="256032"/>
+            <a:off x="457200" y="4370832"/>
+            <a:ext cx="8321040" cy="219456"/>
           </a:xfrm>
           <a:prstGeom prst="rect">
             <a:avLst/>
@@ -5051,7 +6233,7 @@
               <a:buNone/>
             </a:pPr>
             <a:r>
-              <a:rPr lang="en-US" sz="1050" i="1" dirty="0">
+              <a:rPr lang="en-US" sz="1000" i="1" dirty="0">
                 <a:solidFill>
                   <a:srgbClr val="6B7280"/>
                 </a:solidFill>
@@ -5061,7 +6243,7 @@
               </a:rPr>
               <a:t>"I've held the mop. I've been the crew. That's why we're built around accountability, not excuses." — Hereford Johnson, CEO</a:t>
             </a:r>
-            <a:endParaRPr lang="en-US" sz="1050" dirty="0"/>
+            <a:endParaRPr lang="en-US" sz="1000" dirty="0"/>
           </a:p>
         </p:txBody>
       </p:sp>
@@ -5131,7 +6313,7 @@
         <p:spPr>
           <a:xfrm>
             <a:off x="457200" y="91440"/>
-            <a:ext cx="7315200" cy="164592"/>
+            <a:ext cx="6858000" cy="164592"/>
           </a:xfrm>
           <a:prstGeom prst="rect">
             <a:avLst/>
@@ -5169,8 +6351,8 @@
         </p:nvSpPr>
         <p:spPr>
           <a:xfrm>
-            <a:off x="8686800" y="73152"/>
-            <a:ext cx="365760" cy="164592"/>
+            <a:off x="8595360" y="73152"/>
+            <a:ext cx="457200" cy="164592"/>
           </a:xfrm>
           <a:prstGeom prst="rect">
             <a:avLst/>
@@ -5216,8 +6398,8 @@
         </p:blipFill>
         <p:spPr>
           <a:xfrm>
-            <a:off x="7973568" y="4663440"/>
-            <a:ext cx="1051560" cy="402336"/>
+            <a:off x="7936992" y="4626864"/>
+            <a:ext cx="1078992" cy="411480"/>
           </a:xfrm>
           <a:prstGeom prst="rect">
             <a:avLst/>
@@ -5233,7 +6415,7 @@
         <p:spPr>
           <a:xfrm>
             <a:off x="457200" y="256032"/>
-            <a:ext cx="4937760" cy="475488"/>
+            <a:ext cx="8321040" cy="457200"/>
           </a:xfrm>
           <a:prstGeom prst="rect">
             <a:avLst/>
@@ -5271,8 +6453,8 @@
         </p:nvSpPr>
         <p:spPr>
           <a:xfrm>
-            <a:off x="457200" y="786384"/>
-            <a:ext cx="4937760" cy="16459"/>
+            <a:off x="457200" y="768096"/>
+            <a:ext cx="8321040" cy="16459"/>
           </a:xfrm>
           <a:prstGeom prst="rect">
             <a:avLst/>
@@ -5297,7 +6479,7 @@
         <p:spPr>
           <a:xfrm>
             <a:off x="457200" y="877824"/>
-            <a:ext cx="4937760" cy="1572768"/>
+            <a:ext cx="3401568" cy="804672"/>
           </a:xfrm>
           <a:prstGeom prst="rect">
             <a:avLst/>
@@ -5321,86 +6503,63 @@
                 <a:ea typeface="Calibri" pitchFamily="34" charset="-122"/>
                 <a:cs typeface="Calibri" pitchFamily="34" charset="-120"/>
               </a:rPr>
-              <a:t>Every MDF service is backed by a mobile inspection and ticketing platform that gives you real-time visibility into what's happening inside your facility.</a:t>
+              <a:t>Every MDF service is backed by a mobile inspection and ticketing platform that gives you real-time visibility into your facility. This is not an internal tool — it is client-facing accountability. You receive access to your own dashboard.</a:t>
             </a:r>
             <a:endParaRPr lang="en-US" sz="1100" dirty="0"/>
           </a:p>
+        </p:txBody>
+      </p:sp>
+      <p:sp>
+        <p:nvSpPr>
+          <p:cNvPr id="9" name="Shape 6"/>
+          <p:cNvSpPr/>
+          <p:nvPr/>
+        </p:nvSpPr>
+        <p:spPr>
+          <a:xfrm>
+            <a:off x="457200" y="1737360"/>
+            <a:ext cx="3401568" cy="16459"/>
+          </a:xfrm>
+          <a:prstGeom prst="rect">
+            <a:avLst/>
+          </a:prstGeom>
+          <a:solidFill>
+            <a:srgbClr val="D1D5DB"/>
+          </a:solidFill>
+          <a:ln w="12700">
+            <a:solidFill>
+              <a:srgbClr val="D1D5DB"/>
+            </a:solidFill>
+            <a:prstDash val="solid"/>
+          </a:ln>
+        </p:spPr>
+      </p:sp>
+      <p:sp>
+        <p:nvSpPr>
+          <p:cNvPr id="10" name="Text 7"/>
+          <p:cNvSpPr/>
+          <p:nvPr/>
+        </p:nvSpPr>
+        <p:spPr>
+          <a:xfrm>
+            <a:off x="457200" y="1810512"/>
+            <a:ext cx="3401568" cy="237744"/>
+          </a:xfrm>
+          <a:prstGeom prst="rect">
+            <a:avLst/>
+          </a:prstGeom>
+          <a:noFill/>
+          <a:ln/>
+        </p:spPr>
+        <p:txBody>
+          <a:bodyPr wrap="square" rtlCol="0" anchor="ctr"/>
+          <a:lstStyle/>
           <a:p>
             <a:pPr indent="0" marL="0">
               <a:buNone/>
             </a:pPr>
-            <a:endParaRPr lang="en-US" sz="1100" dirty="0"/>
-          </a:p>
-          <a:p>
-            <a:pPr indent="0" marL="0">
-              <a:buNone/>
-            </a:pPr>
-            <a:r>
-              <a:rPr lang="en-US" sz="1100" dirty="0">
-                <a:solidFill>
-                  <a:srgbClr val="6B7280"/>
-                </a:solidFill>
-                <a:latin typeface="Calibri" pitchFamily="34" charset="0"/>
-                <a:ea typeface="Calibri" pitchFamily="34" charset="-122"/>
-                <a:cs typeface="Calibri" pitchFamily="34" charset="-120"/>
-              </a:rPr>
-              <a:t>This is not an internal tool — it's a client-facing layer of accountability. You receive access to your own dashboard where inspection scores, service tickets, and resolution timelines are logged automatically after every visit.</a:t>
-            </a:r>
-            <a:endParaRPr lang="en-US" sz="1100" dirty="0"/>
-          </a:p>
-        </p:txBody>
-      </p:sp>
-      <p:sp>
-        <p:nvSpPr>
-          <p:cNvPr id="9" name="Shape 6"/>
-          <p:cNvSpPr/>
-          <p:nvPr/>
-        </p:nvSpPr>
-        <p:spPr>
-          <a:xfrm>
-            <a:off x="457200" y="2523744"/>
-            <a:ext cx="4937760" cy="16459"/>
-          </a:xfrm>
-          <a:prstGeom prst="rect">
-            <a:avLst/>
-          </a:prstGeom>
-          <a:solidFill>
-            <a:srgbClr val="D1D5DB"/>
-          </a:solidFill>
-          <a:ln w="12700">
-            <a:solidFill>
-              <a:srgbClr val="D1D5DB"/>
-            </a:solidFill>
-            <a:prstDash val="solid"/>
-          </a:ln>
-        </p:spPr>
-      </p:sp>
-      <p:sp>
-        <p:nvSpPr>
-          <p:cNvPr id="10" name="Text 7"/>
-          <p:cNvSpPr/>
-          <p:nvPr/>
-        </p:nvSpPr>
-        <p:spPr>
-          <a:xfrm>
-            <a:off x="457200" y="2615184"/>
-            <a:ext cx="1508760" cy="219456"/>
-          </a:xfrm>
-          <a:prstGeom prst="rect">
-            <a:avLst/>
-          </a:prstGeom>
-          <a:noFill/>
-          <a:ln/>
-        </p:spPr>
-        <p:txBody>
-          <a:bodyPr wrap="square" rtlCol="0" anchor="ctr"/>
-          <a:lstStyle/>
-          <a:p>
-            <a:pPr indent="0" marL="0">
-              <a:buNone/>
-            </a:pPr>
-            <a:r>
-              <a:rPr lang="en-US" sz="1100" b="1" dirty="0">
+            <a:r>
+              <a:rPr lang="en-US" sz="1200" b="1" dirty="0">
                 <a:solidFill>
                   <a:srgbClr val="374151"/>
                 </a:solidFill>
@@ -5410,7 +6569,7 @@
               </a:rPr>
               <a:t>Inspection Scoring</a:t>
             </a:r>
-            <a:endParaRPr lang="en-US" sz="1100" dirty="0"/>
+            <a:endParaRPr lang="en-US" sz="1200" dirty="0"/>
           </a:p>
         </p:txBody>
       </p:sp>
@@ -5422,8 +6581,8 @@
         </p:nvSpPr>
         <p:spPr>
           <a:xfrm>
-            <a:off x="2029968" y="2615184"/>
-            <a:ext cx="3291840" cy="457200"/>
+            <a:off x="457200" y="2084832"/>
+            <a:ext cx="3401568" cy="475488"/>
           </a:xfrm>
           <a:prstGeom prst="rect">
             <a:avLst/>
@@ -5447,7 +6606,7 @@
                 <a:ea typeface="Calibri" pitchFamily="34" charset="-122"/>
                 <a:cs typeface="Calibri" pitchFamily="34" charset="-120"/>
               </a:rPr>
-              <a:t>Every area graded at each visit. Scores trend over time — you see if standards are holding.</a:t>
+              <a:t>Every area is graded at each visit. Scores trend over time — you can see at a glance whether standards are holding or slipping, week over week.</a:t>
             </a:r>
             <a:endParaRPr lang="en-US" sz="1050" dirty="0"/>
           </a:p>
@@ -5461,8 +6620,8 @@
         </p:nvSpPr>
         <p:spPr>
           <a:xfrm>
-            <a:off x="457200" y="3182112"/>
-            <a:ext cx="4937760" cy="16459"/>
+            <a:off x="457200" y="2615184"/>
+            <a:ext cx="3401568" cy="16459"/>
           </a:xfrm>
           <a:prstGeom prst="rect">
             <a:avLst/>
@@ -5486,8 +6645,8 @@
         </p:nvSpPr>
         <p:spPr>
           <a:xfrm>
-            <a:off x="457200" y="3273552"/>
-            <a:ext cx="1508760" cy="219456"/>
+            <a:off x="457200" y="2670048"/>
+            <a:ext cx="3401568" cy="237744"/>
           </a:xfrm>
           <a:prstGeom prst="rect">
             <a:avLst/>
@@ -5503,7 +6662,7 @@
               <a:buNone/>
             </a:pPr>
             <a:r>
-              <a:rPr lang="en-US" sz="1100" b="1" dirty="0">
+              <a:rPr lang="en-US" sz="1200" b="1" dirty="0">
                 <a:solidFill>
                   <a:srgbClr val="374151"/>
                 </a:solidFill>
@@ -5511,9 +6670,9 @@
                 <a:ea typeface="Trebuchet MS" pitchFamily="34" charset="-122"/>
                 <a:cs typeface="Trebuchet MS" pitchFamily="34" charset="-120"/>
               </a:rPr>
-              <a:t>Service Tickets</a:t>
-            </a:r>
-            <a:endParaRPr lang="en-US" sz="1100" dirty="0"/>
+              <a:t>Service Ticket System</a:t>
+            </a:r>
+            <a:endParaRPr lang="en-US" sz="1200" dirty="0"/>
           </a:p>
         </p:txBody>
       </p:sp>
@@ -5525,8 +6684,8 @@
         </p:nvSpPr>
         <p:spPr>
           <a:xfrm>
-            <a:off x="2029968" y="3273552"/>
-            <a:ext cx="3291840" cy="457200"/>
+            <a:off x="457200" y="2944368"/>
+            <a:ext cx="3401568" cy="475488"/>
           </a:xfrm>
           <a:prstGeom prst="rect">
             <a:avLst/>
@@ -5550,7 +6709,7 @@
                 <a:ea typeface="Calibri" pitchFamily="34" charset="-122"/>
                 <a:cs typeface="Calibri" pitchFamily="34" charset="-120"/>
               </a:rPr>
-              <a:t>Any flagged issue creates a ticket, assigned and time-stamped. Resolution tracked to close.</a:t>
+              <a:t>Any flagged issue auto-creates a ticket, assigned to a team member and time-stamped. Resolution is tracked from open to close — nothing disappears.</a:t>
             </a:r>
             <a:endParaRPr lang="en-US" sz="1050" dirty="0"/>
           </a:p>
@@ -5564,8 +6723,8 @@
         </p:nvSpPr>
         <p:spPr>
           <a:xfrm>
-            <a:off x="457200" y="3840480"/>
-            <a:ext cx="4937760" cy="16459"/>
+            <a:off x="457200" y="3474720"/>
+            <a:ext cx="3401568" cy="16459"/>
           </a:xfrm>
           <a:prstGeom prst="rect">
             <a:avLst/>
@@ -5589,8 +6748,8 @@
         </p:nvSpPr>
         <p:spPr>
           <a:xfrm>
-            <a:off x="457200" y="3931920"/>
-            <a:ext cx="1508760" cy="219456"/>
+            <a:off x="457200" y="3529584"/>
+            <a:ext cx="3401568" cy="237744"/>
           </a:xfrm>
           <a:prstGeom prst="rect">
             <a:avLst/>
@@ -5606,7 +6765,7 @@
               <a:buNone/>
             </a:pPr>
             <a:r>
-              <a:rPr lang="en-US" sz="1100" b="1" dirty="0">
+              <a:rPr lang="en-US" sz="1200" b="1" dirty="0">
                 <a:solidFill>
                   <a:srgbClr val="374151"/>
                 </a:solidFill>
@@ -5614,9 +6773,9 @@
                 <a:ea typeface="Trebuchet MS" pitchFamily="34" charset="-122"/>
                 <a:cs typeface="Trebuchet MS" pitchFamily="34" charset="-120"/>
               </a:rPr>
-              <a:t>Documented History</a:t>
-            </a:r>
-            <a:endParaRPr lang="en-US" sz="1100" dirty="0"/>
+              <a:t>Full Audit Trail</a:t>
+            </a:r>
+            <a:endParaRPr lang="en-US" sz="1200" dirty="0"/>
           </a:p>
         </p:txBody>
       </p:sp>
@@ -5628,8 +6787,8 @@
         </p:nvSpPr>
         <p:spPr>
           <a:xfrm>
-            <a:off x="2029968" y="3931920"/>
-            <a:ext cx="3291840" cy="457200"/>
+            <a:off x="457200" y="3803904"/>
+            <a:ext cx="3401568" cy="475488"/>
           </a:xfrm>
           <a:prstGeom prst="rect">
             <a:avLst/>
@@ -5653,7 +6812,7 @@
                 <a:ea typeface="Calibri" pitchFamily="34" charset="-122"/>
                 <a:cs typeface="Calibri" pitchFamily="34" charset="-120"/>
               </a:rPr>
-              <a:t>Full audit trail of every service. Useful for compliance reviews, audits, and accountability records.</a:t>
+              <a:t>Every service, every score, every resolved ticket lives in your dashboard. Useful for compliance reviews, facility audits, and ongoing accountability records.</a:t>
             </a:r>
             <a:endParaRPr lang="en-US" sz="1050" dirty="0"/>
           </a:p>
@@ -5667,8 +6826,8 @@
         </p:nvSpPr>
         <p:spPr>
           <a:xfrm>
-            <a:off x="457200" y="4572000"/>
-            <a:ext cx="4937760" cy="16459"/>
+            <a:off x="457200" y="4443984"/>
+            <a:ext cx="3401568" cy="16459"/>
           </a:xfrm>
           <a:prstGeom prst="rect">
             <a:avLst/>
@@ -5692,8 +6851,8 @@
         </p:nvSpPr>
         <p:spPr>
           <a:xfrm>
-            <a:off x="457200" y="4626864"/>
-            <a:ext cx="4937760" cy="201168"/>
+            <a:off x="457200" y="4498848"/>
+            <a:ext cx="3401568" cy="182880"/>
           </a:xfrm>
           <a:prstGeom prst="rect">
             <a:avLst/>
@@ -5731,8 +6890,8 @@
         </p:nvSpPr>
         <p:spPr>
           <a:xfrm>
-            <a:off x="5532120" y="237744"/>
-            <a:ext cx="16459" cy="4434840"/>
+            <a:off x="4041648" y="768096"/>
+            <a:ext cx="16459" cy="3877056"/>
           </a:xfrm>
           <a:prstGeom prst="rect">
             <a:avLst/>
@@ -5756,8 +6915,8 @@
         </p:nvSpPr>
         <p:spPr>
           <a:xfrm>
-            <a:off x="5742432" y="438912"/>
-            <a:ext cx="3108960" cy="182880"/>
+            <a:off x="4133088" y="859536"/>
+            <a:ext cx="4645152" cy="182880"/>
           </a:xfrm>
           <a:prstGeom prst="rect">
             <a:avLst/>
@@ -5795,8 +6954,8 @@
         </p:nvSpPr>
         <p:spPr>
           <a:xfrm>
-            <a:off x="5742432" y="640080"/>
-            <a:ext cx="3108960" cy="658368"/>
+            <a:off x="4133088" y="1060704"/>
+            <a:ext cx="4645152" cy="749808"/>
           </a:xfrm>
           <a:prstGeom prst="rect">
             <a:avLst/>
@@ -5812,7 +6971,7 @@
               <a:buNone/>
             </a:pPr>
             <a:r>
-              <a:rPr lang="en-US" sz="4200" b="1" dirty="0">
+              <a:rPr lang="en-US" sz="4800" b="1" dirty="0">
                 <a:solidFill>
                   <a:srgbClr val="0D1F3C"/>
                 </a:solidFill>
@@ -5822,7 +6981,7 @@
               </a:rPr>
               <a:t>90%+</a:t>
             </a:r>
-            <a:endParaRPr lang="en-US" sz="4200" dirty="0"/>
+            <a:endParaRPr lang="en-US" sz="4800" dirty="0"/>
           </a:p>
         </p:txBody>
       </p:sp>
@@ -5834,8 +6993,8 @@
         </p:nvSpPr>
         <p:spPr>
           <a:xfrm>
-            <a:off x="5742432" y="1316736"/>
-            <a:ext cx="3108960" cy="274320"/>
+            <a:off x="4133088" y="1828800"/>
+            <a:ext cx="4645152" cy="219456"/>
           </a:xfrm>
           <a:prstGeom prst="rect">
             <a:avLst/>
@@ -5851,7 +7010,7 @@
               <a:buNone/>
             </a:pPr>
             <a:r>
-              <a:rPr lang="en-US" sz="950" dirty="0">
+              <a:rPr lang="en-US" sz="1000" dirty="0">
                 <a:solidFill>
                   <a:srgbClr val="6B7280"/>
                 </a:solidFill>
@@ -5861,7 +7020,7 @@
               </a:rPr>
               <a:t>Tracked and reported every week</a:t>
             </a:r>
-            <a:endParaRPr lang="en-US" sz="950" dirty="0"/>
+            <a:endParaRPr lang="en-US" sz="1000" dirty="0"/>
           </a:p>
         </p:txBody>
       </p:sp>
@@ -5873,8 +7032,8 @@
         </p:nvSpPr>
         <p:spPr>
           <a:xfrm>
-            <a:off x="5742432" y="1682496"/>
-            <a:ext cx="3108960" cy="16459"/>
+            <a:off x="4133088" y="2084832"/>
+            <a:ext cx="4645152" cy="16459"/>
           </a:xfrm>
           <a:prstGeom prst="rect">
             <a:avLst/>
@@ -5898,8 +7057,8 @@
         </p:nvSpPr>
         <p:spPr>
           <a:xfrm>
-            <a:off x="5742432" y="1828800"/>
-            <a:ext cx="3108960" cy="182880"/>
+            <a:off x="4133088" y="2121408"/>
+            <a:ext cx="4645152" cy="182880"/>
           </a:xfrm>
           <a:prstGeom prst="rect">
             <a:avLst/>
@@ -5937,8 +7096,8 @@
         </p:nvSpPr>
         <p:spPr>
           <a:xfrm>
-            <a:off x="5742432" y="2029968"/>
-            <a:ext cx="3108960" cy="658368"/>
+            <a:off x="4133088" y="2322576"/>
+            <a:ext cx="4645152" cy="749808"/>
           </a:xfrm>
           <a:prstGeom prst="rect">
             <a:avLst/>
@@ -5954,7 +7113,7 @@
               <a:buNone/>
             </a:pPr>
             <a:r>
-              <a:rPr lang="en-US" sz="4200" b="1" dirty="0">
+              <a:rPr lang="en-US" sz="4800" b="1" dirty="0">
                 <a:solidFill>
                   <a:srgbClr val="0D1F3C"/>
                 </a:solidFill>
@@ -5964,7 +7123,7 @@
               </a:rPr>
               <a:t>&lt;2hr</a:t>
             </a:r>
-            <a:endParaRPr lang="en-US" sz="4200" dirty="0"/>
+            <a:endParaRPr lang="en-US" sz="4800" dirty="0"/>
           </a:p>
         </p:txBody>
       </p:sp>
@@ -5976,8 +7135,8 @@
         </p:nvSpPr>
         <p:spPr>
           <a:xfrm>
-            <a:off x="5742432" y="2706624"/>
-            <a:ext cx="3108960" cy="274320"/>
+            <a:off x="4133088" y="3090672"/>
+            <a:ext cx="4645152" cy="219456"/>
           </a:xfrm>
           <a:prstGeom prst="rect">
             <a:avLst/>
@@ -5993,7 +7152,7 @@
               <a:buNone/>
             </a:pPr>
             <a:r>
-              <a:rPr lang="en-US" sz="950" dirty="0">
+              <a:rPr lang="en-US" sz="1000" dirty="0">
                 <a:solidFill>
                   <a:srgbClr val="6B7280"/>
                 </a:solidFill>
@@ -6001,9 +7160,9 @@
                 <a:ea typeface="Calibri" pitchFamily="34" charset="-122"/>
                 <a:cs typeface="Calibri" pitchFamily="34" charset="-120"/>
               </a:rPr>
-              <a:t>From ticket open to acknowledgment</a:t>
-            </a:r>
-            <a:endParaRPr lang="en-US" sz="950" dirty="0"/>
+              <a:t>Ticket open to acknowledgment</a:t>
+            </a:r>
+            <a:endParaRPr lang="en-US" sz="1000" dirty="0"/>
           </a:p>
         </p:txBody>
       </p:sp>
@@ -6015,8 +7174,8 @@
         </p:nvSpPr>
         <p:spPr>
           <a:xfrm>
-            <a:off x="5742432" y="3072384"/>
-            <a:ext cx="3108960" cy="16459"/>
+            <a:off x="4133088" y="3346704"/>
+            <a:ext cx="4645152" cy="16459"/>
           </a:xfrm>
           <a:prstGeom prst="rect">
             <a:avLst/>
@@ -6040,8 +7199,8 @@
         </p:nvSpPr>
         <p:spPr>
           <a:xfrm>
-            <a:off x="5742432" y="3218688"/>
-            <a:ext cx="3108960" cy="182880"/>
+            <a:off x="4133088" y="3383280"/>
+            <a:ext cx="4645152" cy="182880"/>
           </a:xfrm>
           <a:prstGeom prst="rect">
             <a:avLst/>
@@ -6079,8 +7238,8 @@
         </p:nvSpPr>
         <p:spPr>
           <a:xfrm>
-            <a:off x="5742432" y="3419856"/>
-            <a:ext cx="3108960" cy="658368"/>
+            <a:off x="4133088" y="3584448"/>
+            <a:ext cx="4645152" cy="749808"/>
           </a:xfrm>
           <a:prstGeom prst="rect">
             <a:avLst/>
@@ -6096,7 +7255,7 @@
               <a:buNone/>
             </a:pPr>
             <a:r>
-              <a:rPr lang="en-US" sz="4200" b="1" dirty="0">
+              <a:rPr lang="en-US" sz="4800" b="1" dirty="0">
                 <a:solidFill>
                   <a:srgbClr val="0D1F3C"/>
                 </a:solidFill>
@@ -6106,7 +7265,7 @@
               </a:rPr>
               <a:t>&lt;24hr</a:t>
             </a:r>
-            <a:endParaRPr lang="en-US" sz="4200" dirty="0"/>
+            <a:endParaRPr lang="en-US" sz="4800" dirty="0"/>
           </a:p>
         </p:txBody>
       </p:sp>
@@ -6118,8 +7277,8 @@
         </p:nvSpPr>
         <p:spPr>
           <a:xfrm>
-            <a:off x="5742432" y="4096512"/>
-            <a:ext cx="3108960" cy="274320"/>
+            <a:off x="4133088" y="4352544"/>
+            <a:ext cx="4645152" cy="219456"/>
           </a:xfrm>
           <a:prstGeom prst="rect">
             <a:avLst/>
@@ -6135,7 +7294,7 @@
               <a:buNone/>
             </a:pPr>
             <a:r>
-              <a:rPr lang="en-US" sz="950" dirty="0">
+              <a:rPr lang="en-US" sz="1000" dirty="0">
                 <a:solidFill>
                   <a:srgbClr val="6B7280"/>
                 </a:solidFill>
@@ -6143,9 +7302,9 @@
                 <a:ea typeface="Calibri" pitchFamily="34" charset="-122"/>
                 <a:cs typeface="Calibri" pitchFamily="34" charset="-120"/>
               </a:rPr>
-              <a:t>From issue flagged to issue closed</a:t>
-            </a:r>
-            <a:endParaRPr lang="en-US" sz="950" dirty="0"/>
+              <a:t>Issue flagged to issue closed</a:t>
+            </a:r>
+            <a:endParaRPr lang="en-US" sz="1000" dirty="0"/>
           </a:p>
         </p:txBody>
       </p:sp>
@@ -6215,7 +7374,7 @@
         <p:spPr>
           <a:xfrm>
             <a:off x="457200" y="91440"/>
-            <a:ext cx="7315200" cy="164592"/>
+            <a:ext cx="6858000" cy="164592"/>
           </a:xfrm>
           <a:prstGeom prst="rect">
             <a:avLst/>
@@ -6253,8 +7412,8 @@
         </p:nvSpPr>
         <p:spPr>
           <a:xfrm>
-            <a:off x="8686800" y="73152"/>
-            <a:ext cx="365760" cy="164592"/>
+            <a:off x="8595360" y="73152"/>
+            <a:ext cx="457200" cy="164592"/>
           </a:xfrm>
           <a:prstGeom prst="rect">
             <a:avLst/>
@@ -6300,8 +7459,8 @@
         </p:blipFill>
         <p:spPr>
           <a:xfrm>
-            <a:off x="7973568" y="4663440"/>
-            <a:ext cx="1051560" cy="402336"/>
+            <a:off x="7936992" y="4626864"/>
+            <a:ext cx="1078992" cy="411480"/>
           </a:xfrm>
           <a:prstGeom prst="rect">
             <a:avLst/>
@@ -6317,7 +7476,7 @@
         <p:spPr>
           <a:xfrm>
             <a:off x="457200" y="256032"/>
-            <a:ext cx="8229600" cy="438912"/>
+            <a:ext cx="8321040" cy="457200"/>
           </a:xfrm>
           <a:prstGeom prst="rect">
             <a:avLst/>
@@ -6355,8 +7514,8 @@
         </p:nvSpPr>
         <p:spPr>
           <a:xfrm>
-            <a:off x="457200" y="749808"/>
-            <a:ext cx="8229600" cy="16459"/>
+            <a:off x="457200" y="768096"/>
+            <a:ext cx="8321040" cy="16459"/>
           </a:xfrm>
           <a:prstGeom prst="rect">
             <a:avLst/>
@@ -6380,8 +7539,8 @@
         </p:nvSpPr>
         <p:spPr>
           <a:xfrm>
-            <a:off x="457200" y="822960"/>
-            <a:ext cx="2788920" cy="438912"/>
+            <a:off x="457200" y="841248"/>
+            <a:ext cx="2834640" cy="420624"/>
           </a:xfrm>
           <a:prstGeom prst="rect">
             <a:avLst/>
@@ -6405,8 +7564,8 @@
         </p:nvSpPr>
         <p:spPr>
           <a:xfrm>
-            <a:off x="548640" y="950976"/>
-            <a:ext cx="2697480" cy="201168"/>
+            <a:off x="566928" y="960120"/>
+            <a:ext cx="2834640" cy="201168"/>
           </a:xfrm>
           <a:prstGeom prst="rect">
             <a:avLst/>
@@ -6444,8 +7603,8 @@
         </p:nvSpPr>
         <p:spPr>
           <a:xfrm>
-            <a:off x="3246120" y="822960"/>
-            <a:ext cx="1261872" cy="438912"/>
+            <a:off x="3291840" y="841248"/>
+            <a:ext cx="914400" cy="420624"/>
           </a:xfrm>
           <a:prstGeom prst="rect">
             <a:avLst/>
@@ -6469,8 +7628,8 @@
         </p:nvSpPr>
         <p:spPr>
           <a:xfrm>
-            <a:off x="3246120" y="950976"/>
-            <a:ext cx="1261872" cy="201168"/>
+            <a:off x="3291840" y="960120"/>
+            <a:ext cx="914400" cy="201168"/>
           </a:xfrm>
           <a:prstGeom prst="rect">
             <a:avLst/>
@@ -6508,8 +7667,8 @@
         </p:nvSpPr>
         <p:spPr>
           <a:xfrm>
-            <a:off x="4507992" y="822960"/>
-            <a:ext cx="1261872" cy="438912"/>
+            <a:off x="4206240" y="841248"/>
+            <a:ext cx="914400" cy="420624"/>
           </a:xfrm>
           <a:prstGeom prst="rect">
             <a:avLst/>
@@ -6533,8 +7692,8 @@
         </p:nvSpPr>
         <p:spPr>
           <a:xfrm>
-            <a:off x="4507992" y="950976"/>
-            <a:ext cx="1261872" cy="201168"/>
+            <a:off x="4206240" y="960120"/>
+            <a:ext cx="914400" cy="201168"/>
           </a:xfrm>
           <a:prstGeom prst="rect">
             <a:avLst/>
@@ -6572,8 +7731,8 @@
         </p:nvSpPr>
         <p:spPr>
           <a:xfrm>
-            <a:off x="5769864" y="822960"/>
-            <a:ext cx="1261872" cy="438912"/>
+            <a:off x="5120640" y="841248"/>
+            <a:ext cx="914400" cy="420624"/>
           </a:xfrm>
           <a:prstGeom prst="rect">
             <a:avLst/>
@@ -6597,8 +7756,8 @@
         </p:nvSpPr>
         <p:spPr>
           <a:xfrm>
-            <a:off x="5769864" y="950976"/>
-            <a:ext cx="1261872" cy="201168"/>
+            <a:off x="5120640" y="960120"/>
+            <a:ext cx="914400" cy="201168"/>
           </a:xfrm>
           <a:prstGeom prst="rect">
             <a:avLst/>
@@ -6636,8 +7795,8 @@
         </p:nvSpPr>
         <p:spPr>
           <a:xfrm>
-            <a:off x="7031736" y="822960"/>
-            <a:ext cx="1261872" cy="438912"/>
+            <a:off x="6035040" y="841248"/>
+            <a:ext cx="914400" cy="420624"/>
           </a:xfrm>
           <a:prstGeom prst="rect">
             <a:avLst/>
@@ -6661,8 +7820,8 @@
         </p:nvSpPr>
         <p:spPr>
           <a:xfrm>
-            <a:off x="7031736" y="950976"/>
-            <a:ext cx="1261872" cy="201168"/>
+            <a:off x="6035040" y="960120"/>
+            <a:ext cx="914400" cy="201168"/>
           </a:xfrm>
           <a:prstGeom prst="rect">
             <a:avLst/>
@@ -6700,8 +7859,8 @@
         </p:nvSpPr>
         <p:spPr>
           <a:xfrm>
-            <a:off x="8293608" y="822960"/>
-            <a:ext cx="1261872" cy="438912"/>
+            <a:off x="6949440" y="841248"/>
+            <a:ext cx="914400" cy="420624"/>
           </a:xfrm>
           <a:prstGeom prst="rect">
             <a:avLst/>
@@ -6725,8 +7884,8 @@
         </p:nvSpPr>
         <p:spPr>
           <a:xfrm>
-            <a:off x="8293608" y="950976"/>
-            <a:ext cx="1261872" cy="201168"/>
+            <a:off x="6949440" y="960120"/>
+            <a:ext cx="914400" cy="201168"/>
           </a:xfrm>
           <a:prstGeom prst="rect">
             <a:avLst/>
@@ -6764,8 +7923,8 @@
         </p:nvSpPr>
         <p:spPr>
           <a:xfrm>
-            <a:off x="9555480" y="822960"/>
-            <a:ext cx="1261872" cy="438912"/>
+            <a:off x="7863840" y="841248"/>
+            <a:ext cx="914400" cy="420624"/>
           </a:xfrm>
           <a:prstGeom prst="rect">
             <a:avLst/>
@@ -6789,8 +7948,8 @@
         </p:nvSpPr>
         <p:spPr>
           <a:xfrm>
-            <a:off x="9555480" y="950976"/>
-            <a:ext cx="1261872" cy="201168"/>
+            <a:off x="7863840" y="960120"/>
+            <a:ext cx="914400" cy="201168"/>
           </a:xfrm>
           <a:prstGeom prst="rect">
             <a:avLst/>
@@ -6829,7 +7988,7 @@
         <p:spPr>
           <a:xfrm>
             <a:off x="457200" y="1261872"/>
-            <a:ext cx="2788920" cy="438912"/>
+            <a:ext cx="2834640" cy="420624"/>
           </a:xfrm>
           <a:prstGeom prst="rect">
             <a:avLst/>
@@ -6853,8 +8012,8 @@
         </p:nvSpPr>
         <p:spPr>
           <a:xfrm>
-            <a:off x="548640" y="1380744"/>
-            <a:ext cx="2651760" cy="219456"/>
+            <a:off x="566928" y="1380744"/>
+            <a:ext cx="2688336" cy="201168"/>
           </a:xfrm>
           <a:prstGeom prst="rect">
             <a:avLst/>
@@ -6870,7 +8029,7 @@
               <a:buNone/>
             </a:pPr>
             <a:r>
-              <a:rPr lang="en-US" sz="950" dirty="0">
+              <a:rPr lang="en-US" sz="1000" dirty="0">
                 <a:solidFill>
                   <a:srgbClr val="374151"/>
                 </a:solidFill>
@@ -6880,7 +8039,7 @@
               </a:rPr>
               <a:t>CEO + QA Manager Site Walk</a:t>
             </a:r>
-            <a:endParaRPr lang="en-US" sz="950" dirty="0"/>
+            <a:endParaRPr lang="en-US" sz="1000" dirty="0"/>
           </a:p>
         </p:txBody>
       </p:sp>
@@ -6892,8 +8051,8 @@
         </p:nvSpPr>
         <p:spPr>
           <a:xfrm>
-            <a:off x="3246120" y="1261872"/>
-            <a:ext cx="1261872" cy="438912"/>
+            <a:off x="3291840" y="1261872"/>
+            <a:ext cx="914400" cy="420624"/>
           </a:xfrm>
           <a:prstGeom prst="rect">
             <a:avLst/>
@@ -6917,8 +8076,8 @@
         </p:nvSpPr>
         <p:spPr>
           <a:xfrm>
-            <a:off x="4507992" y="1261872"/>
-            <a:ext cx="1261872" cy="438912"/>
+            <a:off x="4206240" y="1261872"/>
+            <a:ext cx="914400" cy="420624"/>
           </a:xfrm>
           <a:prstGeom prst="rect">
             <a:avLst/>
@@ -6942,8 +8101,8 @@
         </p:nvSpPr>
         <p:spPr>
           <a:xfrm>
-            <a:off x="5769864" y="1261872"/>
-            <a:ext cx="1261872" cy="438912"/>
+            <a:off x="5120640" y="1261872"/>
+            <a:ext cx="914400" cy="420624"/>
           </a:xfrm>
           <a:prstGeom prst="rect">
             <a:avLst/>
@@ -6967,8 +8126,8 @@
         </p:nvSpPr>
         <p:spPr>
           <a:xfrm>
-            <a:off x="7031736" y="1261872"/>
-            <a:ext cx="1261872" cy="438912"/>
+            <a:off x="6035040" y="1261872"/>
+            <a:ext cx="914400" cy="420624"/>
           </a:xfrm>
           <a:prstGeom prst="rect">
             <a:avLst/>
@@ -6992,8 +8151,8 @@
         </p:nvSpPr>
         <p:spPr>
           <a:xfrm>
-            <a:off x="8293608" y="1261872"/>
-            <a:ext cx="1261872" cy="438912"/>
+            <a:off x="6949440" y="1261872"/>
+            <a:ext cx="914400" cy="420624"/>
           </a:xfrm>
           <a:prstGeom prst="rect">
             <a:avLst/>
@@ -7017,8 +8176,8 @@
         </p:nvSpPr>
         <p:spPr>
           <a:xfrm>
-            <a:off x="9555480" y="1261872"/>
-            <a:ext cx="1261872" cy="438912"/>
+            <a:off x="7863840" y="1261872"/>
+            <a:ext cx="914400" cy="420624"/>
           </a:xfrm>
           <a:prstGeom prst="rect">
             <a:avLst/>
@@ -7042,8 +8201,8 @@
         </p:nvSpPr>
         <p:spPr>
           <a:xfrm>
-            <a:off x="3310128" y="1362456"/>
-            <a:ext cx="2395728" cy="241402"/>
+            <a:off x="3346704" y="1353312"/>
+            <a:ext cx="1719072" cy="231343"/>
           </a:xfrm>
           <a:prstGeom prst="rect">
             <a:avLst/>
@@ -7067,8 +8226,8 @@
         </p:nvSpPr>
         <p:spPr>
           <a:xfrm>
-            <a:off x="457200" y="1700784"/>
-            <a:ext cx="2788920" cy="438912"/>
+            <a:off x="457200" y="1682496"/>
+            <a:ext cx="2834640" cy="420624"/>
           </a:xfrm>
           <a:prstGeom prst="rect">
             <a:avLst/>
@@ -7092,8 +8251,8 @@
         </p:nvSpPr>
         <p:spPr>
           <a:xfrm>
-            <a:off x="548640" y="1819656"/>
-            <a:ext cx="2651760" cy="219456"/>
+            <a:off x="566928" y="1801368"/>
+            <a:ext cx="2688336" cy="201168"/>
           </a:xfrm>
           <a:prstGeom prst="rect">
             <a:avLst/>
@@ -7109,7 +8268,7 @@
               <a:buNone/>
             </a:pPr>
             <a:r>
-              <a:rPr lang="en-US" sz="950" dirty="0">
+              <a:rPr lang="en-US" sz="1000" dirty="0">
                 <a:solidFill>
                   <a:srgbClr val="374151"/>
                 </a:solidFill>
@@ -7119,7 +8278,7 @@
               </a:rPr>
               <a:t>Key Handoff &amp; Supply Staging</a:t>
             </a:r>
-            <a:endParaRPr lang="en-US" sz="950" dirty="0"/>
+            <a:endParaRPr lang="en-US" sz="1000" dirty="0"/>
           </a:p>
         </p:txBody>
       </p:sp>
@@ -7131,8 +8290,8 @@
         </p:nvSpPr>
         <p:spPr>
           <a:xfrm>
-            <a:off x="3246120" y="1700784"/>
-            <a:ext cx="1261872" cy="438912"/>
+            <a:off x="3291840" y="1682496"/>
+            <a:ext cx="914400" cy="420624"/>
           </a:xfrm>
           <a:prstGeom prst="rect">
             <a:avLst/>
@@ -7156,8 +8315,8 @@
         </p:nvSpPr>
         <p:spPr>
           <a:xfrm>
-            <a:off x="4507992" y="1700784"/>
-            <a:ext cx="1261872" cy="438912"/>
+            <a:off x="4206240" y="1682496"/>
+            <a:ext cx="914400" cy="420624"/>
           </a:xfrm>
           <a:prstGeom prst="rect">
             <a:avLst/>
@@ -7181,8 +8340,8 @@
         </p:nvSpPr>
         <p:spPr>
           <a:xfrm>
-            <a:off x="5769864" y="1700784"/>
-            <a:ext cx="1261872" cy="438912"/>
+            <a:off x="5120640" y="1682496"/>
+            <a:ext cx="914400" cy="420624"/>
           </a:xfrm>
           <a:prstGeom prst="rect">
             <a:avLst/>
@@ -7206,8 +8365,8 @@
         </p:nvSpPr>
         <p:spPr>
           <a:xfrm>
-            <a:off x="7031736" y="1700784"/>
-            <a:ext cx="1261872" cy="438912"/>
+            <a:off x="6035040" y="1682496"/>
+            <a:ext cx="914400" cy="420624"/>
           </a:xfrm>
           <a:prstGeom prst="rect">
             <a:avLst/>
@@ -7231,8 +8390,8 @@
         </p:nvSpPr>
         <p:spPr>
           <a:xfrm>
-            <a:off x="8293608" y="1700784"/>
-            <a:ext cx="1261872" cy="438912"/>
+            <a:off x="6949440" y="1682496"/>
+            <a:ext cx="914400" cy="420624"/>
           </a:xfrm>
           <a:prstGeom prst="rect">
             <a:avLst/>
@@ -7256,8 +8415,8 @@
         </p:nvSpPr>
         <p:spPr>
           <a:xfrm>
-            <a:off x="9555480" y="1700784"/>
-            <a:ext cx="1261872" cy="438912"/>
+            <a:off x="7863840" y="1682496"/>
+            <a:ext cx="914400" cy="420624"/>
           </a:xfrm>
           <a:prstGeom prst="rect">
             <a:avLst/>
@@ -7281,8 +8440,8 @@
         </p:nvSpPr>
         <p:spPr>
           <a:xfrm>
-            <a:off x="3310128" y="1801368"/>
-            <a:ext cx="2395728" cy="241402"/>
+            <a:off x="3346704" y="1773936"/>
+            <a:ext cx="1719072" cy="231343"/>
           </a:xfrm>
           <a:prstGeom prst="rect">
             <a:avLst/>
@@ -7306,8 +8465,8 @@
         </p:nvSpPr>
         <p:spPr>
           <a:xfrm>
-            <a:off x="457200" y="2139696"/>
-            <a:ext cx="2788920" cy="438912"/>
+            <a:off x="457200" y="2103120"/>
+            <a:ext cx="2834640" cy="420624"/>
           </a:xfrm>
           <a:prstGeom prst="rect">
             <a:avLst/>
@@ -7331,8 +8490,8 @@
         </p:nvSpPr>
         <p:spPr>
           <a:xfrm>
-            <a:off x="548640" y="2258568"/>
-            <a:ext cx="2651760" cy="219456"/>
+            <a:off x="566928" y="2221992"/>
+            <a:ext cx="2688336" cy="201168"/>
           </a:xfrm>
           <a:prstGeom prst="rect">
             <a:avLst/>
@@ -7348,7 +8507,7 @@
               <a:buNone/>
             </a:pPr>
             <a:r>
-              <a:rPr lang="en-US" sz="950" dirty="0">
+              <a:rPr lang="en-US" sz="1000" dirty="0">
                 <a:solidFill>
                   <a:srgbClr val="374151"/>
                 </a:solidFill>
@@ -7358,7 +8517,7 @@
               </a:rPr>
               <a:t>Team Assignment &amp; Orientation</a:t>
             </a:r>
-            <a:endParaRPr lang="en-US" sz="950" dirty="0"/>
+            <a:endParaRPr lang="en-US" sz="1000" dirty="0"/>
           </a:p>
         </p:txBody>
       </p:sp>
@@ -7370,8 +8529,8 @@
         </p:nvSpPr>
         <p:spPr>
           <a:xfrm>
-            <a:off x="3246120" y="2139696"/>
-            <a:ext cx="1261872" cy="438912"/>
+            <a:off x="3291840" y="2103120"/>
+            <a:ext cx="914400" cy="420624"/>
           </a:xfrm>
           <a:prstGeom prst="rect">
             <a:avLst/>
@@ -7395,8 +8554,8 @@
         </p:nvSpPr>
         <p:spPr>
           <a:xfrm>
-            <a:off x="4507992" y="2139696"/>
-            <a:ext cx="1261872" cy="438912"/>
+            <a:off x="4206240" y="2103120"/>
+            <a:ext cx="914400" cy="420624"/>
           </a:xfrm>
           <a:prstGeom prst="rect">
             <a:avLst/>
@@ -7420,8 +8579,8 @@
         </p:nvSpPr>
         <p:spPr>
           <a:xfrm>
-            <a:off x="5769864" y="2139696"/>
-            <a:ext cx="1261872" cy="438912"/>
+            <a:off x="5120640" y="2103120"/>
+            <a:ext cx="914400" cy="420624"/>
           </a:xfrm>
           <a:prstGeom prst="rect">
             <a:avLst/>
@@ -7445,8 +8604,8 @@
         </p:nvSpPr>
         <p:spPr>
           <a:xfrm>
-            <a:off x="7031736" y="2139696"/>
-            <a:ext cx="1261872" cy="438912"/>
+            <a:off x="6035040" y="2103120"/>
+            <a:ext cx="914400" cy="420624"/>
           </a:xfrm>
           <a:prstGeom prst="rect">
             <a:avLst/>
@@ -7470,8 +8629,8 @@
         </p:nvSpPr>
         <p:spPr>
           <a:xfrm>
-            <a:off x="8293608" y="2139696"/>
-            <a:ext cx="1261872" cy="438912"/>
+            <a:off x="6949440" y="2103120"/>
+            <a:ext cx="914400" cy="420624"/>
           </a:xfrm>
           <a:prstGeom prst="rect">
             <a:avLst/>
@@ -7495,8 +8654,8 @@
         </p:nvSpPr>
         <p:spPr>
           <a:xfrm>
-            <a:off x="9555480" y="2139696"/>
-            <a:ext cx="1261872" cy="438912"/>
+            <a:off x="7863840" y="2103120"/>
+            <a:ext cx="914400" cy="420624"/>
           </a:xfrm>
           <a:prstGeom prst="rect">
             <a:avLst/>
@@ -7520,8 +8679,8 @@
         </p:nvSpPr>
         <p:spPr>
           <a:xfrm>
-            <a:off x="4572000" y="2240280"/>
-            <a:ext cx="1133856" cy="241402"/>
+            <a:off x="4261104" y="2194560"/>
+            <a:ext cx="804672" cy="231343"/>
           </a:xfrm>
           <a:prstGeom prst="rect">
             <a:avLst/>
@@ -7545,8 +8704,8 @@
         </p:nvSpPr>
         <p:spPr>
           <a:xfrm>
-            <a:off x="457200" y="2578608"/>
-            <a:ext cx="2788920" cy="438912"/>
+            <a:off x="457200" y="2523744"/>
+            <a:ext cx="2834640" cy="420624"/>
           </a:xfrm>
           <a:prstGeom prst="rect">
             <a:avLst/>
@@ -7570,8 +8729,8 @@
         </p:nvSpPr>
         <p:spPr>
           <a:xfrm>
-            <a:off x="548640" y="2697480"/>
-            <a:ext cx="2651760" cy="219456"/>
+            <a:off x="566928" y="2642616"/>
+            <a:ext cx="2688336" cy="201168"/>
           </a:xfrm>
           <a:prstGeom prst="rect">
             <a:avLst/>
@@ -7587,7 +8746,7 @@
               <a:buNone/>
             </a:pPr>
             <a:r>
-              <a:rPr lang="en-US" sz="950" dirty="0">
+              <a:rPr lang="en-US" sz="1000" dirty="0">
                 <a:solidFill>
                   <a:srgbClr val="374151"/>
                 </a:solidFill>
@@ -7597,7 +8756,7 @@
               </a:rPr>
               <a:t>Service Launch</a:t>
             </a:r>
-            <a:endParaRPr lang="en-US" sz="950" dirty="0"/>
+            <a:endParaRPr lang="en-US" sz="1000" dirty="0"/>
           </a:p>
         </p:txBody>
       </p:sp>
@@ -7609,8 +8768,8 @@
         </p:nvSpPr>
         <p:spPr>
           <a:xfrm>
-            <a:off x="3246120" y="2578608"/>
-            <a:ext cx="1261872" cy="438912"/>
+            <a:off x="3291840" y="2523744"/>
+            <a:ext cx="914400" cy="420624"/>
           </a:xfrm>
           <a:prstGeom prst="rect">
             <a:avLst/>
@@ -7634,8 +8793,8 @@
         </p:nvSpPr>
         <p:spPr>
           <a:xfrm>
-            <a:off x="4507992" y="2578608"/>
-            <a:ext cx="1261872" cy="438912"/>
+            <a:off x="4206240" y="2523744"/>
+            <a:ext cx="914400" cy="420624"/>
           </a:xfrm>
           <a:prstGeom prst="rect">
             <a:avLst/>
@@ -7659,8 +8818,8 @@
         </p:nvSpPr>
         <p:spPr>
           <a:xfrm>
-            <a:off x="5769864" y="2578608"/>
-            <a:ext cx="1261872" cy="438912"/>
+            <a:off x="5120640" y="2523744"/>
+            <a:ext cx="914400" cy="420624"/>
           </a:xfrm>
           <a:prstGeom prst="rect">
             <a:avLst/>
@@ -7684,8 +8843,8 @@
         </p:nvSpPr>
         <p:spPr>
           <a:xfrm>
-            <a:off x="7031736" y="2578608"/>
-            <a:ext cx="1261872" cy="438912"/>
+            <a:off x="6035040" y="2523744"/>
+            <a:ext cx="914400" cy="420624"/>
           </a:xfrm>
           <a:prstGeom prst="rect">
             <a:avLst/>
@@ -7709,8 +8868,8 @@
         </p:nvSpPr>
         <p:spPr>
           <a:xfrm>
-            <a:off x="8293608" y="2578608"/>
-            <a:ext cx="1261872" cy="438912"/>
+            <a:off x="6949440" y="2523744"/>
+            <a:ext cx="914400" cy="420624"/>
           </a:xfrm>
           <a:prstGeom prst="rect">
             <a:avLst/>
@@ -7734,8 +8893,8 @@
         </p:nvSpPr>
         <p:spPr>
           <a:xfrm>
-            <a:off x="9555480" y="2578608"/>
-            <a:ext cx="1261872" cy="438912"/>
+            <a:off x="7863840" y="2523744"/>
+            <a:ext cx="914400" cy="420624"/>
           </a:xfrm>
           <a:prstGeom prst="rect">
             <a:avLst/>
@@ -7759,8 +8918,8 @@
         </p:nvSpPr>
         <p:spPr>
           <a:xfrm>
-            <a:off x="5833872" y="2679192"/>
-            <a:ext cx="1133856" cy="241402"/>
+            <a:off x="5175504" y="2615184"/>
+            <a:ext cx="804672" cy="231343"/>
           </a:xfrm>
           <a:prstGeom prst="rect">
             <a:avLst/>
@@ -7784,8 +8943,8 @@
         </p:nvSpPr>
         <p:spPr>
           <a:xfrm>
-            <a:off x="457200" y="3017520"/>
-            <a:ext cx="2788920" cy="438912"/>
+            <a:off x="457200" y="2944368"/>
+            <a:ext cx="2834640" cy="420624"/>
           </a:xfrm>
           <a:prstGeom prst="rect">
             <a:avLst/>
@@ -7809,8 +8968,8 @@
         </p:nvSpPr>
         <p:spPr>
           <a:xfrm>
-            <a:off x="548640" y="3136392"/>
-            <a:ext cx="2651760" cy="219456"/>
+            <a:off x="566928" y="3063240"/>
+            <a:ext cx="2688336" cy="201168"/>
           </a:xfrm>
           <a:prstGeom prst="rect">
             <a:avLst/>
@@ -7826,7 +8985,7 @@
               <a:buNone/>
             </a:pPr>
             <a:r>
-              <a:rPr lang="en-US" sz="950" dirty="0">
+              <a:rPr lang="en-US" sz="1000" dirty="0">
                 <a:solidFill>
                   <a:srgbClr val="374151"/>
                 </a:solidFill>
@@ -7836,7 +8995,7 @@
               </a:rPr>
               <a:t>Daily Supervisor Check-Ins</a:t>
             </a:r>
-            <a:endParaRPr lang="en-US" sz="950" dirty="0"/>
+            <a:endParaRPr lang="en-US" sz="1000" dirty="0"/>
           </a:p>
         </p:txBody>
       </p:sp>
@@ -7848,8 +9007,8 @@
         </p:nvSpPr>
         <p:spPr>
           <a:xfrm>
-            <a:off x="3246120" y="3017520"/>
-            <a:ext cx="1261872" cy="438912"/>
+            <a:off x="3291840" y="2944368"/>
+            <a:ext cx="914400" cy="420624"/>
           </a:xfrm>
           <a:prstGeom prst="rect">
             <a:avLst/>
@@ -7873,8 +9032,8 @@
         </p:nvSpPr>
         <p:spPr>
           <a:xfrm>
-            <a:off x="4507992" y="3017520"/>
-            <a:ext cx="1261872" cy="438912"/>
+            <a:off x="4206240" y="2944368"/>
+            <a:ext cx="914400" cy="420624"/>
           </a:xfrm>
           <a:prstGeom prst="rect">
             <a:avLst/>
@@ -7898,8 +9057,8 @@
         </p:nvSpPr>
         <p:spPr>
           <a:xfrm>
-            <a:off x="5769864" y="3017520"/>
-            <a:ext cx="1261872" cy="438912"/>
+            <a:off x="5120640" y="2944368"/>
+            <a:ext cx="914400" cy="420624"/>
           </a:xfrm>
           <a:prstGeom prst="rect">
             <a:avLst/>
@@ -7923,8 +9082,8 @@
         </p:nvSpPr>
         <p:spPr>
           <a:xfrm>
-            <a:off x="7031736" y="3017520"/>
-            <a:ext cx="1261872" cy="438912"/>
+            <a:off x="6035040" y="2944368"/>
+            <a:ext cx="914400" cy="420624"/>
           </a:xfrm>
           <a:prstGeom prst="rect">
             <a:avLst/>
@@ -7948,8 +9107,8 @@
         </p:nvSpPr>
         <p:spPr>
           <a:xfrm>
-            <a:off x="8293608" y="3017520"/>
-            <a:ext cx="1261872" cy="438912"/>
+            <a:off x="6949440" y="2944368"/>
+            <a:ext cx="914400" cy="420624"/>
           </a:xfrm>
           <a:prstGeom prst="rect">
             <a:avLst/>
@@ -7973,8 +9132,8 @@
         </p:nvSpPr>
         <p:spPr>
           <a:xfrm>
-            <a:off x="9555480" y="3017520"/>
-            <a:ext cx="1261872" cy="438912"/>
+            <a:off x="7863840" y="2944368"/>
+            <a:ext cx="914400" cy="420624"/>
           </a:xfrm>
           <a:prstGeom prst="rect">
             <a:avLst/>
@@ -7998,8 +9157,8 @@
         </p:nvSpPr>
         <p:spPr>
           <a:xfrm>
-            <a:off x="5833872" y="3118104"/>
-            <a:ext cx="2395728" cy="241402"/>
+            <a:off x="5175504" y="3035808"/>
+            <a:ext cx="1719072" cy="231343"/>
           </a:xfrm>
           <a:prstGeom prst="rect">
             <a:avLst/>
@@ -8023,8 +9182,8 @@
         </p:nvSpPr>
         <p:spPr>
           <a:xfrm>
-            <a:off x="457200" y="3456432"/>
-            <a:ext cx="2788920" cy="438912"/>
+            <a:off x="457200" y="3364992"/>
+            <a:ext cx="2834640" cy="420624"/>
           </a:xfrm>
           <a:prstGeom prst="rect">
             <a:avLst/>
@@ -8048,8 +9207,8 @@
         </p:nvSpPr>
         <p:spPr>
           <a:xfrm>
-            <a:off x="548640" y="3575304"/>
-            <a:ext cx="2651760" cy="219456"/>
+            <a:off x="566928" y="3483864"/>
+            <a:ext cx="2688336" cy="201168"/>
           </a:xfrm>
           <a:prstGeom prst="rect">
             <a:avLst/>
@@ -8065,7 +9224,7 @@
               <a:buNone/>
             </a:pPr>
             <a:r>
-              <a:rPr lang="en-US" sz="950" dirty="0">
+              <a:rPr lang="en-US" sz="1000" dirty="0">
                 <a:solidFill>
                   <a:srgbClr val="374151"/>
                 </a:solidFill>
@@ -8075,7 +9234,7 @@
               </a:rPr>
               <a:t>OrangeQC Baseline Report</a:t>
             </a:r>
-            <a:endParaRPr lang="en-US" sz="950" dirty="0"/>
+            <a:endParaRPr lang="en-US" sz="1000" dirty="0"/>
           </a:p>
         </p:txBody>
       </p:sp>
@@ -8087,8 +9246,8 @@
         </p:nvSpPr>
         <p:spPr>
           <a:xfrm>
-            <a:off x="3246120" y="3456432"/>
-            <a:ext cx="1261872" cy="438912"/>
+            <a:off x="3291840" y="3364992"/>
+            <a:ext cx="914400" cy="420624"/>
           </a:xfrm>
           <a:prstGeom prst="rect">
             <a:avLst/>
@@ -8112,8 +9271,8 @@
         </p:nvSpPr>
         <p:spPr>
           <a:xfrm>
-            <a:off x="4507992" y="3456432"/>
-            <a:ext cx="1261872" cy="438912"/>
+            <a:off x="4206240" y="3364992"/>
+            <a:ext cx="914400" cy="420624"/>
           </a:xfrm>
           <a:prstGeom prst="rect">
             <a:avLst/>
@@ -8137,8 +9296,8 @@
         </p:nvSpPr>
         <p:spPr>
           <a:xfrm>
-            <a:off x="5769864" y="3456432"/>
-            <a:ext cx="1261872" cy="438912"/>
+            <a:off x="5120640" y="3364992"/>
+            <a:ext cx="914400" cy="420624"/>
           </a:xfrm>
           <a:prstGeom prst="rect">
             <a:avLst/>
@@ -8162,8 +9321,8 @@
         </p:nvSpPr>
         <p:spPr>
           <a:xfrm>
-            <a:off x="7031736" y="3456432"/>
-            <a:ext cx="1261872" cy="438912"/>
+            <a:off x="6035040" y="3364992"/>
+            <a:ext cx="914400" cy="420624"/>
           </a:xfrm>
           <a:prstGeom prst="rect">
             <a:avLst/>
@@ -8187,8 +9346,8 @@
         </p:nvSpPr>
         <p:spPr>
           <a:xfrm>
-            <a:off x="8293608" y="3456432"/>
-            <a:ext cx="1261872" cy="438912"/>
+            <a:off x="6949440" y="3364992"/>
+            <a:ext cx="914400" cy="420624"/>
           </a:xfrm>
           <a:prstGeom prst="rect">
             <a:avLst/>
@@ -8212,8 +9371,8 @@
         </p:nvSpPr>
         <p:spPr>
           <a:xfrm>
-            <a:off x="9555480" y="3456432"/>
-            <a:ext cx="1261872" cy="438912"/>
+            <a:off x="7863840" y="3364992"/>
+            <a:ext cx="914400" cy="420624"/>
           </a:xfrm>
           <a:prstGeom prst="rect">
             <a:avLst/>
@@ -8237,8 +9396,8 @@
         </p:nvSpPr>
         <p:spPr>
           <a:xfrm>
-            <a:off x="5833872" y="3557016"/>
-            <a:ext cx="2395728" cy="241402"/>
+            <a:off x="5175504" y="3456432"/>
+            <a:ext cx="1719072" cy="231343"/>
           </a:xfrm>
           <a:prstGeom prst="rect">
             <a:avLst/>
@@ -8262,8 +9421,8 @@
         </p:nvSpPr>
         <p:spPr>
           <a:xfrm>
-            <a:off x="457200" y="3895344"/>
-            <a:ext cx="2788920" cy="438912"/>
+            <a:off x="457200" y="3785616"/>
+            <a:ext cx="2834640" cy="420624"/>
           </a:xfrm>
           <a:prstGeom prst="rect">
             <a:avLst/>
@@ -8287,8 +9446,8 @@
         </p:nvSpPr>
         <p:spPr>
           <a:xfrm>
-            <a:off x="548640" y="4014216"/>
-            <a:ext cx="2651760" cy="219456"/>
+            <a:off x="566928" y="3904488"/>
+            <a:ext cx="2688336" cy="201168"/>
           </a:xfrm>
           <a:prstGeom prst="rect">
             <a:avLst/>
@@ -8304,7 +9463,7 @@
               <a:buNone/>
             </a:pPr>
             <a:r>
-              <a:rPr lang="en-US" sz="950" dirty="0">
+              <a:rPr lang="en-US" sz="1000" dirty="0">
                 <a:solidFill>
                   <a:srgbClr val="374151"/>
                 </a:solidFill>
@@ -8314,7 +9473,7 @@
               </a:rPr>
               <a:t>30-Day Review Call</a:t>
             </a:r>
-            <a:endParaRPr lang="en-US" sz="950" dirty="0"/>
+            <a:endParaRPr lang="en-US" sz="1000" dirty="0"/>
           </a:p>
         </p:txBody>
       </p:sp>
@@ -8326,8 +9485,8 @@
         </p:nvSpPr>
         <p:spPr>
           <a:xfrm>
-            <a:off x="3246120" y="3895344"/>
-            <a:ext cx="1261872" cy="438912"/>
+            <a:off x="3291840" y="3785616"/>
+            <a:ext cx="914400" cy="420624"/>
           </a:xfrm>
           <a:prstGeom prst="rect">
             <a:avLst/>
@@ -8351,8 +9510,8 @@
         </p:nvSpPr>
         <p:spPr>
           <a:xfrm>
-            <a:off x="4507992" y="3895344"/>
-            <a:ext cx="1261872" cy="438912"/>
+            <a:off x="4206240" y="3785616"/>
+            <a:ext cx="914400" cy="420624"/>
           </a:xfrm>
           <a:prstGeom prst="rect">
             <a:avLst/>
@@ -8376,8 +9535,8 @@
         </p:nvSpPr>
         <p:spPr>
           <a:xfrm>
-            <a:off x="5769864" y="3895344"/>
-            <a:ext cx="1261872" cy="438912"/>
+            <a:off x="5120640" y="3785616"/>
+            <a:ext cx="914400" cy="420624"/>
           </a:xfrm>
           <a:prstGeom prst="rect">
             <a:avLst/>
@@ -8401,8 +9560,8 @@
         </p:nvSpPr>
         <p:spPr>
           <a:xfrm>
-            <a:off x="7031736" y="3895344"/>
-            <a:ext cx="1261872" cy="438912"/>
+            <a:off x="6035040" y="3785616"/>
+            <a:ext cx="914400" cy="420624"/>
           </a:xfrm>
           <a:prstGeom prst="rect">
             <a:avLst/>
@@ -8426,8 +9585,8 @@
         </p:nvSpPr>
         <p:spPr>
           <a:xfrm>
-            <a:off x="8293608" y="3895344"/>
-            <a:ext cx="1261872" cy="438912"/>
+            <a:off x="6949440" y="3785616"/>
+            <a:ext cx="914400" cy="420624"/>
           </a:xfrm>
           <a:prstGeom prst="rect">
             <a:avLst/>
@@ -8451,8 +9610,8 @@
         </p:nvSpPr>
         <p:spPr>
           <a:xfrm>
-            <a:off x="9555480" y="3895344"/>
-            <a:ext cx="1261872" cy="438912"/>
+            <a:off x="7863840" y="3785616"/>
+            <a:ext cx="914400" cy="420624"/>
           </a:xfrm>
           <a:prstGeom prst="rect">
             <a:avLst/>
@@ -8476,18 +9635,18 @@
         </p:nvSpPr>
         <p:spPr>
           <a:xfrm>
-            <a:off x="8357616" y="3995928"/>
-            <a:ext cx="1133856" cy="241402"/>
-          </a:xfrm>
-          <a:prstGeom prst="rect">
-            <a:avLst/>
-          </a:prstGeom>
-          <a:solidFill>
-            <a:srgbClr val="2E7D52"/>
-          </a:solidFill>
-          <a:ln w="12700">
-            <a:solidFill>
-              <a:srgbClr val="2E7D52"/>
+            <a:off x="7004304" y="3877056"/>
+            <a:ext cx="804672" cy="231343"/>
+          </a:xfrm>
+          <a:prstGeom prst="rect">
+            <a:avLst/>
+          </a:prstGeom>
+          <a:solidFill>
+            <a:srgbClr val="2E6B3E"/>
+          </a:solidFill>
+          <a:ln w="12700">
+            <a:solidFill>
+              <a:srgbClr val="2E6B3E"/>
             </a:solidFill>
             <a:prstDash val="solid"/>
           </a:ln>
@@ -8501,8 +9660,8 @@
         </p:nvSpPr>
         <p:spPr>
           <a:xfrm>
-            <a:off x="457200" y="4334256"/>
-            <a:ext cx="2788920" cy="438912"/>
+            <a:off x="457200" y="4206240"/>
+            <a:ext cx="2834640" cy="420624"/>
           </a:xfrm>
           <a:prstGeom prst="rect">
             <a:avLst/>
@@ -8526,8 +9685,8 @@
         </p:nvSpPr>
         <p:spPr>
           <a:xfrm>
-            <a:off x="548640" y="4453128"/>
-            <a:ext cx="2651760" cy="219456"/>
+            <a:off x="566928" y="4325112"/>
+            <a:ext cx="2688336" cy="201168"/>
           </a:xfrm>
           <a:prstGeom prst="rect">
             <a:avLst/>
@@ -8543,7 +9702,7 @@
               <a:buNone/>
             </a:pPr>
             <a:r>
-              <a:rPr lang="en-US" sz="950" dirty="0">
+              <a:rPr lang="en-US" sz="1000" dirty="0">
                 <a:solidFill>
                   <a:srgbClr val="374151"/>
                 </a:solidFill>
@@ -8553,7 +9712,7 @@
               </a:rPr>
               <a:t>90-Day QBR &amp; Scope Review</a:t>
             </a:r>
-            <a:endParaRPr lang="en-US" sz="950" dirty="0"/>
+            <a:endParaRPr lang="en-US" sz="1000" dirty="0"/>
           </a:p>
         </p:txBody>
       </p:sp>
@@ -8565,8 +9724,8 @@
         </p:nvSpPr>
         <p:spPr>
           <a:xfrm>
-            <a:off x="3246120" y="4334256"/>
-            <a:ext cx="1261872" cy="438912"/>
+            <a:off x="3291840" y="4206240"/>
+            <a:ext cx="914400" cy="420624"/>
           </a:xfrm>
           <a:prstGeom prst="rect">
             <a:avLst/>
@@ -8590,8 +9749,8 @@
         </p:nvSpPr>
         <p:spPr>
           <a:xfrm>
-            <a:off x="4507992" y="4334256"/>
-            <a:ext cx="1261872" cy="438912"/>
+            <a:off x="4206240" y="4206240"/>
+            <a:ext cx="914400" cy="420624"/>
           </a:xfrm>
           <a:prstGeom prst="rect">
             <a:avLst/>
@@ -8615,8 +9774,8 @@
         </p:nvSpPr>
         <p:spPr>
           <a:xfrm>
-            <a:off x="5769864" y="4334256"/>
-            <a:ext cx="1261872" cy="438912"/>
+            <a:off x="5120640" y="4206240"/>
+            <a:ext cx="914400" cy="420624"/>
           </a:xfrm>
           <a:prstGeom prst="rect">
             <a:avLst/>
@@ -8640,8 +9799,8 @@
         </p:nvSpPr>
         <p:spPr>
           <a:xfrm>
-            <a:off x="7031736" y="4334256"/>
-            <a:ext cx="1261872" cy="438912"/>
+            <a:off x="6035040" y="4206240"/>
+            <a:ext cx="914400" cy="420624"/>
           </a:xfrm>
           <a:prstGeom prst="rect">
             <a:avLst/>
@@ -8665,8 +9824,8 @@
         </p:nvSpPr>
         <p:spPr>
           <a:xfrm>
-            <a:off x="8293608" y="4334256"/>
-            <a:ext cx="1261872" cy="438912"/>
+            <a:off x="6949440" y="4206240"/>
+            <a:ext cx="914400" cy="420624"/>
           </a:xfrm>
           <a:prstGeom prst="rect">
             <a:avLst/>
@@ -8690,8 +9849,8 @@
         </p:nvSpPr>
         <p:spPr>
           <a:xfrm>
-            <a:off x="9555480" y="4334256"/>
-            <a:ext cx="1261872" cy="438912"/>
+            <a:off x="7863840" y="4206240"/>
+            <a:ext cx="914400" cy="420624"/>
           </a:xfrm>
           <a:prstGeom prst="rect">
             <a:avLst/>
@@ -8715,18 +9874,18 @@
         </p:nvSpPr>
         <p:spPr>
           <a:xfrm>
-            <a:off x="9619488" y="4434840"/>
-            <a:ext cx="1133856" cy="241402"/>
-          </a:xfrm>
-          <a:prstGeom prst="rect">
-            <a:avLst/>
-          </a:prstGeom>
-          <a:solidFill>
-            <a:srgbClr val="2E7D52"/>
-          </a:solidFill>
-          <a:ln w="12700">
-            <a:solidFill>
-              <a:srgbClr val="2E7D52"/>
+            <a:off x="7918704" y="4297680"/>
+            <a:ext cx="804672" cy="231343"/>
+          </a:xfrm>
+          <a:prstGeom prst="rect">
+            <a:avLst/>
+          </a:prstGeom>
+          <a:solidFill>
+            <a:srgbClr val="2E6B3E"/>
+          </a:solidFill>
+          <a:ln w="12700">
+            <a:solidFill>
+              <a:srgbClr val="2E6B3E"/>
             </a:solidFill>
             <a:prstDash val="solid"/>
           </a:ln>
@@ -8740,8 +9899,8 @@
         </p:nvSpPr>
         <p:spPr>
           <a:xfrm>
-            <a:off x="457200" y="4882896"/>
-            <a:ext cx="219456" cy="137160"/>
+            <a:off x="457200" y="4718304"/>
+            <a:ext cx="219456" cy="146304"/>
           </a:xfrm>
           <a:prstGeom prst="rect">
             <a:avLst/>
@@ -8765,8 +9924,8 @@
         </p:nvSpPr>
         <p:spPr>
           <a:xfrm>
-            <a:off x="749808" y="4873752"/>
-            <a:ext cx="2194560" cy="164592"/>
+            <a:off x="749808" y="4709160"/>
+            <a:ext cx="2286000" cy="164592"/>
           </a:xfrm>
           <a:prstGeom prst="rect">
             <a:avLst/>
@@ -8804,8 +9963,8 @@
         </p:nvSpPr>
         <p:spPr>
           <a:xfrm>
-            <a:off x="3200400" y="4882896"/>
-            <a:ext cx="219456" cy="137160"/>
+            <a:off x="3200400" y="4718304"/>
+            <a:ext cx="219456" cy="146304"/>
           </a:xfrm>
           <a:prstGeom prst="rect">
             <a:avLst/>
@@ -8829,8 +9988,8 @@
         </p:nvSpPr>
         <p:spPr>
           <a:xfrm>
-            <a:off x="3493008" y="4873752"/>
-            <a:ext cx="2194560" cy="164592"/>
+            <a:off x="3493008" y="4709160"/>
+            <a:ext cx="2286000" cy="164592"/>
           </a:xfrm>
           <a:prstGeom prst="rect">
             <a:avLst/>
@@ -8868,18 +10027,18 @@
         </p:nvSpPr>
         <p:spPr>
           <a:xfrm>
-            <a:off x="5943600" y="4882896"/>
-            <a:ext cx="219456" cy="137160"/>
-          </a:xfrm>
-          <a:prstGeom prst="rect">
-            <a:avLst/>
-          </a:prstGeom>
-          <a:solidFill>
-            <a:srgbClr val="2E7D52"/>
-          </a:solidFill>
-          <a:ln w="12700">
-            <a:solidFill>
-              <a:srgbClr val="2E7D52"/>
+            <a:off x="5943600" y="4718304"/>
+            <a:ext cx="219456" cy="146304"/>
+          </a:xfrm>
+          <a:prstGeom prst="rect">
+            <a:avLst/>
+          </a:prstGeom>
+          <a:solidFill>
+            <a:srgbClr val="2E6B3E"/>
+          </a:solidFill>
+          <a:ln w="12700">
+            <a:solidFill>
+              <a:srgbClr val="2E6B3E"/>
             </a:solidFill>
             <a:prstDash val="solid"/>
           </a:ln>
@@ -8893,8 +10052,8 @@
         </p:nvSpPr>
         <p:spPr>
           <a:xfrm>
-            <a:off x="6236208" y="4873752"/>
-            <a:ext cx="2194560" cy="164592"/>
+            <a:off x="6236208" y="4709160"/>
+            <a:ext cx="2286000" cy="164592"/>
           </a:xfrm>
           <a:prstGeom prst="rect">
             <a:avLst/>
@@ -8990,7 +10149,7 @@
         <p:spPr>
           <a:xfrm>
             <a:off x="457200" y="91440"/>
-            <a:ext cx="7315200" cy="164592"/>
+            <a:ext cx="6858000" cy="164592"/>
           </a:xfrm>
           <a:prstGeom prst="rect">
             <a:avLst/>
@@ -9028,8 +10187,8 @@
         </p:nvSpPr>
         <p:spPr>
           <a:xfrm>
-            <a:off x="8686800" y="73152"/>
-            <a:ext cx="365760" cy="164592"/>
+            <a:off x="8595360" y="73152"/>
+            <a:ext cx="457200" cy="164592"/>
           </a:xfrm>
           <a:prstGeom prst="rect">
             <a:avLst/>
@@ -9075,8 +10234,8 @@
         </p:blipFill>
         <p:spPr>
           <a:xfrm>
-            <a:off x="7973568" y="4663440"/>
-            <a:ext cx="1051560" cy="402336"/>
+            <a:off x="7936992" y="4626864"/>
+            <a:ext cx="1078992" cy="411480"/>
           </a:xfrm>
           <a:prstGeom prst="rect">
             <a:avLst/>
@@ -9092,7 +10251,7 @@
         <p:spPr>
           <a:xfrm>
             <a:off x="457200" y="256032"/>
-            <a:ext cx="6400800" cy="438912"/>
+            <a:ext cx="8321040" cy="457200"/>
           </a:xfrm>
           <a:prstGeom prst="rect">
             <a:avLst/>
@@ -9130,8 +10289,8 @@
         </p:nvSpPr>
         <p:spPr>
           <a:xfrm>
-            <a:off x="457200" y="694944"/>
-            <a:ext cx="6400800" cy="237744"/>
+            <a:off x="457200" y="713232"/>
+            <a:ext cx="8321040" cy="237744"/>
           </a:xfrm>
           <a:prstGeom prst="rect">
             <a:avLst/>
@@ -9170,7 +10329,7 @@
         <p:spPr>
           <a:xfrm>
             <a:off x="457200" y="987552"/>
-            <a:ext cx="8229600" cy="16459"/>
+            <a:ext cx="8321040" cy="16459"/>
           </a:xfrm>
           <a:prstGeom prst="rect">
             <a:avLst/>
@@ -9188,14 +10347,39 @@
       </p:sp>
       <p:sp>
         <p:nvSpPr>
-          <p:cNvPr id="9" name="Text 6"/>
-          <p:cNvSpPr/>
-          <p:nvPr/>
-        </p:nvSpPr>
-        <p:spPr>
-          <a:xfrm>
-            <a:off x="457200" y="1078992"/>
-            <a:ext cx="6035040" cy="914400"/>
+          <p:cNvPr id="9" name="Shape 6"/>
+          <p:cNvSpPr/>
+          <p:nvPr/>
+        </p:nvSpPr>
+        <p:spPr>
+          <a:xfrm>
+            <a:off x="7059168" y="1005840"/>
+            <a:ext cx="16459" cy="3621024"/>
+          </a:xfrm>
+          <a:prstGeom prst="rect">
+            <a:avLst/>
+          </a:prstGeom>
+          <a:solidFill>
+            <a:srgbClr val="D1D5DB"/>
+          </a:solidFill>
+          <a:ln w="12700">
+            <a:solidFill>
+              <a:srgbClr val="D1D5DB"/>
+            </a:solidFill>
+            <a:prstDash val="solid"/>
+          </a:ln>
+        </p:spPr>
+      </p:sp>
+      <p:sp>
+        <p:nvSpPr>
+          <p:cNvPr id="10" name="Text 7"/>
+          <p:cNvSpPr/>
+          <p:nvPr/>
+        </p:nvSpPr>
+        <p:spPr>
+          <a:xfrm>
+            <a:off x="457200" y="1042416"/>
+            <a:ext cx="6473952" cy="1042416"/>
           </a:xfrm>
           <a:prstGeom prst="rect">
             <a:avLst/>
@@ -9227,14 +10411,14 @@
       </p:sp>
       <p:sp>
         <p:nvSpPr>
-          <p:cNvPr id="10" name="Text 7"/>
-          <p:cNvSpPr/>
-          <p:nvPr/>
-        </p:nvSpPr>
-        <p:spPr>
-          <a:xfrm>
-            <a:off x="457200" y="2011680"/>
-            <a:ext cx="6035040" cy="201168"/>
+          <p:cNvPr id="11" name="Text 8"/>
+          <p:cNvSpPr/>
+          <p:nvPr/>
+        </p:nvSpPr>
+        <p:spPr>
+          <a:xfrm>
+            <a:off x="457200" y="2103120"/>
+            <a:ext cx="6473952" cy="219456"/>
           </a:xfrm>
           <a:prstGeom prst="rect">
             <a:avLst/>
@@ -9266,14 +10450,14 @@
       </p:sp>
       <p:sp>
         <p:nvSpPr>
-          <p:cNvPr id="11" name="Shape 8"/>
-          <p:cNvSpPr/>
-          <p:nvPr/>
-        </p:nvSpPr>
-        <p:spPr>
-          <a:xfrm>
-            <a:off x="457200" y="2267712"/>
-            <a:ext cx="6035040" cy="16459"/>
+          <p:cNvPr id="12" name="Shape 9"/>
+          <p:cNvSpPr/>
+          <p:nvPr/>
+        </p:nvSpPr>
+        <p:spPr>
+          <a:xfrm>
+            <a:off x="457200" y="2377440"/>
+            <a:ext cx="6473952" cy="16459"/>
           </a:xfrm>
           <a:prstGeom prst="rect">
             <a:avLst/>
@@ -9291,14 +10475,14 @@
       </p:sp>
       <p:sp>
         <p:nvSpPr>
-          <p:cNvPr id="12" name="Text 9"/>
-          <p:cNvSpPr/>
-          <p:nvPr/>
-        </p:nvSpPr>
-        <p:spPr>
-          <a:xfrm>
-            <a:off x="457200" y="2359152"/>
-            <a:ext cx="2834640" cy="731520"/>
+          <p:cNvPr id="13" name="Text 10"/>
+          <p:cNvSpPr/>
+          <p:nvPr/>
+        </p:nvSpPr>
+        <p:spPr>
+          <a:xfrm>
+            <a:off x="457200" y="2468880"/>
+            <a:ext cx="3145536" cy="658368"/>
           </a:xfrm>
           <a:prstGeom prst="rect">
             <a:avLst/>
@@ -9330,14 +10514,14 @@
       </p:sp>
       <p:sp>
         <p:nvSpPr>
-          <p:cNvPr id="13" name="Text 10"/>
-          <p:cNvSpPr/>
-          <p:nvPr/>
-        </p:nvSpPr>
-        <p:spPr>
-          <a:xfrm>
-            <a:off x="457200" y="3108960"/>
-            <a:ext cx="2834640" cy="182880"/>
+          <p:cNvPr id="14" name="Text 11"/>
+          <p:cNvSpPr/>
+          <p:nvPr/>
+        </p:nvSpPr>
+        <p:spPr>
+          <a:xfrm>
+            <a:off x="457200" y="3145536"/>
+            <a:ext cx="3145536" cy="182880"/>
           </a:xfrm>
           <a:prstGeom prst="rect">
             <a:avLst/>
@@ -9353,7 +10537,7 @@
               <a:buNone/>
             </a:pPr>
             <a:r>
-              <a:rPr lang="en-US" sz="850" dirty="0">
+              <a:rPr lang="en-US" sz="900" dirty="0">
                 <a:solidFill>
                   <a:srgbClr val="9CA3AF"/>
                 </a:solidFill>
@@ -9363,20 +10547,20 @@
               </a:rPr>
               <a:t>— Sheriff's Office Facility Manager</a:t>
             </a:r>
-            <a:endParaRPr lang="en-US" sz="850" dirty="0"/>
-          </a:p>
-        </p:txBody>
-      </p:sp>
-      <p:sp>
-        <p:nvSpPr>
-          <p:cNvPr id="14" name="Text 11"/>
-          <p:cNvSpPr/>
-          <p:nvPr/>
-        </p:nvSpPr>
-        <p:spPr>
-          <a:xfrm>
-            <a:off x="3429000" y="2359152"/>
-            <a:ext cx="2834640" cy="731520"/>
+            <a:endParaRPr lang="en-US" sz="900" dirty="0"/>
+          </a:p>
+        </p:txBody>
+      </p:sp>
+      <p:sp>
+        <p:nvSpPr>
+          <p:cNvPr id="15" name="Text 12"/>
+          <p:cNvSpPr/>
+          <p:nvPr/>
+        </p:nvSpPr>
+        <p:spPr>
+          <a:xfrm>
+            <a:off x="3785616" y="2468880"/>
+            <a:ext cx="3145536" cy="658368"/>
           </a:xfrm>
           <a:prstGeom prst="rect">
             <a:avLst/>
@@ -9408,14 +10592,14 @@
       </p:sp>
       <p:sp>
         <p:nvSpPr>
-          <p:cNvPr id="15" name="Text 12"/>
-          <p:cNvSpPr/>
-          <p:nvPr/>
-        </p:nvSpPr>
-        <p:spPr>
-          <a:xfrm>
-            <a:off x="3429000" y="3108960"/>
-            <a:ext cx="2834640" cy="182880"/>
+          <p:cNvPr id="16" name="Text 13"/>
+          <p:cNvSpPr/>
+          <p:nvPr/>
+        </p:nvSpPr>
+        <p:spPr>
+          <a:xfrm>
+            <a:off x="3785616" y="3145536"/>
+            <a:ext cx="3145536" cy="182880"/>
           </a:xfrm>
           <a:prstGeom prst="rect">
             <a:avLst/>
@@ -9431,7 +10615,7 @@
               <a:buNone/>
             </a:pPr>
             <a:r>
-              <a:rPr lang="en-US" sz="850" dirty="0">
+              <a:rPr lang="en-US" sz="900" dirty="0">
                 <a:solidFill>
                   <a:srgbClr val="9CA3AF"/>
                 </a:solidFill>
@@ -9441,20 +10625,20 @@
               </a:rPr>
               <a:t>— Government Administrator</a:t>
             </a:r>
-            <a:endParaRPr lang="en-US" sz="850" dirty="0"/>
-          </a:p>
-        </p:txBody>
-      </p:sp>
-      <p:sp>
-        <p:nvSpPr>
-          <p:cNvPr id="16" name="Shape 13"/>
-          <p:cNvSpPr/>
-          <p:nvPr/>
-        </p:nvSpPr>
-        <p:spPr>
-          <a:xfrm>
-            <a:off x="6693408" y="1005840"/>
-            <a:ext cx="16459" cy="3474720"/>
+            <a:endParaRPr lang="en-US" sz="900" dirty="0"/>
+          </a:p>
+        </p:txBody>
+      </p:sp>
+      <p:sp>
+        <p:nvSpPr>
+          <p:cNvPr id="17" name="Shape 14"/>
+          <p:cNvSpPr/>
+          <p:nvPr/>
+        </p:nvSpPr>
+        <p:spPr>
+          <a:xfrm>
+            <a:off x="457200" y="3401568"/>
+            <a:ext cx="6473952" cy="16459"/>
           </a:xfrm>
           <a:prstGeom prst="rect">
             <a:avLst/>
@@ -9472,14 +10656,115 @@
       </p:sp>
       <p:sp>
         <p:nvSpPr>
-          <p:cNvPr id="17" name="Text 14"/>
-          <p:cNvSpPr/>
-          <p:nvPr/>
-        </p:nvSpPr>
-        <p:spPr>
-          <a:xfrm>
-            <a:off x="6912864" y="1170432"/>
-            <a:ext cx="1920240" cy="530352"/>
+          <p:cNvPr id="18" name="Text 15"/>
+          <p:cNvSpPr/>
+          <p:nvPr/>
+        </p:nvSpPr>
+        <p:spPr>
+          <a:xfrm>
+            <a:off x="457200" y="3474720"/>
+            <a:ext cx="6473952" cy="749808"/>
+          </a:xfrm>
+          <a:prstGeom prst="rect">
+            <a:avLst/>
+          </a:prstGeom>
+          <a:noFill/>
+          <a:ln/>
+        </p:spPr>
+        <p:txBody>
+          <a:bodyPr wrap="square" rtlCol="0" anchor="ctr"/>
+          <a:lstStyle/>
+          <a:p>
+            <a:pPr indent="0" marL="0">
+              <a:buNone/>
+            </a:pPr>
+            <a:r>
+              <a:rPr lang="en-US" sz="1050" i="1" dirty="0">
+                <a:solidFill>
+                  <a:srgbClr val="6B7280"/>
+                </a:solidFill>
+                <a:latin typeface="Calibri" pitchFamily="34" charset="0"/>
+                <a:ea typeface="Calibri" pitchFamily="34" charset="-122"/>
+                <a:cs typeface="Calibri" pitchFamily="34" charset="-120"/>
+              </a:rPr>
+              <a:t>"The background checks and professionalism of their crew gave us confidence from day one. In a government facility, security and accountability aren't negotiable. Mad Dog gets that."</a:t>
+            </a:r>
+            <a:endParaRPr lang="en-US" sz="1050" dirty="0"/>
+          </a:p>
+        </p:txBody>
+      </p:sp>
+      <p:sp>
+        <p:nvSpPr>
+          <p:cNvPr id="19" name="Text 16"/>
+          <p:cNvSpPr/>
+          <p:nvPr/>
+        </p:nvSpPr>
+        <p:spPr>
+          <a:xfrm>
+            <a:off x="457200" y="4242816"/>
+            <a:ext cx="6473952" cy="182880"/>
+          </a:xfrm>
+          <a:prstGeom prst="rect">
+            <a:avLst/>
+          </a:prstGeom>
+          <a:noFill/>
+          <a:ln/>
+        </p:spPr>
+        <p:txBody>
+          <a:bodyPr wrap="square" rtlCol="0" anchor="ctr"/>
+          <a:lstStyle/>
+          <a:p>
+            <a:pPr indent="0" marL="0">
+              <a:buNone/>
+            </a:pPr>
+            <a:r>
+              <a:rPr lang="en-US" sz="900" dirty="0">
+                <a:solidFill>
+                  <a:srgbClr val="9CA3AF"/>
+                </a:solidFill>
+                <a:latin typeface="Calibri" pitchFamily="34" charset="0"/>
+                <a:ea typeface="Calibri" pitchFamily="34" charset="-122"/>
+                <a:cs typeface="Calibri" pitchFamily="34" charset="-120"/>
+              </a:rPr>
+              <a:t>— Municipal Building Supervisor</a:t>
+            </a:r>
+            <a:endParaRPr lang="en-US" sz="900" dirty="0"/>
+          </a:p>
+        </p:txBody>
+      </p:sp>
+      <p:pic>
+        <p:nvPicPr>
+          <p:cNvPr id="20" name="Image 1" descr="./logo_faa.png">    </p:cNvPr>
+          <p:cNvPicPr>
+            <a:picLocks noChangeAspect="1"/>
+          </p:cNvPicPr>
+          <p:nvPr/>
+        </p:nvPicPr>
+        <p:blipFill>
+          <a:blip r:embed="rId2"/>
+          <a:srcRect l="0" r="0" t="0" b="0"/>
+          <a:stretch/>
+        </p:blipFill>
+        <p:spPr>
+          <a:xfrm>
+            <a:off x="7168896" y="1115568"/>
+            <a:ext cx="1499616" cy="731520"/>
+          </a:xfrm>
+          <a:prstGeom prst="rect">
+            <a:avLst/>
+          </a:prstGeom>
+        </p:spPr>
+      </p:pic>
+      <p:sp>
+        <p:nvSpPr>
+          <p:cNvPr id="21" name="Text 17"/>
+          <p:cNvSpPr/>
+          <p:nvPr/>
+        </p:nvSpPr>
+        <p:spPr>
+          <a:xfrm>
+            <a:off x="7132320" y="1901952"/>
+            <a:ext cx="1572768" cy="182880"/>
           </a:xfrm>
           <a:prstGeom prst="rect">
             <a:avLst/>
@@ -9495,30 +10780,53 @@
               <a:buNone/>
             </a:pPr>
             <a:r>
-              <a:rPr lang="en-US" sz="2600" b="1" dirty="0">
-                <a:solidFill>
-                  <a:srgbClr val="0D1F3C"/>
-                </a:solidFill>
-                <a:latin typeface="Trebuchet MS" pitchFamily="34" charset="0"/>
-                <a:ea typeface="Trebuchet MS" pitchFamily="34" charset="-122"/>
-                <a:cs typeface="Trebuchet MS" pitchFamily="34" charset="-120"/>
-              </a:rPr>
-              <a:t>FAA</a:t>
-            </a:r>
-            <a:endParaRPr lang="en-US" sz="2600" dirty="0"/>
-          </a:p>
-        </p:txBody>
-      </p:sp>
-      <p:sp>
-        <p:nvSpPr>
-          <p:cNvPr id="18" name="Text 15"/>
-          <p:cNvSpPr/>
-          <p:nvPr/>
-        </p:nvSpPr>
-        <p:spPr>
-          <a:xfrm>
-            <a:off x="6912864" y="1719072"/>
-            <a:ext cx="1920240" cy="201168"/>
+              <a:rPr lang="en-US" sz="700" dirty="0">
+                <a:solidFill>
+                  <a:srgbClr val="9CA3AF"/>
+                </a:solidFill>
+                <a:latin typeface="Calibri" pitchFamily="34" charset="0"/>
+                <a:ea typeface="Calibri" pitchFamily="34" charset="-122"/>
+                <a:cs typeface="Calibri" pitchFamily="34" charset="-120"/>
+              </a:rPr>
+              <a:t>Certified Past Performance</a:t>
+            </a:r>
+            <a:endParaRPr lang="en-US" sz="700" dirty="0"/>
+          </a:p>
+        </p:txBody>
+      </p:sp>
+      <p:pic>
+        <p:nvPicPr>
+          <p:cNvPr id="22" name="Image 2" descr="./logo_army.png">    </p:cNvPr>
+          <p:cNvPicPr>
+            <a:picLocks noChangeAspect="1"/>
+          </p:cNvPicPr>
+          <p:nvPr/>
+        </p:nvPicPr>
+        <p:blipFill>
+          <a:blip r:embed="rId3"/>
+          <a:srcRect l="0" r="0" t="0" b="0"/>
+          <a:stretch/>
+        </p:blipFill>
+        <p:spPr>
+          <a:xfrm>
+            <a:off x="7168896" y="2395728"/>
+            <a:ext cx="1499616" cy="731520"/>
+          </a:xfrm>
+          <a:prstGeom prst="rect">
+            <a:avLst/>
+          </a:prstGeom>
+        </p:spPr>
+      </p:pic>
+      <p:sp>
+        <p:nvSpPr>
+          <p:cNvPr id="23" name="Text 18"/>
+          <p:cNvSpPr/>
+          <p:nvPr/>
+        </p:nvSpPr>
+        <p:spPr>
+          <a:xfrm>
+            <a:off x="7132320" y="3182112"/>
+            <a:ext cx="1572768" cy="182880"/>
           </a:xfrm>
           <a:prstGeom prst="rect">
             <a:avLst/>
@@ -9534,7 +10842,7 @@
               <a:buNone/>
             </a:pPr>
             <a:r>
-              <a:rPr lang="en-US" sz="800" b="1" spc="150" kern="0" dirty="0">
+              <a:rPr lang="en-US" sz="700" dirty="0">
                 <a:solidFill>
                   <a:srgbClr val="9CA3AF"/>
                 </a:solidFill>
@@ -9542,47 +10850,45 @@
                 <a:ea typeface="Calibri" pitchFamily="34" charset="-122"/>
                 <a:cs typeface="Calibri" pitchFamily="34" charset="-120"/>
               </a:rPr>
-              <a:t>CERTIFIED PAST PERFORMANCE</a:t>
-            </a:r>
-            <a:endParaRPr lang="en-US" sz="800" dirty="0"/>
-          </a:p>
-        </p:txBody>
-      </p:sp>
-      <p:sp>
-        <p:nvSpPr>
-          <p:cNvPr id="19" name="Shape 16"/>
-          <p:cNvSpPr/>
-          <p:nvPr/>
-        </p:nvSpPr>
-        <p:spPr>
-          <a:xfrm>
-            <a:off x="6912864" y="1993392"/>
-            <a:ext cx="1920240" cy="16459"/>
-          </a:xfrm>
-          <a:prstGeom prst="rect">
-            <a:avLst/>
-          </a:prstGeom>
-          <a:solidFill>
-            <a:srgbClr val="D1D5DB"/>
-          </a:solidFill>
-          <a:ln w="12700">
-            <a:solidFill>
-              <a:srgbClr val="D1D5DB"/>
-            </a:solidFill>
-            <a:prstDash val="solid"/>
-          </a:ln>
-        </p:spPr>
-      </p:sp>
-      <p:sp>
-        <p:nvSpPr>
-          <p:cNvPr id="20" name="Text 17"/>
-          <p:cNvSpPr/>
-          <p:nvPr/>
-        </p:nvSpPr>
-        <p:spPr>
-          <a:xfrm>
-            <a:off x="6912864" y="2304288"/>
-            <a:ext cx="1920240" cy="530352"/>
+              <a:t>Past Performance</a:t>
+            </a:r>
+            <a:endParaRPr lang="en-US" sz="700" dirty="0"/>
+          </a:p>
+        </p:txBody>
+      </p:sp>
+      <p:pic>
+        <p:nvPicPr>
+          <p:cNvPr id="24" name="Image 3" descr="./logo_issa.png">    </p:cNvPr>
+          <p:cNvPicPr>
+            <a:picLocks noChangeAspect="1"/>
+          </p:cNvPicPr>
+          <p:nvPr/>
+        </p:nvPicPr>
+        <p:blipFill>
+          <a:blip r:embed="rId4"/>
+          <a:srcRect l="0" r="0" t="0" b="0"/>
+          <a:stretch/>
+        </p:blipFill>
+        <p:spPr>
+          <a:xfrm>
+            <a:off x="7168896" y="3675888"/>
+            <a:ext cx="1499616" cy="731520"/>
+          </a:xfrm>
+          <a:prstGeom prst="rect">
+            <a:avLst/>
+          </a:prstGeom>
+        </p:spPr>
+      </p:pic>
+      <p:sp>
+        <p:nvSpPr>
+          <p:cNvPr id="25" name="Text 19"/>
+          <p:cNvSpPr/>
+          <p:nvPr/>
+        </p:nvSpPr>
+        <p:spPr>
+          <a:xfrm>
+            <a:off x="7132320" y="4462272"/>
+            <a:ext cx="1572768" cy="182880"/>
           </a:xfrm>
           <a:prstGeom prst="rect">
             <a:avLst/>
@@ -9598,46 +10904,7 @@
               <a:buNone/>
             </a:pPr>
             <a:r>
-              <a:rPr lang="en-US" sz="2600" b="1" dirty="0">
-                <a:solidFill>
-                  <a:srgbClr val="0D1F3C"/>
-                </a:solidFill>
-                <a:latin typeface="Trebuchet MS" pitchFamily="34" charset="0"/>
-                <a:ea typeface="Trebuchet MS" pitchFamily="34" charset="-122"/>
-                <a:cs typeface="Trebuchet MS" pitchFamily="34" charset="-120"/>
-              </a:rPr>
-              <a:t>Army</a:t>
-            </a:r>
-            <a:endParaRPr lang="en-US" sz="2600" dirty="0"/>
-          </a:p>
-        </p:txBody>
-      </p:sp>
-      <p:sp>
-        <p:nvSpPr>
-          <p:cNvPr id="21" name="Text 18"/>
-          <p:cNvSpPr/>
-          <p:nvPr/>
-        </p:nvSpPr>
-        <p:spPr>
-          <a:xfrm>
-            <a:off x="6912864" y="2852928"/>
-            <a:ext cx="1920240" cy="201168"/>
-          </a:xfrm>
-          <a:prstGeom prst="rect">
-            <a:avLst/>
-          </a:prstGeom>
-          <a:noFill/>
-          <a:ln/>
-        </p:spPr>
-        <p:txBody>
-          <a:bodyPr wrap="square" rtlCol="0" anchor="ctr"/>
-          <a:lstStyle/>
-          <a:p>
-            <a:pPr algn="ctr" indent="0" marL="0">
-              <a:buNone/>
-            </a:pPr>
-            <a:r>
-              <a:rPr lang="en-US" sz="800" b="1" spc="150" kern="0" dirty="0">
+              <a:rPr lang="en-US" sz="700" dirty="0">
                 <a:solidFill>
                   <a:srgbClr val="9CA3AF"/>
                 </a:solidFill>
@@ -9645,215 +10912,9 @@
                 <a:ea typeface="Calibri" pitchFamily="34" charset="-122"/>
                 <a:cs typeface="Calibri" pitchFamily="34" charset="-120"/>
               </a:rPr>
-              <a:t>PAST PERFORMANCE</a:t>
-            </a:r>
-            <a:endParaRPr lang="en-US" sz="800" dirty="0"/>
-          </a:p>
-        </p:txBody>
-      </p:sp>
-      <p:sp>
-        <p:nvSpPr>
-          <p:cNvPr id="22" name="Shape 19"/>
-          <p:cNvSpPr/>
-          <p:nvPr/>
-        </p:nvSpPr>
-        <p:spPr>
-          <a:xfrm>
-            <a:off x="6912864" y="3127248"/>
-            <a:ext cx="1920240" cy="16459"/>
-          </a:xfrm>
-          <a:prstGeom prst="rect">
-            <a:avLst/>
-          </a:prstGeom>
-          <a:solidFill>
-            <a:srgbClr val="D1D5DB"/>
-          </a:solidFill>
-          <a:ln w="12700">
-            <a:solidFill>
-              <a:srgbClr val="D1D5DB"/>
-            </a:solidFill>
-            <a:prstDash val="solid"/>
-          </a:ln>
-        </p:spPr>
-      </p:sp>
-      <p:sp>
-        <p:nvSpPr>
-          <p:cNvPr id="23" name="Text 20"/>
-          <p:cNvSpPr/>
-          <p:nvPr/>
-        </p:nvSpPr>
-        <p:spPr>
-          <a:xfrm>
-            <a:off x="6912864" y="3438144"/>
-            <a:ext cx="1920240" cy="530352"/>
-          </a:xfrm>
-          <a:prstGeom prst="rect">
-            <a:avLst/>
-          </a:prstGeom>
-          <a:noFill/>
-          <a:ln/>
-        </p:spPr>
-        <p:txBody>
-          <a:bodyPr wrap="square" rtlCol="0" anchor="ctr"/>
-          <a:lstStyle/>
-          <a:p>
-            <a:pPr algn="ctr" indent="0" marL="0">
-              <a:buNone/>
-            </a:pPr>
-            <a:r>
-              <a:rPr lang="en-US" sz="2600" b="1" dirty="0">
-                <a:solidFill>
-                  <a:srgbClr val="0D1F3C"/>
-                </a:solidFill>
-                <a:latin typeface="Trebuchet MS" pitchFamily="34" charset="0"/>
-                <a:ea typeface="Trebuchet MS" pitchFamily="34" charset="-122"/>
-                <a:cs typeface="Trebuchet MS" pitchFamily="34" charset="-120"/>
-              </a:rPr>
-              <a:t>ISSA</a:t>
-            </a:r>
-            <a:endParaRPr lang="en-US" sz="2600" dirty="0"/>
-          </a:p>
-        </p:txBody>
-      </p:sp>
-      <p:sp>
-        <p:nvSpPr>
-          <p:cNvPr id="24" name="Text 21"/>
-          <p:cNvSpPr/>
-          <p:nvPr/>
-        </p:nvSpPr>
-        <p:spPr>
-          <a:xfrm>
-            <a:off x="6912864" y="3986784"/>
-            <a:ext cx="1920240" cy="201168"/>
-          </a:xfrm>
-          <a:prstGeom prst="rect">
-            <a:avLst/>
-          </a:prstGeom>
-          <a:noFill/>
-          <a:ln/>
-        </p:spPr>
-        <p:txBody>
-          <a:bodyPr wrap="square" rtlCol="0" anchor="ctr"/>
-          <a:lstStyle/>
-          <a:p>
-            <a:pPr algn="ctr" indent="0" marL="0">
-              <a:buNone/>
-            </a:pPr>
-            <a:r>
-              <a:rPr lang="en-US" sz="800" b="1" spc="150" kern="0" dirty="0">
-                <a:solidFill>
-                  <a:srgbClr val="9CA3AF"/>
-                </a:solidFill>
-                <a:latin typeface="Calibri" pitchFamily="34" charset="0"/>
-                <a:ea typeface="Calibri" pitchFamily="34" charset="-122"/>
-                <a:cs typeface="Calibri" pitchFamily="34" charset="-120"/>
-              </a:rPr>
-              <a:t>INDUSTRY MEMBER</a:t>
-            </a:r>
-            <a:endParaRPr lang="en-US" sz="800" dirty="0"/>
-          </a:p>
-        </p:txBody>
-      </p:sp>
-      <p:sp>
-        <p:nvSpPr>
-          <p:cNvPr id="25" name="Shape 22"/>
-          <p:cNvSpPr/>
-          <p:nvPr/>
-        </p:nvSpPr>
-        <p:spPr>
-          <a:xfrm>
-            <a:off x="457200" y="3401568"/>
-            <a:ext cx="6035040" cy="16459"/>
-          </a:xfrm>
-          <a:prstGeom prst="rect">
-            <a:avLst/>
-          </a:prstGeom>
-          <a:solidFill>
-            <a:srgbClr val="D1D5DB"/>
-          </a:solidFill>
-          <a:ln w="12700">
-            <a:solidFill>
-              <a:srgbClr val="D1D5DB"/>
-            </a:solidFill>
-            <a:prstDash val="solid"/>
-          </a:ln>
-        </p:spPr>
-      </p:sp>
-      <p:sp>
-        <p:nvSpPr>
-          <p:cNvPr id="26" name="Text 23"/>
-          <p:cNvSpPr/>
-          <p:nvPr/>
-        </p:nvSpPr>
-        <p:spPr>
-          <a:xfrm>
-            <a:off x="457200" y="3474720"/>
-            <a:ext cx="6035040" cy="512064"/>
-          </a:xfrm>
-          <a:prstGeom prst="rect">
-            <a:avLst/>
-          </a:prstGeom>
-          <a:noFill/>
-          <a:ln/>
-        </p:spPr>
-        <p:txBody>
-          <a:bodyPr wrap="square" rtlCol="0" anchor="ctr"/>
-          <a:lstStyle/>
-          <a:p>
-            <a:pPr indent="0" marL="0">
-              <a:buNone/>
-            </a:pPr>
-            <a:r>
-              <a:rPr lang="en-US" sz="1050" i="1" dirty="0">
-                <a:solidFill>
-                  <a:srgbClr val="6B7280"/>
-                </a:solidFill>
-                <a:latin typeface="Calibri" pitchFamily="34" charset="0"/>
-                <a:ea typeface="Calibri" pitchFamily="34" charset="-122"/>
-                <a:cs typeface="Calibri" pitchFamily="34" charset="-120"/>
-              </a:rPr>
-              <a:t>"The background checks and professionalism of their crew gave us confidence from day one. In a government facility, security and accountability aren't negotiable. Mad Dog gets that."</a:t>
-            </a:r>
-            <a:endParaRPr lang="en-US" sz="1050" dirty="0"/>
-          </a:p>
-        </p:txBody>
-      </p:sp>
-      <p:sp>
-        <p:nvSpPr>
-          <p:cNvPr id="27" name="Text 24"/>
-          <p:cNvSpPr/>
-          <p:nvPr/>
-        </p:nvSpPr>
-        <p:spPr>
-          <a:xfrm>
-            <a:off x="457200" y="4005072"/>
-            <a:ext cx="6035040" cy="182880"/>
-          </a:xfrm>
-          <a:prstGeom prst="rect">
-            <a:avLst/>
-          </a:prstGeom>
-          <a:noFill/>
-          <a:ln/>
-        </p:spPr>
-        <p:txBody>
-          <a:bodyPr wrap="square" rtlCol="0" anchor="ctr"/>
-          <a:lstStyle/>
-          <a:p>
-            <a:pPr indent="0" marL="0">
-              <a:buNone/>
-            </a:pPr>
-            <a:r>
-              <a:rPr lang="en-US" sz="850" dirty="0">
-                <a:solidFill>
-                  <a:srgbClr val="9CA3AF"/>
-                </a:solidFill>
-                <a:latin typeface="Calibri" pitchFamily="34" charset="0"/>
-                <a:ea typeface="Calibri" pitchFamily="34" charset="-122"/>
-                <a:cs typeface="Calibri" pitchFamily="34" charset="-120"/>
-              </a:rPr>
-              <a:t>— Municipal Building Supervisor</a:t>
-            </a:r>
-            <a:endParaRPr lang="en-US" sz="850" dirty="0"/>
+              <a:t>Industry Member</a:t>
+            </a:r>
+            <a:endParaRPr lang="en-US" sz="700" dirty="0"/>
           </a:p>
         </p:txBody>
       </p:sp>
@@ -9923,7 +10984,7 @@
         <p:spPr>
           <a:xfrm>
             <a:off x="457200" y="91440"/>
-            <a:ext cx="7315200" cy="164592"/>
+            <a:ext cx="6858000" cy="164592"/>
           </a:xfrm>
           <a:prstGeom prst="rect">
             <a:avLst/>
@@ -9961,8 +11022,8 @@
         </p:nvSpPr>
         <p:spPr>
           <a:xfrm>
-            <a:off x="8686800" y="73152"/>
-            <a:ext cx="365760" cy="164592"/>
+            <a:off x="8595360" y="73152"/>
+            <a:ext cx="457200" cy="164592"/>
           </a:xfrm>
           <a:prstGeom prst="rect">
             <a:avLst/>
@@ -10008,8 +11069,8 @@
         </p:blipFill>
         <p:spPr>
           <a:xfrm>
-            <a:off x="7973568" y="4663440"/>
-            <a:ext cx="1051560" cy="402336"/>
+            <a:off x="7936992" y="4626864"/>
+            <a:ext cx="1078992" cy="411480"/>
           </a:xfrm>
           <a:prstGeom prst="rect">
             <a:avLst/>
@@ -10024,8 +11085,8 @@
         </p:nvSpPr>
         <p:spPr>
           <a:xfrm>
-            <a:off x="457200" y="256032"/>
-            <a:ext cx="3931920" cy="182880"/>
+            <a:off x="457200" y="237744"/>
+            <a:ext cx="4498848" cy="182880"/>
           </a:xfrm>
           <a:prstGeom prst="rect">
             <a:avLst/>
@@ -10063,8 +11124,8 @@
         </p:nvSpPr>
         <p:spPr>
           <a:xfrm>
-            <a:off x="457200" y="438912"/>
-            <a:ext cx="3931920" cy="877824"/>
+            <a:off x="457200" y="420624"/>
+            <a:ext cx="4498848" cy="914400"/>
           </a:xfrm>
           <a:prstGeom prst="rect">
             <a:avLst/>
@@ -10080,7 +11141,7 @@
               <a:buNone/>
             </a:pPr>
             <a:r>
-              <a:rPr lang="en-US" sz="5600" b="1" dirty="0">
+              <a:rPr lang="en-US" sz="5800" b="1" dirty="0">
                 <a:solidFill>
                   <a:srgbClr val="0D1F3C"/>
                 </a:solidFill>
@@ -10090,7 +11151,7 @@
               </a:rPr>
               <a:t>$1,000</a:t>
             </a:r>
-            <a:endParaRPr lang="en-US" sz="5600" dirty="0"/>
+            <a:endParaRPr lang="en-US" sz="5800" dirty="0"/>
           </a:p>
         </p:txBody>
       </p:sp>
@@ -10102,8 +11163,8 @@
         </p:nvSpPr>
         <p:spPr>
           <a:xfrm>
-            <a:off x="457200" y="1316736"/>
-            <a:ext cx="3931920" cy="201168"/>
+            <a:off x="457200" y="1335024"/>
+            <a:ext cx="4498848" cy="219456"/>
           </a:xfrm>
           <a:prstGeom prst="rect">
             <a:avLst/>
@@ -10141,8 +11202,8 @@
         </p:nvSpPr>
         <p:spPr>
           <a:xfrm>
-            <a:off x="457200" y="1572768"/>
-            <a:ext cx="3931920" cy="16459"/>
+            <a:off x="457200" y="1609344"/>
+            <a:ext cx="4498848" cy="16459"/>
           </a:xfrm>
           <a:prstGeom prst="rect">
             <a:avLst/>
@@ -10166,8 +11227,8 @@
         </p:nvSpPr>
         <p:spPr>
           <a:xfrm>
-            <a:off x="438912" y="1664208"/>
-            <a:ext cx="3950208" cy="292608"/>
+            <a:off x="438912" y="1682496"/>
+            <a:ext cx="4535424" cy="347472"/>
           </a:xfrm>
           <a:prstGeom prst="rect">
             <a:avLst/>
@@ -10191,8 +11252,8 @@
         </p:nvSpPr>
         <p:spPr>
           <a:xfrm>
-            <a:off x="530352" y="1719072"/>
-            <a:ext cx="2651760" cy="201168"/>
+            <a:off x="548640" y="1755648"/>
+            <a:ext cx="3218688" cy="219456"/>
           </a:xfrm>
           <a:prstGeom prst="rect">
             <a:avLst/>
@@ -10230,8 +11291,8 @@
         </p:nvSpPr>
         <p:spPr>
           <a:xfrm>
-            <a:off x="3200400" y="1719072"/>
-            <a:ext cx="1097280" cy="201168"/>
+            <a:off x="3721608" y="1755648"/>
+            <a:ext cx="1143000" cy="219456"/>
           </a:xfrm>
           <a:prstGeom prst="rect">
             <a:avLst/>
@@ -10269,8 +11330,8 @@
         </p:nvSpPr>
         <p:spPr>
           <a:xfrm>
-            <a:off x="438912" y="1993392"/>
-            <a:ext cx="3950208" cy="292608"/>
+            <a:off x="438912" y="2029968"/>
+            <a:ext cx="4535424" cy="347472"/>
           </a:xfrm>
           <a:prstGeom prst="rect">
             <a:avLst/>
@@ -10294,8 +11355,8 @@
         </p:nvSpPr>
         <p:spPr>
           <a:xfrm>
-            <a:off x="530352" y="2048256"/>
-            <a:ext cx="2651760" cy="201168"/>
+            <a:off x="548640" y="2103120"/>
+            <a:ext cx="3218688" cy="219456"/>
           </a:xfrm>
           <a:prstGeom prst="rect">
             <a:avLst/>
@@ -10333,8 +11394,8 @@
         </p:nvSpPr>
         <p:spPr>
           <a:xfrm>
-            <a:off x="3200400" y="2048256"/>
-            <a:ext cx="1097280" cy="201168"/>
+            <a:off x="3721608" y="2103120"/>
+            <a:ext cx="1143000" cy="219456"/>
           </a:xfrm>
           <a:prstGeom prst="rect">
             <a:avLst/>
@@ -10372,8 +11433,8 @@
         </p:nvSpPr>
         <p:spPr>
           <a:xfrm>
-            <a:off x="438912" y="2322576"/>
-            <a:ext cx="3950208" cy="292608"/>
+            <a:off x="438912" y="2377440"/>
+            <a:ext cx="4535424" cy="347472"/>
           </a:xfrm>
           <a:prstGeom prst="rect">
             <a:avLst/>
@@ -10397,8 +11458,8 @@
         </p:nvSpPr>
         <p:spPr>
           <a:xfrm>
-            <a:off x="530352" y="2377440"/>
-            <a:ext cx="2651760" cy="201168"/>
+            <a:off x="548640" y="2450592"/>
+            <a:ext cx="3218688" cy="219456"/>
           </a:xfrm>
           <a:prstGeom prst="rect">
             <a:avLst/>
@@ -10436,8 +11497,8 @@
         </p:nvSpPr>
         <p:spPr>
           <a:xfrm>
-            <a:off x="3200400" y="2377440"/>
-            <a:ext cx="1097280" cy="201168"/>
+            <a:off x="3721608" y="2450592"/>
+            <a:ext cx="1143000" cy="219456"/>
           </a:xfrm>
           <a:prstGeom prst="rect">
             <a:avLst/>
@@ -10475,8 +11536,8 @@
         </p:nvSpPr>
         <p:spPr>
           <a:xfrm>
-            <a:off x="438912" y="2651760"/>
-            <a:ext cx="3950208" cy="292608"/>
+            <a:off x="438912" y="2724912"/>
+            <a:ext cx="4535424" cy="347472"/>
           </a:xfrm>
           <a:prstGeom prst="rect">
             <a:avLst/>
@@ -10500,8 +11561,8 @@
         </p:nvSpPr>
         <p:spPr>
           <a:xfrm>
-            <a:off x="530352" y="2706624"/>
-            <a:ext cx="2651760" cy="201168"/>
+            <a:off x="548640" y="2798064"/>
+            <a:ext cx="3218688" cy="219456"/>
           </a:xfrm>
           <a:prstGeom prst="rect">
             <a:avLst/>
@@ -10539,8 +11600,8 @@
         </p:nvSpPr>
         <p:spPr>
           <a:xfrm>
-            <a:off x="3200400" y="2706624"/>
-            <a:ext cx="1097280" cy="201168"/>
+            <a:off x="3721608" y="2798064"/>
+            <a:ext cx="1143000" cy="219456"/>
           </a:xfrm>
           <a:prstGeom prst="rect">
             <a:avLst/>
@@ -10578,8 +11639,8 @@
         </p:nvSpPr>
         <p:spPr>
           <a:xfrm>
-            <a:off x="438912" y="2980944"/>
-            <a:ext cx="3950208" cy="292608"/>
+            <a:off x="438912" y="3072384"/>
+            <a:ext cx="4535424" cy="347472"/>
           </a:xfrm>
           <a:prstGeom prst="rect">
             <a:avLst/>
@@ -10603,8 +11664,8 @@
         </p:nvSpPr>
         <p:spPr>
           <a:xfrm>
-            <a:off x="530352" y="3035808"/>
-            <a:ext cx="2651760" cy="201168"/>
+            <a:off x="548640" y="3145536"/>
+            <a:ext cx="3218688" cy="219456"/>
           </a:xfrm>
           <a:prstGeom prst="rect">
             <a:avLst/>
@@ -10642,8 +11703,8 @@
         </p:nvSpPr>
         <p:spPr>
           <a:xfrm>
-            <a:off x="3200400" y="3035808"/>
-            <a:ext cx="1097280" cy="201168"/>
+            <a:off x="3721608" y="3145536"/>
+            <a:ext cx="1143000" cy="219456"/>
           </a:xfrm>
           <a:prstGeom prst="rect">
             <a:avLst/>
@@ -10681,8 +11742,8 @@
         </p:nvSpPr>
         <p:spPr>
           <a:xfrm>
-            <a:off x="438912" y="3310128"/>
-            <a:ext cx="3950208" cy="292608"/>
+            <a:off x="438912" y="3419856"/>
+            <a:ext cx="4535424" cy="347472"/>
           </a:xfrm>
           <a:prstGeom prst="rect">
             <a:avLst/>
@@ -10706,8 +11767,8 @@
         </p:nvSpPr>
         <p:spPr>
           <a:xfrm>
-            <a:off x="530352" y="3364992"/>
-            <a:ext cx="2651760" cy="201168"/>
+            <a:off x="548640" y="3493008"/>
+            <a:ext cx="3218688" cy="219456"/>
           </a:xfrm>
           <a:prstGeom prst="rect">
             <a:avLst/>
@@ -10745,8 +11806,8 @@
         </p:nvSpPr>
         <p:spPr>
           <a:xfrm>
-            <a:off x="3200400" y="3364992"/>
-            <a:ext cx="1097280" cy="201168"/>
+            <a:off x="3721608" y="3493008"/>
+            <a:ext cx="1143000" cy="219456"/>
           </a:xfrm>
           <a:prstGeom prst="rect">
             <a:avLst/>
@@ -10784,8 +11845,8 @@
         </p:nvSpPr>
         <p:spPr>
           <a:xfrm>
-            <a:off x="438912" y="3712464"/>
-            <a:ext cx="3950208" cy="384048"/>
+            <a:off x="438912" y="3822192"/>
+            <a:ext cx="4535424" cy="402336"/>
           </a:xfrm>
           <a:prstGeom prst="rect">
             <a:avLst/>
@@ -10809,8 +11870,8 @@
         </p:nvSpPr>
         <p:spPr>
           <a:xfrm>
-            <a:off x="548640" y="3803904"/>
-            <a:ext cx="2194560" cy="219456"/>
+            <a:off x="548640" y="3913632"/>
+            <a:ext cx="2852928" cy="237744"/>
           </a:xfrm>
           <a:prstGeom prst="rect">
             <a:avLst/>
@@ -10826,7 +11887,7 @@
               <a:buNone/>
             </a:pPr>
             <a:r>
-              <a:rPr lang="en-US" sz="1100" b="1" dirty="0">
+              <a:rPr lang="en-US" sz="1200" b="1" dirty="0">
                 <a:solidFill>
                   <a:srgbClr val="FFFFFF"/>
                 </a:solidFill>
@@ -10836,7 +11897,7 @@
               </a:rPr>
               <a:t>Monthly Total</a:t>
             </a:r>
-            <a:endParaRPr lang="en-US" sz="1100" dirty="0"/>
+            <a:endParaRPr lang="en-US" sz="1200" dirty="0"/>
           </a:p>
         </p:txBody>
       </p:sp>
@@ -10848,8 +11909,8 @@
         </p:nvSpPr>
         <p:spPr>
           <a:xfrm>
-            <a:off x="2560320" y="3803904"/>
-            <a:ext cx="1737360" cy="219456"/>
+            <a:off x="3493008" y="3913632"/>
+            <a:ext cx="1371600" cy="237744"/>
           </a:xfrm>
           <a:prstGeom prst="rect">
             <a:avLst/>
@@ -10865,7 +11926,7 @@
               <a:buNone/>
             </a:pPr>
             <a:r>
-              <a:rPr lang="en-US" sz="1100" b="1" dirty="0">
+              <a:rPr lang="en-US" sz="1200" b="1" dirty="0">
                 <a:solidFill>
                   <a:srgbClr val="C9A84C"/>
                 </a:solidFill>
@@ -10875,7 +11936,7 @@
               </a:rPr>
               <a:t>$1,000</a:t>
             </a:r>
-            <a:endParaRPr lang="en-US" sz="1100" dirty="0"/>
+            <a:endParaRPr lang="en-US" sz="1200" dirty="0"/>
           </a:p>
         </p:txBody>
       </p:sp>
@@ -10887,8 +11948,8 @@
         </p:nvSpPr>
         <p:spPr>
           <a:xfrm>
-            <a:off x="4590288" y="219456"/>
-            <a:ext cx="16459" cy="4709160"/>
+            <a:off x="4645152" y="201168"/>
+            <a:ext cx="16459" cy="4572000"/>
           </a:xfrm>
           <a:prstGeom prst="rect">
             <a:avLst/>
@@ -10912,8 +11973,8 @@
         </p:nvSpPr>
         <p:spPr>
           <a:xfrm>
-            <a:off x="4773168" y="256032"/>
-            <a:ext cx="4114800" cy="182880"/>
+            <a:off x="4754880" y="237744"/>
+            <a:ext cx="4023360" cy="182880"/>
           </a:xfrm>
           <a:prstGeom prst="rect">
             <a:avLst/>
@@ -10951,8 +12012,8 @@
         </p:nvSpPr>
         <p:spPr>
           <a:xfrm>
-            <a:off x="4773168" y="457200"/>
-            <a:ext cx="4114800" cy="475488"/>
+            <a:off x="4754880" y="438912"/>
+            <a:ext cx="4023360" cy="512064"/>
           </a:xfrm>
           <a:prstGeom prst="rect">
             <a:avLst/>
@@ -10990,8 +12051,8 @@
         </p:nvSpPr>
         <p:spPr>
           <a:xfrm>
-            <a:off x="4773168" y="1042416"/>
-            <a:ext cx="292608" cy="292608"/>
+            <a:off x="4754880" y="1042416"/>
+            <a:ext cx="310896" cy="310896"/>
           </a:xfrm>
           <a:prstGeom prst="rect">
             <a:avLst/>
@@ -11007,7 +12068,7 @@
               <a:buNone/>
             </a:pPr>
             <a:r>
-              <a:rPr lang="en-US" sz="1500" b="1" dirty="0">
+              <a:rPr lang="en-US" sz="1600" b="1" dirty="0">
                 <a:solidFill>
                   <a:srgbClr val="C9A84C"/>
                 </a:solidFill>
@@ -11017,7 +12078,7 @@
               </a:rPr>
               <a:t>1</a:t>
             </a:r>
-            <a:endParaRPr lang="en-US" sz="1500" dirty="0"/>
+            <a:endParaRPr lang="en-US" sz="1600" dirty="0"/>
           </a:p>
         </p:txBody>
       </p:sp>
@@ -11029,8 +12090,8 @@
         </p:nvSpPr>
         <p:spPr>
           <a:xfrm>
-            <a:off x="4773168" y="1371600"/>
-            <a:ext cx="292608" cy="16459"/>
+            <a:off x="4754880" y="1389888"/>
+            <a:ext cx="310896" cy="16459"/>
           </a:xfrm>
           <a:prstGeom prst="rect">
             <a:avLst/>
@@ -11054,8 +12115,8 @@
         </p:nvSpPr>
         <p:spPr>
           <a:xfrm>
-            <a:off x="5157216" y="1088136"/>
-            <a:ext cx="3657600" cy="329184"/>
+            <a:off x="5157216" y="1078992"/>
+            <a:ext cx="3621024" cy="384048"/>
           </a:xfrm>
           <a:prstGeom prst="rect">
             <a:avLst/>
@@ -11071,7 +12132,7 @@
               <a:buNone/>
             </a:pPr>
             <a:r>
-              <a:rPr lang="en-US" sz="1050" dirty="0">
+              <a:rPr lang="en-US" sz="1100" dirty="0">
                 <a:solidFill>
                   <a:srgbClr val="6B7280"/>
                 </a:solidFill>
@@ -11081,7 +12142,7 @@
               </a:rPr>
               <a:t>Agreement signed &amp; start date confirmed</a:t>
             </a:r>
-            <a:endParaRPr lang="en-US" sz="1050" dirty="0"/>
+            <a:endParaRPr lang="en-US" sz="1100" dirty="0"/>
           </a:p>
         </p:txBody>
       </p:sp>
@@ -11093,8 +12154,8 @@
         </p:nvSpPr>
         <p:spPr>
           <a:xfrm>
-            <a:off x="4773168" y="1554480"/>
-            <a:ext cx="292608" cy="292608"/>
+            <a:off x="4754880" y="1572768"/>
+            <a:ext cx="310896" cy="310896"/>
           </a:xfrm>
           <a:prstGeom prst="rect">
             <a:avLst/>
@@ -11110,7 +12171,7 @@
               <a:buNone/>
             </a:pPr>
             <a:r>
-              <a:rPr lang="en-US" sz="1500" b="1" dirty="0">
+              <a:rPr lang="en-US" sz="1600" b="1" dirty="0">
                 <a:solidFill>
                   <a:srgbClr val="C9A84C"/>
                 </a:solidFill>
@@ -11120,7 +12181,7 @@
               </a:rPr>
               <a:t>2</a:t>
             </a:r>
-            <a:endParaRPr lang="en-US" sz="1500" dirty="0"/>
+            <a:endParaRPr lang="en-US" sz="1600" dirty="0"/>
           </a:p>
         </p:txBody>
       </p:sp>
@@ -11132,8 +12193,8 @@
         </p:nvSpPr>
         <p:spPr>
           <a:xfrm>
-            <a:off x="4773168" y="1883664"/>
-            <a:ext cx="292608" cy="16459"/>
+            <a:off x="4754880" y="1920240"/>
+            <a:ext cx="310896" cy="16459"/>
           </a:xfrm>
           <a:prstGeom prst="rect">
             <a:avLst/>
@@ -11157,8 +12218,8 @@
         </p:nvSpPr>
         <p:spPr>
           <a:xfrm>
-            <a:off x="5157216" y="1600200"/>
-            <a:ext cx="3657600" cy="329184"/>
+            <a:off x="5157216" y="1609344"/>
+            <a:ext cx="3621024" cy="384048"/>
           </a:xfrm>
           <a:prstGeom prst="rect">
             <a:avLst/>
@@ -11174,7 +12235,7 @@
               <a:buNone/>
             </a:pPr>
             <a:r>
-              <a:rPr lang="en-US" sz="1050" dirty="0">
+              <a:rPr lang="en-US" sz="1100" dirty="0">
                 <a:solidFill>
                   <a:srgbClr val="6B7280"/>
                 </a:solidFill>
@@ -11182,9 +12243,9 @@
                 <a:ea typeface="Calibri" pitchFamily="34" charset="-122"/>
                 <a:cs typeface="Calibri" pitchFamily="34" charset="-120"/>
               </a:rPr>
-              <a:t>CEO + QA Manager schedule site walkthrough</a:t>
-            </a:r>
-            <a:endParaRPr lang="en-US" sz="1050" dirty="0"/>
+              <a:t>CEO + QA Manager schedule facility site walk</a:t>
+            </a:r>
+            <a:endParaRPr lang="en-US" sz="1100" dirty="0"/>
           </a:p>
         </p:txBody>
       </p:sp>
@@ -11196,8 +12257,8 @@
         </p:nvSpPr>
         <p:spPr>
           <a:xfrm>
-            <a:off x="4773168" y="2066544"/>
-            <a:ext cx="292608" cy="292608"/>
+            <a:off x="4754880" y="2103120"/>
+            <a:ext cx="310896" cy="310896"/>
           </a:xfrm>
           <a:prstGeom prst="rect">
             <a:avLst/>
@@ -11213,7 +12274,7 @@
               <a:buNone/>
             </a:pPr>
             <a:r>
-              <a:rPr lang="en-US" sz="1500" b="1" dirty="0">
+              <a:rPr lang="en-US" sz="1600" b="1" dirty="0">
                 <a:solidFill>
                   <a:srgbClr val="C9A84C"/>
                 </a:solidFill>
@@ -11223,7 +12284,7 @@
               </a:rPr>
               <a:t>3</a:t>
             </a:r>
-            <a:endParaRPr lang="en-US" sz="1500" dirty="0"/>
+            <a:endParaRPr lang="en-US" sz="1600" dirty="0"/>
           </a:p>
         </p:txBody>
       </p:sp>
@@ -11235,8 +12296,8 @@
         </p:nvSpPr>
         <p:spPr>
           <a:xfrm>
-            <a:off x="4773168" y="2395728"/>
-            <a:ext cx="292608" cy="16459"/>
+            <a:off x="4754880" y="2450592"/>
+            <a:ext cx="310896" cy="16459"/>
           </a:xfrm>
           <a:prstGeom prst="rect">
             <a:avLst/>
@@ -11260,8 +12321,8 @@
         </p:nvSpPr>
         <p:spPr>
           <a:xfrm>
-            <a:off x="5157216" y="2112264"/>
-            <a:ext cx="3657600" cy="329184"/>
+            <a:off x="5157216" y="2139696"/>
+            <a:ext cx="3621024" cy="384048"/>
           </a:xfrm>
           <a:prstGeom prst="rect">
             <a:avLst/>
@@ -11277,7 +12338,7 @@
               <a:buNone/>
             </a:pPr>
             <a:r>
-              <a:rPr lang="en-US" sz="1050" dirty="0">
+              <a:rPr lang="en-US" sz="1100" dirty="0">
                 <a:solidFill>
                   <a:srgbClr val="6B7280"/>
                 </a:solidFill>
@@ -11287,7 +12348,7 @@
               </a:rPr>
               <a:t>Team assigned, keys exchanged, supplies staged</a:t>
             </a:r>
-            <a:endParaRPr lang="en-US" sz="1050" dirty="0"/>
+            <a:endParaRPr lang="en-US" sz="1100" dirty="0"/>
           </a:p>
         </p:txBody>
       </p:sp>
@@ -11299,8 +12360,8 @@
         </p:nvSpPr>
         <p:spPr>
           <a:xfrm>
-            <a:off x="4773168" y="2578608"/>
-            <a:ext cx="292608" cy="292608"/>
+            <a:off x="4754880" y="2633472"/>
+            <a:ext cx="310896" cy="310896"/>
           </a:xfrm>
           <a:prstGeom prst="rect">
             <a:avLst/>
@@ -11316,7 +12377,7 @@
               <a:buNone/>
             </a:pPr>
             <a:r>
-              <a:rPr lang="en-US" sz="1500" b="1" dirty="0">
+              <a:rPr lang="en-US" sz="1600" b="1" dirty="0">
                 <a:solidFill>
                   <a:srgbClr val="C9A84C"/>
                 </a:solidFill>
@@ -11326,7 +12387,7 @@
               </a:rPr>
               <a:t>4</a:t>
             </a:r>
-            <a:endParaRPr lang="en-US" sz="1500" dirty="0"/>
+            <a:endParaRPr lang="en-US" sz="1600" dirty="0"/>
           </a:p>
         </p:txBody>
       </p:sp>
@@ -11338,8 +12399,8 @@
         </p:nvSpPr>
         <p:spPr>
           <a:xfrm>
-            <a:off x="4773168" y="2907792"/>
-            <a:ext cx="292608" cy="16459"/>
+            <a:off x="4754880" y="2980944"/>
+            <a:ext cx="310896" cy="16459"/>
           </a:xfrm>
           <a:prstGeom prst="rect">
             <a:avLst/>
@@ -11363,8 +12424,8 @@
         </p:nvSpPr>
         <p:spPr>
           <a:xfrm>
-            <a:off x="5157216" y="2624328"/>
-            <a:ext cx="3657600" cy="329184"/>
+            <a:off x="5157216" y="2670048"/>
+            <a:ext cx="3621024" cy="384048"/>
           </a:xfrm>
           <a:prstGeom prst="rect">
             <a:avLst/>
@@ -11380,7 +12441,7 @@
               <a:buNone/>
             </a:pPr>
             <a:r>
-              <a:rPr lang="en-US" sz="1050" dirty="0">
+              <a:rPr lang="en-US" sz="1100" dirty="0">
                 <a:solidFill>
                   <a:srgbClr val="6B7280"/>
                 </a:solidFill>
@@ -11388,9 +12449,9 @@
                 <a:ea typeface="Calibri" pitchFamily="34" charset="-122"/>
                 <a:cs typeface="Calibri" pitchFamily="34" charset="-120"/>
               </a:rPr>
-              <a:t>QA inspection account created — you get dashboard access</a:t>
-            </a:r>
-            <a:endParaRPr lang="en-US" sz="1050" dirty="0"/>
+              <a:t>Inspection dashboard created — you get login access</a:t>
+            </a:r>
+            <a:endParaRPr lang="en-US" sz="1100" dirty="0"/>
           </a:p>
         </p:txBody>
       </p:sp>
@@ -11402,8 +12463,8 @@
         </p:nvSpPr>
         <p:spPr>
           <a:xfrm>
-            <a:off x="4773168" y="3090672"/>
-            <a:ext cx="292608" cy="292608"/>
+            <a:off x="4754880" y="3163824"/>
+            <a:ext cx="310896" cy="310896"/>
           </a:xfrm>
           <a:prstGeom prst="rect">
             <a:avLst/>
@@ -11419,7 +12480,7 @@
               <a:buNone/>
             </a:pPr>
             <a:r>
-              <a:rPr lang="en-US" sz="1500" b="1" dirty="0">
+              <a:rPr lang="en-US" sz="1600" b="1" dirty="0">
                 <a:solidFill>
                   <a:srgbClr val="C9A84C"/>
                 </a:solidFill>
@@ -11429,7 +12490,7 @@
               </a:rPr>
               <a:t>5</a:t>
             </a:r>
-            <a:endParaRPr lang="en-US" sz="1500" dirty="0"/>
+            <a:endParaRPr lang="en-US" sz="1600" dirty="0"/>
           </a:p>
         </p:txBody>
       </p:sp>
@@ -11441,8 +12502,8 @@
         </p:nvSpPr>
         <p:spPr>
           <a:xfrm>
-            <a:off x="4773168" y="3419856"/>
-            <a:ext cx="292608" cy="16459"/>
+            <a:off x="4754880" y="3511296"/>
+            <a:ext cx="310896" cy="16459"/>
           </a:xfrm>
           <a:prstGeom prst="rect">
             <a:avLst/>
@@ -11466,8 +12527,8 @@
         </p:nvSpPr>
         <p:spPr>
           <a:xfrm>
-            <a:off x="5157216" y="3136392"/>
-            <a:ext cx="3657600" cy="329184"/>
+            <a:off x="5157216" y="3200400"/>
+            <a:ext cx="3621024" cy="384048"/>
           </a:xfrm>
           <a:prstGeom prst="rect">
             <a:avLst/>
@@ -11483,7 +12544,7 @@
               <a:buNone/>
             </a:pPr>
             <a:r>
-              <a:rPr lang="en-US" sz="1050" dirty="0">
+              <a:rPr lang="en-US" sz="1100" dirty="0">
                 <a:solidFill>
                   <a:srgbClr val="6B7280"/>
                 </a:solidFill>
@@ -11493,7 +12554,7 @@
               </a:rPr>
               <a:t>First service delivered on your start date, July 1</a:t>
             </a:r>
-            <a:endParaRPr lang="en-US" sz="1050" dirty="0"/>
+            <a:endParaRPr lang="en-US" sz="1100" dirty="0"/>
           </a:p>
         </p:txBody>
       </p:sp>
@@ -11505,8 +12566,8 @@
         </p:nvSpPr>
         <p:spPr>
           <a:xfrm>
-            <a:off x="4773168" y="3657600"/>
-            <a:ext cx="4114800" cy="16459"/>
+            <a:off x="4754880" y="3730752"/>
+            <a:ext cx="4023360" cy="16459"/>
           </a:xfrm>
           <a:prstGeom prst="rect">
             <a:avLst/>
@@ -11530,8 +12591,8 @@
         </p:nvSpPr>
         <p:spPr>
           <a:xfrm>
-            <a:off x="4773168" y="3749040"/>
-            <a:ext cx="4114800" cy="274320"/>
+            <a:off x="4754880" y="3822192"/>
+            <a:ext cx="4023360" cy="274320"/>
           </a:xfrm>
           <a:prstGeom prst="rect">
             <a:avLst/>
@@ -11569,8 +12630,8 @@
         </p:nvSpPr>
         <p:spPr>
           <a:xfrm>
-            <a:off x="4773168" y="4023360"/>
-            <a:ext cx="4114800" cy="219456"/>
+            <a:off x="4754880" y="4114800"/>
+            <a:ext cx="4023360" cy="219456"/>
           </a:xfrm>
           <a:prstGeom prst="rect">
             <a:avLst/>
@@ -11586,7 +12647,7 @@
               <a:buNone/>
             </a:pPr>
             <a:r>
-              <a:rPr lang="en-US" sz="1000" dirty="0">
+              <a:rPr lang="en-US" sz="1050" dirty="0">
                 <a:solidFill>
                   <a:srgbClr val="6B7280"/>
                 </a:solidFill>
@@ -11596,7 +12657,7 @@
               </a:rPr>
               <a:t>623-321-2542  ·  office@maddogcleaning.com</a:t>
             </a:r>
-            <a:endParaRPr lang="en-US" sz="1000" dirty="0"/>
+            <a:endParaRPr lang="en-US" sz="1050" dirty="0"/>
           </a:p>
         </p:txBody>
       </p:sp>

--- a/MDF_Proposal_LogicalSystems_2026-05-28.pptx
+++ b/MDF_Proposal_LogicalSystems_2026-05-28.pptx
@@ -9934,7 +9934,7 @@
         <p:spPr>
           <a:xfrm>
             <a:off x="411480" y="1828800"/>
-            <a:ext cx="4572000" cy="347472"/>
+            <a:ext cx="4572000" cy="384048"/>
           </a:xfrm>
           <a:prstGeom prst="rect">
             <a:avLst/>
@@ -9977,13 +9977,13 @@
             <a:r>
               <a:rPr lang="en-US" sz="1000" dirty="0">
                 <a:solidFill>
-                  <a:srgbClr val="374151"/>
-                </a:solidFill>
-                <a:latin typeface="Calibri" pitchFamily="34" charset="0"/>
-                <a:ea typeface="Calibri" pitchFamily="34" charset="-122"/>
-                <a:cs typeface="Calibri" pitchFamily="34" charset="-120"/>
-              </a:rPr>
-              <a:t>Labor — W-2 Employees</a:t>
+                  <a:srgbClr val="2E7D52"/>
+                </a:solidFill>
+                <a:latin typeface="Calibri" pitchFamily="34" charset="0"/>
+                <a:ea typeface="Calibri" pitchFamily="34" charset="-122"/>
+                <a:cs typeface="Calibri" pitchFamily="34" charset="-120"/>
+              </a:rPr>
+              <a:t>OrangeQC Inspection Reporting</a:t>
             </a:r>
             <a:endParaRPr lang="en-US" sz="1000" dirty="0"/>
           </a:p>
@@ -10014,15 +10014,15 @@
               <a:buNone/>
             </a:pPr>
             <a:r>
-              <a:rPr lang="en-US" sz="1000" b="1" dirty="0">
-                <a:solidFill>
-                  <a:srgbClr val="0D1F3C"/>
-                </a:solidFill>
-                <a:latin typeface="Calibri" pitchFamily="34" charset="0"/>
-                <a:ea typeface="Calibri" pitchFamily="34" charset="-122"/>
-                <a:cs typeface="Calibri" pitchFamily="34" charset="-120"/>
-              </a:rPr>
-              <a:t>$630</a:t>
+              <a:rPr lang="en-US" sz="1000" dirty="0">
+                <a:solidFill>
+                  <a:srgbClr val="2E7D52"/>
+                </a:solidFill>
+                <a:latin typeface="Calibri" pitchFamily="34" charset="0"/>
+                <a:ea typeface="Calibri" pitchFamily="34" charset="-122"/>
+                <a:cs typeface="Calibri" pitchFamily="34" charset="-120"/>
+              </a:rPr>
+              <a:t>Included</a:t>
             </a:r>
             <a:endParaRPr lang="en-US" sz="1000" dirty="0"/>
           </a:p>
@@ -10036,8 +10036,8 @@
         </p:nvSpPr>
         <p:spPr>
           <a:xfrm>
-            <a:off x="411480" y="2176272"/>
-            <a:ext cx="4572000" cy="347472"/>
+            <a:off x="411480" y="2212848"/>
+            <a:ext cx="4572000" cy="384048"/>
           </a:xfrm>
           <a:prstGeom prst="rect">
             <a:avLst/>
@@ -10061,7 +10061,7 @@
         </p:nvSpPr>
         <p:spPr>
           <a:xfrm>
-            <a:off x="548640" y="2249424"/>
+            <a:off x="548640" y="2286000"/>
             <a:ext cx="2926080" cy="219456"/>
           </a:xfrm>
           <a:prstGeom prst="rect">
@@ -10080,13 +10080,13 @@
             <a:r>
               <a:rPr lang="en-US" sz="1000" dirty="0">
                 <a:solidFill>
-                  <a:srgbClr val="374151"/>
-                </a:solidFill>
-                <a:latin typeface="Calibri" pitchFamily="34" charset="0"/>
-                <a:ea typeface="Calibri" pitchFamily="34" charset="-122"/>
-                <a:cs typeface="Calibri" pitchFamily="34" charset="-120"/>
-              </a:rPr>
-              <a:t>Supplies &amp; Consumables (4%)</a:t>
+                  <a:srgbClr val="2E7D52"/>
+                </a:solidFill>
+                <a:latin typeface="Calibri" pitchFamily="34" charset="0"/>
+                <a:ea typeface="Calibri" pitchFamily="34" charset="-122"/>
+                <a:cs typeface="Calibri" pitchFamily="34" charset="-120"/>
+              </a:rPr>
+              <a:t>Dedicated QA Manager</a:t>
             </a:r>
             <a:endParaRPr lang="en-US" sz="1000" dirty="0"/>
           </a:p>
@@ -10100,7 +10100,7 @@
         </p:nvSpPr>
         <p:spPr>
           <a:xfrm>
-            <a:off x="3566160" y="2249424"/>
+            <a:off x="3566160" y="2286000"/>
             <a:ext cx="1234440" cy="219456"/>
           </a:xfrm>
           <a:prstGeom prst="rect">
@@ -10117,15 +10117,15 @@
               <a:buNone/>
             </a:pPr>
             <a:r>
-              <a:rPr lang="en-US" sz="1000" b="1" dirty="0">
-                <a:solidFill>
-                  <a:srgbClr val="0D1F3C"/>
-                </a:solidFill>
-                <a:latin typeface="Calibri" pitchFamily="34" charset="0"/>
-                <a:ea typeface="Calibri" pitchFamily="34" charset="-122"/>
-                <a:cs typeface="Calibri" pitchFamily="34" charset="-120"/>
-              </a:rPr>
-              <a:t>$40</a:t>
+              <a:rPr lang="en-US" sz="1000" dirty="0">
+                <a:solidFill>
+                  <a:srgbClr val="2E7D52"/>
+                </a:solidFill>
+                <a:latin typeface="Calibri" pitchFamily="34" charset="0"/>
+                <a:ea typeface="Calibri" pitchFamily="34" charset="-122"/>
+                <a:cs typeface="Calibri" pitchFamily="34" charset="-120"/>
+              </a:rPr>
+              <a:t>Included</a:t>
             </a:r>
             <a:endParaRPr lang="en-US" sz="1000" dirty="0"/>
           </a:p>
@@ -10139,8 +10139,8 @@
         </p:nvSpPr>
         <p:spPr>
           <a:xfrm>
-            <a:off x="411480" y="2523744"/>
-            <a:ext cx="4572000" cy="347472"/>
+            <a:off x="411480" y="2596896"/>
+            <a:ext cx="4572000" cy="384048"/>
           </a:xfrm>
           <a:prstGeom prst="rect">
             <a:avLst/>
@@ -10164,7 +10164,7 @@
         </p:nvSpPr>
         <p:spPr>
           <a:xfrm>
-            <a:off x="548640" y="2596896"/>
+            <a:off x="548640" y="2670048"/>
             <a:ext cx="2926080" cy="219456"/>
           </a:xfrm>
           <a:prstGeom prst="rect">
@@ -10183,13 +10183,13 @@
             <a:r>
               <a:rPr lang="en-US" sz="1000" dirty="0">
                 <a:solidFill>
-                  <a:srgbClr val="374151"/>
-                </a:solidFill>
-                <a:latin typeface="Calibri" pitchFamily="34" charset="0"/>
-                <a:ea typeface="Calibri" pitchFamily="34" charset="-122"/>
-                <a:cs typeface="Calibri" pitchFamily="34" charset="-120"/>
-              </a:rPr>
-              <a:t>Equipment &amp; Maintenance (3%)</a:t>
+                  <a:srgbClr val="2E7D52"/>
+                </a:solidFill>
+                <a:latin typeface="Calibri" pitchFamily="34" charset="0"/>
+                <a:ea typeface="Calibri" pitchFamily="34" charset="-122"/>
+                <a:cs typeface="Calibri" pitchFamily="34" charset="-120"/>
+              </a:rPr>
+              <a:t>Ownership Direct Line</a:t>
             </a:r>
             <a:endParaRPr lang="en-US" sz="1000" dirty="0"/>
           </a:p>
@@ -10203,7 +10203,7 @@
         </p:nvSpPr>
         <p:spPr>
           <a:xfrm>
-            <a:off x="3566160" y="2596896"/>
+            <a:off x="3566160" y="2670048"/>
             <a:ext cx="1234440" cy="219456"/>
           </a:xfrm>
           <a:prstGeom prst="rect">
@@ -10220,15 +10220,15 @@
               <a:buNone/>
             </a:pPr>
             <a:r>
-              <a:rPr lang="en-US" sz="1000" b="1" dirty="0">
-                <a:solidFill>
-                  <a:srgbClr val="0D1F3C"/>
-                </a:solidFill>
-                <a:latin typeface="Calibri" pitchFamily="34" charset="0"/>
-                <a:ea typeface="Calibri" pitchFamily="34" charset="-122"/>
-                <a:cs typeface="Calibri" pitchFamily="34" charset="-120"/>
-              </a:rPr>
-              <a:t>$30</a:t>
+              <a:rPr lang="en-US" sz="1000" dirty="0">
+                <a:solidFill>
+                  <a:srgbClr val="2E7D52"/>
+                </a:solidFill>
+                <a:latin typeface="Calibri" pitchFamily="34" charset="0"/>
+                <a:ea typeface="Calibri" pitchFamily="34" charset="-122"/>
+                <a:cs typeface="Calibri" pitchFamily="34" charset="-120"/>
+              </a:rPr>
+              <a:t>Included</a:t>
             </a:r>
             <a:endParaRPr lang="en-US" sz="1000" dirty="0"/>
           </a:p>
@@ -10242,8 +10242,8 @@
         </p:nvSpPr>
         <p:spPr>
           <a:xfrm>
-            <a:off x="411480" y="2871216"/>
-            <a:ext cx="4572000" cy="347472"/>
+            <a:off x="411480" y="2980944"/>
+            <a:ext cx="4572000" cy="384048"/>
           </a:xfrm>
           <a:prstGeom prst="rect">
             <a:avLst/>
@@ -10267,7 +10267,7 @@
         </p:nvSpPr>
         <p:spPr>
           <a:xfrm>
-            <a:off x="548640" y="2944368"/>
+            <a:off x="548640" y="3054096"/>
             <a:ext cx="2926080" cy="219456"/>
           </a:xfrm>
           <a:prstGeom prst="rect">
@@ -10292,7 +10292,7 @@
                 <a:ea typeface="Calibri" pitchFamily="34" charset="-122"/>
                 <a:cs typeface="Calibri" pitchFamily="34" charset="-120"/>
               </a:rPr>
-              <a:t>OrangeQC Reporting</a:t>
+              <a:t>W-2 Employed Staff</a:t>
             </a:r>
             <a:endParaRPr lang="en-US" sz="1000" dirty="0"/>
           </a:p>
@@ -10306,7 +10306,7 @@
         </p:nvSpPr>
         <p:spPr>
           <a:xfrm>
-            <a:off x="3566160" y="2944368"/>
+            <a:off x="3566160" y="3054096"/>
             <a:ext cx="1234440" cy="219456"/>
           </a:xfrm>
           <a:prstGeom prst="rect">
@@ -10345,8 +10345,8 @@
         </p:nvSpPr>
         <p:spPr>
           <a:xfrm>
-            <a:off x="411480" y="3218688"/>
-            <a:ext cx="4572000" cy="347472"/>
+            <a:off x="411480" y="3364992"/>
+            <a:ext cx="4572000" cy="384048"/>
           </a:xfrm>
           <a:prstGeom prst="rect">
             <a:avLst/>
@@ -10370,7 +10370,7 @@
         </p:nvSpPr>
         <p:spPr>
           <a:xfrm>
-            <a:off x="548640" y="3291840"/>
+            <a:off x="548640" y="3438144"/>
             <a:ext cx="2926080" cy="219456"/>
           </a:xfrm>
           <a:prstGeom prst="rect">
@@ -10395,7 +10395,7 @@
                 <a:ea typeface="Calibri" pitchFamily="34" charset="-122"/>
                 <a:cs typeface="Calibri" pitchFamily="34" charset="-120"/>
               </a:rPr>
-              <a:t>Dedicated QA Manager</a:t>
+              <a:t>Supply &amp; Equipment Management</a:t>
             </a:r>
             <a:endParaRPr lang="en-US" sz="1000" dirty="0"/>
           </a:p>
@@ -10409,7 +10409,7 @@
         </p:nvSpPr>
         <p:spPr>
           <a:xfrm>
-            <a:off x="3566160" y="3291840"/>
+            <a:off x="3566160" y="3438144"/>
             <a:ext cx="1234440" cy="219456"/>
           </a:xfrm>
           <a:prstGeom prst="rect">
@@ -10448,110 +10448,7 @@
         </p:nvSpPr>
         <p:spPr>
           <a:xfrm>
-            <a:off x="411480" y="3566160"/>
-            <a:ext cx="4572000" cy="347472"/>
-          </a:xfrm>
-          <a:prstGeom prst="rect">
-            <a:avLst/>
-          </a:prstGeom>
-          <a:solidFill>
-            <a:srgbClr val="F9FAFB"/>
-          </a:solidFill>
-          <a:ln w="12700">
-            <a:solidFill>
-              <a:srgbClr val="F3F4F6"/>
-            </a:solidFill>
-            <a:prstDash val="solid"/>
-          </a:ln>
-        </p:spPr>
-      </p:sp>
-      <p:sp>
-        <p:nvSpPr>
-          <p:cNvPr id="25" name="Text 23"/>
-          <p:cNvSpPr/>
-          <p:nvPr/>
-        </p:nvSpPr>
-        <p:spPr>
-          <a:xfrm>
-            <a:off x="548640" y="3639312"/>
-            <a:ext cx="2926080" cy="219456"/>
-          </a:xfrm>
-          <a:prstGeom prst="rect">
-            <a:avLst/>
-          </a:prstGeom>
-          <a:noFill/>
-          <a:ln/>
-        </p:spPr>
-        <p:txBody>
-          <a:bodyPr wrap="square" lIns="0" tIns="0" rIns="0" bIns="0" rtlCol="0" anchor="ctr"/>
-          <a:lstStyle/>
-          <a:p>
-            <a:pPr indent="0" marL="0">
-              <a:buNone/>
-            </a:pPr>
-            <a:r>
-              <a:rPr lang="en-US" sz="1000" dirty="0">
-                <a:solidFill>
-                  <a:srgbClr val="2E7D52"/>
-                </a:solidFill>
-                <a:latin typeface="Calibri" pitchFamily="34" charset="0"/>
-                <a:ea typeface="Calibri" pitchFamily="34" charset="-122"/>
-                <a:cs typeface="Calibri" pitchFamily="34" charset="-120"/>
-              </a:rPr>
-              <a:t>Ownership Direct Line</a:t>
-            </a:r>
-            <a:endParaRPr lang="en-US" sz="1000" dirty="0"/>
-          </a:p>
-        </p:txBody>
-      </p:sp>
-      <p:sp>
-        <p:nvSpPr>
-          <p:cNvPr id="26" name="Text 24"/>
-          <p:cNvSpPr/>
-          <p:nvPr/>
-        </p:nvSpPr>
-        <p:spPr>
-          <a:xfrm>
-            <a:off x="3566160" y="3639312"/>
-            <a:ext cx="1234440" cy="219456"/>
-          </a:xfrm>
-          <a:prstGeom prst="rect">
-            <a:avLst/>
-          </a:prstGeom>
-          <a:noFill/>
-          <a:ln/>
-        </p:spPr>
-        <p:txBody>
-          <a:bodyPr wrap="square" lIns="0" tIns="0" rIns="0" bIns="0" rtlCol="0" anchor="ctr"/>
-          <a:lstStyle/>
-          <a:p>
-            <a:pPr algn="r" indent="0" marL="0">
-              <a:buNone/>
-            </a:pPr>
-            <a:r>
-              <a:rPr lang="en-US" sz="1000" dirty="0">
-                <a:solidFill>
-                  <a:srgbClr val="2E7D52"/>
-                </a:solidFill>
-                <a:latin typeface="Calibri" pitchFamily="34" charset="0"/>
-                <a:ea typeface="Calibri" pitchFamily="34" charset="-122"/>
-                <a:cs typeface="Calibri" pitchFamily="34" charset="-120"/>
-              </a:rPr>
-              <a:t>Included</a:t>
-            </a:r>
-            <a:endParaRPr lang="en-US" sz="1000" dirty="0"/>
-          </a:p>
-        </p:txBody>
-      </p:sp>
-      <p:sp>
-        <p:nvSpPr>
-          <p:cNvPr id="27" name="Shape 25"/>
-          <p:cNvSpPr/>
-          <p:nvPr/>
-        </p:nvSpPr>
-        <p:spPr>
-          <a:xfrm>
-            <a:off x="411480" y="3968496"/>
+            <a:off x="411480" y="3803904"/>
             <a:ext cx="4572000" cy="420624"/>
           </a:xfrm>
           <a:prstGeom prst="rect">
@@ -10570,13 +10467,13 @@
       </p:sp>
       <p:sp>
         <p:nvSpPr>
-          <p:cNvPr id="28" name="Text 26"/>
-          <p:cNvSpPr/>
-          <p:nvPr/>
-        </p:nvSpPr>
-        <p:spPr>
-          <a:xfrm>
-            <a:off x="566928" y="4078224"/>
+          <p:cNvPr id="25" name="Text 23"/>
+          <p:cNvSpPr/>
+          <p:nvPr/>
+        </p:nvSpPr>
+        <p:spPr>
+          <a:xfrm>
+            <a:off x="566928" y="3913632"/>
             <a:ext cx="2560320" cy="237744"/>
           </a:xfrm>
           <a:prstGeom prst="rect">
@@ -10609,13 +10506,13 @@
       </p:sp>
       <p:sp>
         <p:nvSpPr>
-          <p:cNvPr id="29" name="Text 27"/>
-          <p:cNvSpPr/>
-          <p:nvPr/>
-        </p:nvSpPr>
-        <p:spPr>
-          <a:xfrm>
-            <a:off x="3291840" y="4059936"/>
+          <p:cNvPr id="26" name="Text 24"/>
+          <p:cNvSpPr/>
+          <p:nvPr/>
+        </p:nvSpPr>
+        <p:spPr>
+          <a:xfrm>
+            <a:off x="3291840" y="3895344"/>
             <a:ext cx="1508760" cy="274320"/>
           </a:xfrm>
           <a:prstGeom prst="rect">
@@ -10648,7 +10545,7 @@
       </p:sp>
       <p:sp>
         <p:nvSpPr>
-          <p:cNvPr id="30" name="Shape 28"/>
+          <p:cNvPr id="27" name="Shape 25"/>
           <p:cNvSpPr/>
           <p:nvPr/>
         </p:nvSpPr>
@@ -10673,7 +10570,7 @@
       </p:sp>
       <p:sp>
         <p:nvSpPr>
-          <p:cNvPr id="31" name="Text 29"/>
+          <p:cNvPr id="28" name="Text 26"/>
           <p:cNvSpPr/>
           <p:nvPr/>
         </p:nvSpPr>
@@ -10712,7 +10609,7 @@
       </p:sp>
       <p:sp>
         <p:nvSpPr>
-          <p:cNvPr id="32" name="Text 30"/>
+          <p:cNvPr id="29" name="Text 27"/>
           <p:cNvSpPr/>
           <p:nvPr/>
         </p:nvSpPr>
@@ -10774,7 +10671,7 @@
       </p:sp>
       <p:sp>
         <p:nvSpPr>
-          <p:cNvPr id="33" name="Text 31"/>
+          <p:cNvPr id="30" name="Text 28"/>
           <p:cNvSpPr/>
           <p:nvPr/>
         </p:nvSpPr>
@@ -10813,7 +10710,7 @@
       </p:sp>
       <p:sp>
         <p:nvSpPr>
-          <p:cNvPr id="34" name="Shape 32"/>
+          <p:cNvPr id="31" name="Shape 29"/>
           <p:cNvSpPr/>
           <p:nvPr/>
         </p:nvSpPr>
@@ -10838,7 +10735,7 @@
       </p:sp>
       <p:sp>
         <p:nvSpPr>
-          <p:cNvPr id="35" name="Text 33"/>
+          <p:cNvPr id="32" name="Text 30"/>
           <p:cNvSpPr/>
           <p:nvPr/>
         </p:nvSpPr>
@@ -10880,7 +10777,7 @@
       </p:sp>
       <p:sp>
         <p:nvSpPr>
-          <p:cNvPr id="36" name="Text 34"/>
+          <p:cNvPr id="33" name="Text 31"/>
           <p:cNvSpPr/>
           <p:nvPr/>
         </p:nvSpPr>
@@ -10919,7 +10816,7 @@
       </p:sp>
       <p:sp>
         <p:nvSpPr>
-          <p:cNvPr id="37" name="Shape 35"/>
+          <p:cNvPr id="34" name="Shape 32"/>
           <p:cNvSpPr/>
           <p:nvPr/>
         </p:nvSpPr>
@@ -10944,7 +10841,7 @@
       </p:sp>
       <p:sp>
         <p:nvSpPr>
-          <p:cNvPr id="38" name="Text 36"/>
+          <p:cNvPr id="35" name="Text 33"/>
           <p:cNvSpPr/>
           <p:nvPr/>
         </p:nvSpPr>
@@ -10986,7 +10883,7 @@
       </p:sp>
       <p:sp>
         <p:nvSpPr>
-          <p:cNvPr id="39" name="Text 37"/>
+          <p:cNvPr id="36" name="Text 34"/>
           <p:cNvSpPr/>
           <p:nvPr/>
         </p:nvSpPr>
@@ -11025,7 +10922,7 @@
       </p:sp>
       <p:sp>
         <p:nvSpPr>
-          <p:cNvPr id="40" name="Shape 38"/>
+          <p:cNvPr id="37" name="Shape 35"/>
           <p:cNvSpPr/>
           <p:nvPr/>
         </p:nvSpPr>
@@ -11050,7 +10947,7 @@
       </p:sp>
       <p:sp>
         <p:nvSpPr>
-          <p:cNvPr id="41" name="Text 39"/>
+          <p:cNvPr id="38" name="Text 36"/>
           <p:cNvSpPr/>
           <p:nvPr/>
         </p:nvSpPr>
@@ -11092,7 +10989,7 @@
       </p:sp>
       <p:sp>
         <p:nvSpPr>
-          <p:cNvPr id="42" name="Text 40"/>
+          <p:cNvPr id="39" name="Text 37"/>
           <p:cNvSpPr/>
           <p:nvPr/>
         </p:nvSpPr>
@@ -11131,7 +11028,7 @@
       </p:sp>
       <p:sp>
         <p:nvSpPr>
-          <p:cNvPr id="43" name="Shape 41"/>
+          <p:cNvPr id="40" name="Shape 38"/>
           <p:cNvSpPr/>
           <p:nvPr/>
         </p:nvSpPr>
@@ -11156,7 +11053,7 @@
       </p:sp>
       <p:sp>
         <p:nvSpPr>
-          <p:cNvPr id="44" name="Text 42"/>
+          <p:cNvPr id="41" name="Text 39"/>
           <p:cNvSpPr/>
           <p:nvPr/>
         </p:nvSpPr>
@@ -11198,7 +11095,7 @@
       </p:sp>
       <p:sp>
         <p:nvSpPr>
-          <p:cNvPr id="45" name="Text 43"/>
+          <p:cNvPr id="42" name="Text 40"/>
           <p:cNvSpPr/>
           <p:nvPr/>
         </p:nvSpPr>
@@ -11237,7 +11134,7 @@
       </p:sp>
       <p:sp>
         <p:nvSpPr>
-          <p:cNvPr id="46" name="Shape 44"/>
+          <p:cNvPr id="43" name="Shape 41"/>
           <p:cNvSpPr/>
           <p:nvPr/>
         </p:nvSpPr>
@@ -11262,7 +11159,7 @@
       </p:sp>
       <p:sp>
         <p:nvSpPr>
-          <p:cNvPr id="47" name="Text 45"/>
+          <p:cNvPr id="44" name="Text 42"/>
           <p:cNvSpPr/>
           <p:nvPr/>
         </p:nvSpPr>
@@ -11304,7 +11201,7 @@
       </p:sp>
       <p:sp>
         <p:nvSpPr>
-          <p:cNvPr id="48" name="Shape 46"/>
+          <p:cNvPr id="45" name="Shape 43"/>
           <p:cNvSpPr/>
           <p:nvPr/>
         </p:nvSpPr>
@@ -11329,7 +11226,7 @@
       </p:sp>
       <p:sp>
         <p:nvSpPr>
-          <p:cNvPr id="49" name="Text 47"/>
+          <p:cNvPr id="46" name="Text 44"/>
           <p:cNvSpPr/>
           <p:nvPr/>
         </p:nvSpPr>
@@ -11368,7 +11265,7 @@
       </p:sp>
       <p:sp>
         <p:nvSpPr>
-          <p:cNvPr id="50" name="Text 48"/>
+          <p:cNvPr id="47" name="Text 45"/>
           <p:cNvSpPr/>
           <p:nvPr/>
         </p:nvSpPr>
@@ -11407,7 +11304,7 @@
       </p:sp>
       <p:pic>
         <p:nvPicPr>
-          <p:cNvPr id="51" name="Image 0" descr="./mdf_logo_white.png">    </p:cNvPr>
+          <p:cNvPr id="48" name="Image 0" descr="./mdf_logo_white.png">    </p:cNvPr>
           <p:cNvPicPr>
             <a:picLocks noChangeAspect="1"/>
           </p:cNvPicPr>
